--- a/content/05-teaching-resources/slides/core/08-testing.pptx
+++ b/content/05-teaching-resources/slides/core/08-testing.pptx
@@ -10,10 +10,16 @@
     <p:sldId id="258" r:id="rId9"/>
     <p:sldId id="259" r:id="rId10"/>
     <p:sldId id="260" r:id="rId11"/>
-    <p:sldId id="261" r:id="rId12"/>
+    <p:sldId id="261" r:id="rId13"/>
     <p:sldId id="262" r:id="rId14"/>
     <p:sldId id="263" r:id="rId15"/>
     <p:sldId id="264" r:id="rId16"/>
+    <p:sldId id="265" r:id="rId17"/>
+    <p:sldId id="266" r:id="rId18"/>
+    <p:sldId id="267" r:id="rId19"/>
+    <p:sldId id="268" r:id="rId20"/>
+    <p:sldId id="269" r:id="rId21"/>
+    <p:sldId id="270" r:id="rId22"/>
   </p:sldIdLst>
   <p:sldSz cx="12191695" cy="6858000" type="screen4x3"/>
   <p:notesSz cx="6858000" cy="9144000"/>
@@ -510,7 +516,22 @@
           <a:lstStyle/>
           <a:p>
             <a:r>
-              <a:t>Give students a few minutes to answer on mini whiteboards or paper, then reveal the answers on the next slide.</a:t>
+              <a:t>Answers:</a:t>
+            </a:r>
+          </a:p>
+          <a:p>
+            <a:r>
+              <a:t>1. One function or module on its own.</a:t>
+            </a:r>
+          </a:p>
+          <a:p>
+            <a:r>
+              <a:t>2. To check old features still work.</a:t>
+            </a:r>
+          </a:p>
+          <a:p>
+            <a:r>
+              <a:t>3. Closed uses only inputs and outputs; open uses knowledge of the code.</a:t>
             </a:r>
           </a:p>
         </p:txBody>
@@ -580,7 +601,22 @@
           <a:lstStyle/>
           <a:p>
             <a:r>
-              <a:t>Talk through any answers the class found difficult.</a:t>
+              <a:t>Answers:</a:t>
+            </a:r>
+          </a:p>
+          <a:p>
+            <a:r>
+              <a:t>1. Bugs often hide at the edges.</a:t>
+            </a:r>
+          </a:p>
+          <a:p>
+            <a:r>
+              <a:t>2. Any non-number, e.g. 'fifty'.</a:t>
+            </a:r>
+          </a:p>
+          <a:p>
+            <a:r>
+              <a:t>3. It should be rejected with a helpful message.</a:t>
             </a:r>
           </a:p>
         </p:txBody>
@@ -606,6 +642,231 @@
 </file>
 
 <file path=ppt/notesSlides/notesSlide3.xml><?xml version="1.0" encoding="utf-8"?>
+<p:notes xmlns:a="http://schemas.openxmlformats.org/drawingml/2006/main" xmlns:p="http://schemas.openxmlformats.org/presentationml/2006/main" xmlns:r="http://schemas.openxmlformats.org/officeDocument/2006/relationships">
+  <p:cSld>
+    <p:spTree>
+      <p:nvGrpSpPr>
+        <p:cNvPr id="1" name=""/>
+        <p:cNvGrpSpPr/>
+        <p:nvPr/>
+      </p:nvGrpSpPr>
+      <p:grpSpPr>
+        <a:xfrm>
+          <a:off x="0" y="0"/>
+          <a:ext cx="0" cy="0"/>
+          <a:chOff x="0" y="0"/>
+          <a:chExt cx="0" cy="0"/>
+        </a:xfrm>
+      </p:grpSpPr>
+      <p:sp>
+        <p:nvSpPr>
+          <p:cNvPr id="2" name="Slide Image Placeholder 1"/>
+          <p:cNvSpPr>
+            <a:spLocks noGrp="1"/>
+          </p:cNvSpPr>
+          <p:nvPr>
+            <p:ph type="sldImg" idx="2"/>
+          </p:nvPr>
+        </p:nvSpPr>
+        <p:spPr/>
+      </p:sp>
+      <p:sp>
+        <p:nvSpPr>
+          <p:cNvPr id="3" name="Notes Placeholder 2"/>
+          <p:cNvSpPr>
+            <a:spLocks noGrp="1"/>
+          </p:cNvSpPr>
+          <p:nvPr>
+            <p:ph type="body" idx="3" sz="quarter"/>
+          </p:nvPr>
+        </p:nvSpPr>
+        <p:spPr/>
+        <p:txBody>
+          <a:bodyPr/>
+          <a:lstStyle/>
+          <a:p>
+            <a:r>
+              <a:t>Answers:</a:t>
+            </a:r>
+          </a:p>
+          <a:p>
+            <a:r>
+              <a:t>1. So the actual result can be judged fairly.</a:t>
+            </a:r>
+          </a:p>
+          <a:p>
+            <a:r>
+              <a:t>2. Fix the bug and retest.</a:t>
+            </a:r>
+          </a:p>
+          <a:p>
+            <a:r>
+              <a:t>3. With scripts, macros or testing tools.</a:t>
+            </a:r>
+          </a:p>
+        </p:txBody>
+      </p:sp>
+      <p:sp>
+        <p:nvSpPr>
+          <p:cNvPr id="4" name="Slide Number Placeholder 3"/>
+          <p:cNvSpPr>
+            <a:spLocks noGrp="1"/>
+          </p:cNvSpPr>
+          <p:nvPr>
+            <p:ph type="sldNum" idx="5" sz="quarter"/>
+          </p:nvPr>
+        </p:nvSpPr>
+        <p:spPr/>
+      </p:sp>
+    </p:spTree>
+  </p:cSld>
+  <p:clrMapOvr>
+    <a:masterClrMapping/>
+  </p:clrMapOvr>
+</p:notes>
+</file>
+
+<file path=ppt/notesSlides/notesSlide4.xml><?xml version="1.0" encoding="utf-8"?>
+<p:notes xmlns:a="http://schemas.openxmlformats.org/drawingml/2006/main" xmlns:p="http://schemas.openxmlformats.org/presentationml/2006/main" xmlns:r="http://schemas.openxmlformats.org/officeDocument/2006/relationships">
+  <p:cSld>
+    <p:spTree>
+      <p:nvGrpSpPr>
+        <p:cNvPr id="1" name=""/>
+        <p:cNvGrpSpPr/>
+        <p:nvPr/>
+      </p:nvGrpSpPr>
+      <p:grpSpPr>
+        <a:xfrm>
+          <a:off x="0" y="0"/>
+          <a:ext cx="0" cy="0"/>
+          <a:chOff x="0" y="0"/>
+          <a:chExt cx="0" cy="0"/>
+        </a:xfrm>
+      </p:grpSpPr>
+      <p:sp>
+        <p:nvSpPr>
+          <p:cNvPr id="2" name="Slide Image Placeholder 1"/>
+          <p:cNvSpPr>
+            <a:spLocks noGrp="1"/>
+          </p:cNvSpPr>
+          <p:nvPr>
+            <p:ph type="sldImg" idx="2"/>
+          </p:nvPr>
+        </p:nvSpPr>
+        <p:spPr/>
+      </p:sp>
+      <p:sp>
+        <p:nvSpPr>
+          <p:cNvPr id="3" name="Notes Placeholder 2"/>
+          <p:cNvSpPr>
+            <a:spLocks noGrp="1"/>
+          </p:cNvSpPr>
+          <p:nvPr>
+            <p:ph type="body" idx="3" sz="quarter"/>
+          </p:nvPr>
+        </p:nvSpPr>
+        <p:spPr/>
+        <p:txBody>
+          <a:bodyPr/>
+          <a:lstStyle/>
+          <a:p>
+            <a:r>
+              <a:t>Give students a few minutes to answer on mini whiteboards or paper, then reveal the answers on the next slide.</a:t>
+            </a:r>
+          </a:p>
+        </p:txBody>
+      </p:sp>
+      <p:sp>
+        <p:nvSpPr>
+          <p:cNvPr id="4" name="Slide Number Placeholder 3"/>
+          <p:cNvSpPr>
+            <a:spLocks noGrp="1"/>
+          </p:cNvSpPr>
+          <p:nvPr>
+            <p:ph type="sldNum" idx="5" sz="quarter"/>
+          </p:nvPr>
+        </p:nvSpPr>
+        <p:spPr/>
+      </p:sp>
+    </p:spTree>
+  </p:cSld>
+  <p:clrMapOvr>
+    <a:masterClrMapping/>
+  </p:clrMapOvr>
+</p:notes>
+</file>
+
+<file path=ppt/notesSlides/notesSlide5.xml><?xml version="1.0" encoding="utf-8"?>
+<p:notes xmlns:a="http://schemas.openxmlformats.org/drawingml/2006/main" xmlns:p="http://schemas.openxmlformats.org/presentationml/2006/main" xmlns:r="http://schemas.openxmlformats.org/officeDocument/2006/relationships">
+  <p:cSld>
+    <p:spTree>
+      <p:nvGrpSpPr>
+        <p:cNvPr id="1" name=""/>
+        <p:cNvGrpSpPr/>
+        <p:nvPr/>
+      </p:nvGrpSpPr>
+      <p:grpSpPr>
+        <a:xfrm>
+          <a:off x="0" y="0"/>
+          <a:ext cx="0" cy="0"/>
+          <a:chOff x="0" y="0"/>
+          <a:chExt cx="0" cy="0"/>
+        </a:xfrm>
+      </p:grpSpPr>
+      <p:sp>
+        <p:nvSpPr>
+          <p:cNvPr id="2" name="Slide Image Placeholder 1"/>
+          <p:cNvSpPr>
+            <a:spLocks noGrp="1"/>
+          </p:cNvSpPr>
+          <p:nvPr>
+            <p:ph type="sldImg" idx="2"/>
+          </p:nvPr>
+        </p:nvSpPr>
+        <p:spPr/>
+      </p:sp>
+      <p:sp>
+        <p:nvSpPr>
+          <p:cNvPr id="3" name="Notes Placeholder 2"/>
+          <p:cNvSpPr>
+            <a:spLocks noGrp="1"/>
+          </p:cNvSpPr>
+          <p:nvPr>
+            <p:ph type="body" idx="3" sz="quarter"/>
+          </p:nvPr>
+        </p:nvSpPr>
+        <p:spPr/>
+        <p:txBody>
+          <a:bodyPr/>
+          <a:lstStyle/>
+          <a:p>
+            <a:r>
+              <a:t>Talk through any answers the class found difficult.</a:t>
+            </a:r>
+          </a:p>
+        </p:txBody>
+      </p:sp>
+      <p:sp>
+        <p:nvSpPr>
+          <p:cNvPr id="4" name="Slide Number Placeholder 3"/>
+          <p:cNvSpPr>
+            <a:spLocks noGrp="1"/>
+          </p:cNvSpPr>
+          <p:nvPr>
+            <p:ph type="sldNum" idx="5" sz="quarter"/>
+          </p:nvPr>
+        </p:nvSpPr>
+        <p:spPr/>
+      </p:sp>
+    </p:spTree>
+  </p:cSld>
+  <p:clrMapOvr>
+    <a:masterClrMapping/>
+  </p:clrMapOvr>
+</p:notes>
+</file>
+
+<file path=ppt/notesSlides/notesSlide6.xml><?xml version="1.0" encoding="utf-8"?>
 <p:notes xmlns:a="http://schemas.openxmlformats.org/drawingml/2006/main" xmlns:p="http://schemas.openxmlformats.org/presentationml/2006/main" xmlns:r="http://schemas.openxmlformats.org/officeDocument/2006/relationships">
   <p:cSld>
     <p:spTree>
@@ -3975,6 +4236,3852 @@
 </p:sld>
 </file>
 
+<file path=ppt/slides/slide10.xml><?xml version="1.0" encoding="utf-8"?>
+<p:sld xmlns:a="http://schemas.openxmlformats.org/drawingml/2006/main" xmlns:p="http://schemas.openxmlformats.org/presentationml/2006/main" xmlns:r="http://schemas.openxmlformats.org/officeDocument/2006/relationships">
+  <p:cSld>
+    <p:bg>
+      <p:bgPr>
+        <a:solidFill>
+          <a:srgbClr val="FFFFFF"/>
+        </a:solidFill>
+        <a:effectLst/>
+      </p:bgPr>
+    </p:bg>
+    <p:spTree>
+      <p:nvGrpSpPr>
+        <p:cNvPr id="1" name=""/>
+        <p:cNvGrpSpPr/>
+        <p:nvPr/>
+      </p:nvGrpSpPr>
+      <p:grpSpPr/>
+      <p:sp>
+        <p:nvSpPr>
+          <p:cNvPr id="2" name="TextBox 1"/>
+          <p:cNvSpPr txBox="1"/>
+          <p:nvPr/>
+        </p:nvSpPr>
+        <p:spPr>
+          <a:xfrm>
+            <a:off x="548640" y="320040"/>
+            <a:ext cx="11094415" cy="274320"/>
+          </a:xfrm>
+          <a:prstGeom prst="rect">
+            <a:avLst/>
+          </a:prstGeom>
+          <a:noFill/>
+        </p:spPr>
+        <p:txBody>
+          <a:bodyPr wrap="square" anchor="t" lIns="0" rIns="0" tIns="0" bIns="0"/>
+          <a:lstStyle/>
+          <a:p>
+            <a:pPr algn="l"/>
+            <a:r>
+              <a:rPr sz="1100" b="1" i="0">
+                <a:solidFill>
+                  <a:srgbClr val="54595D"/>
+                </a:solidFill>
+                <a:latin typeface="Calibri"/>
+              </a:rPr>
+              <a:t>CORE COMPONENT  ·  Core Paper 1</a:t>
+            </a:r>
+          </a:p>
+        </p:txBody>
+      </p:sp>
+      <p:sp>
+        <p:nvSpPr>
+          <p:cNvPr id="3" name="TextBox 2"/>
+          <p:cNvSpPr txBox="1"/>
+          <p:nvPr/>
+        </p:nvSpPr>
+        <p:spPr>
+          <a:xfrm>
+            <a:off x="548640" y="566928"/>
+            <a:ext cx="11094415" cy="822960"/>
+          </a:xfrm>
+          <a:prstGeom prst="rect">
+            <a:avLst/>
+          </a:prstGeom>
+          <a:noFill/>
+        </p:spPr>
+        <p:txBody>
+          <a:bodyPr wrap="square" anchor="ctr" lIns="0" rIns="0" tIns="0" bIns="0"/>
+          <a:lstStyle/>
+          <a:p>
+            <a:pPr algn="l"/>
+            <a:r>
+              <a:rPr sz="3200" b="1" i="0">
+                <a:solidFill>
+                  <a:srgbClr val="03306E"/>
+                </a:solidFill>
+                <a:latin typeface="Cambria"/>
+              </a:rPr>
+              <a:t>Structure of a test plan</a:t>
+            </a:r>
+          </a:p>
+        </p:txBody>
+      </p:sp>
+      <p:sp>
+        <p:nvSpPr>
+          <p:cNvPr id="4" name="TextBox 3"/>
+          <p:cNvSpPr txBox="1"/>
+          <p:nvPr/>
+        </p:nvSpPr>
+        <p:spPr>
+          <a:xfrm>
+            <a:off x="548640" y="6446520"/>
+            <a:ext cx="8229600" cy="274320"/>
+          </a:xfrm>
+          <a:prstGeom prst="rect">
+            <a:avLst/>
+          </a:prstGeom>
+          <a:noFill/>
+        </p:spPr>
+        <p:txBody>
+          <a:bodyPr wrap="square" anchor="t" lIns="0" rIns="0" tIns="0" bIns="0"/>
+          <a:lstStyle/>
+          <a:p>
+            <a:pPr algn="l"/>
+            <a:r>
+              <a:rPr sz="1000" b="0" i="0">
+                <a:solidFill>
+                  <a:srgbClr val="54595D"/>
+                </a:solidFill>
+                <a:latin typeface="Calibri"/>
+              </a:rPr>
+              <a:t>Digital Software Development T Level  ·  Testing</a:t>
+            </a:r>
+          </a:p>
+        </p:txBody>
+      </p:sp>
+      <p:sp>
+        <p:nvSpPr>
+          <p:cNvPr id="5" name="TextBox 4"/>
+          <p:cNvSpPr txBox="1"/>
+          <p:nvPr/>
+        </p:nvSpPr>
+        <p:spPr>
+          <a:xfrm>
+            <a:off x="10728655" y="6446520"/>
+            <a:ext cx="914400" cy="274320"/>
+          </a:xfrm>
+          <a:prstGeom prst="rect">
+            <a:avLst/>
+          </a:prstGeom>
+          <a:noFill/>
+        </p:spPr>
+        <p:txBody>
+          <a:bodyPr wrap="square" anchor="t" lIns="0" rIns="0" tIns="0" bIns="0"/>
+          <a:lstStyle/>
+          <a:p>
+            <a:pPr algn="r"/>
+            <a:r>
+              <a:rPr sz="1000" b="0" i="0">
+                <a:solidFill>
+                  <a:srgbClr val="54595D"/>
+                </a:solidFill>
+                <a:latin typeface="Calibri"/>
+              </a:rPr>
+              <a:t>10</a:t>
+            </a:r>
+          </a:p>
+        </p:txBody>
+      </p:sp>
+      <p:sp>
+        <p:nvSpPr>
+          <p:cNvPr id="6" name="Rectangle 5"/>
+          <p:cNvSpPr/>
+          <p:nvPr/>
+        </p:nvSpPr>
+        <p:spPr>
+          <a:xfrm>
+            <a:off x="1603217" y="2519172"/>
+            <a:ext cx="8985260" cy="36576"/>
+          </a:xfrm>
+          <a:prstGeom prst="rect">
+            <a:avLst/>
+          </a:prstGeom>
+          <a:solidFill>
+            <a:srgbClr val="A9C8F0"/>
+          </a:solidFill>
+          <a:ln>
+            <a:noFill/>
+          </a:ln>
+          <a:effectLst/>
+        </p:spPr>
+        <p:style>
+          <a:lnRef idx="1">
+            <a:schemeClr val="accent1"/>
+          </a:lnRef>
+          <a:fillRef idx="3">
+            <a:schemeClr val="accent1"/>
+          </a:fillRef>
+          <a:effectRef idx="2">
+            <a:schemeClr val="accent1"/>
+          </a:effectRef>
+          <a:fontRef idx="minor">
+            <a:schemeClr val="lt1"/>
+          </a:fontRef>
+        </p:style>
+        <p:txBody>
+          <a:bodyPr rtlCol="0" anchor="ctr"/>
+          <a:lstStyle/>
+          <a:p/>
+        </p:txBody>
+      </p:sp>
+      <p:sp>
+        <p:nvSpPr>
+          <p:cNvPr id="7" name="Oval 6"/>
+          <p:cNvSpPr/>
+          <p:nvPr/>
+        </p:nvSpPr>
+        <p:spPr>
+          <a:xfrm>
+            <a:off x="1283177" y="2217420"/>
+            <a:ext cx="640080" cy="640080"/>
+          </a:xfrm>
+          <a:prstGeom prst="ellipse">
+            <a:avLst/>
+          </a:prstGeom>
+          <a:solidFill>
+            <a:srgbClr val="F2B705"/>
+          </a:solidFill>
+          <a:ln>
+            <a:noFill/>
+          </a:ln>
+          <a:effectLst/>
+        </p:spPr>
+        <p:style>
+          <a:lnRef idx="1">
+            <a:schemeClr val="accent1"/>
+          </a:lnRef>
+          <a:fillRef idx="3">
+            <a:schemeClr val="accent1"/>
+          </a:fillRef>
+          <a:effectRef idx="2">
+            <a:schemeClr val="accent1"/>
+          </a:effectRef>
+          <a:fontRef idx="minor">
+            <a:schemeClr val="lt1"/>
+          </a:fontRef>
+        </p:style>
+        <p:txBody>
+          <a:bodyPr rtlCol="0" anchor="ctr" lIns="0" rIns="0" tIns="0" bIns="0"/>
+          <a:lstStyle/>
+          <a:p>
+            <a:pPr algn="ctr"/>
+            <a:r>
+              <a:rPr sz="2000" b="1">
+                <a:solidFill>
+                  <a:srgbClr val="202122"/>
+                </a:solidFill>
+                <a:latin typeface="Calibri"/>
+              </a:rPr>
+              <a:t>1</a:t>
+            </a:r>
+          </a:p>
+        </p:txBody>
+      </p:sp>
+      <p:sp>
+        <p:nvSpPr>
+          <p:cNvPr id="8" name="TextBox 7"/>
+          <p:cNvSpPr txBox="1"/>
+          <p:nvPr/>
+        </p:nvSpPr>
+        <p:spPr>
+          <a:xfrm>
+            <a:off x="548640" y="2994660"/>
+            <a:ext cx="2109155" cy="731520"/>
+          </a:xfrm>
+          <a:prstGeom prst="rect">
+            <a:avLst/>
+          </a:prstGeom>
+          <a:noFill/>
+        </p:spPr>
+        <p:txBody>
+          <a:bodyPr wrap="square" anchor="t" lIns="0" rIns="0" tIns="0" bIns="0"/>
+          <a:lstStyle/>
+          <a:p>
+            <a:pPr algn="ctr"/>
+            <a:r>
+              <a:rPr sz="1700" b="1" i="0">
+                <a:solidFill>
+                  <a:srgbClr val="03306E"/>
+                </a:solidFill>
+                <a:latin typeface="Calibri"/>
+              </a:rPr>
+              <a:t>Identify tests</a:t>
+            </a:r>
+          </a:p>
+        </p:txBody>
+      </p:sp>
+      <p:sp>
+        <p:nvSpPr>
+          <p:cNvPr id="9" name="Rounded Rectangle 8"/>
+          <p:cNvSpPr/>
+          <p:nvPr/>
+        </p:nvSpPr>
+        <p:spPr>
+          <a:xfrm>
+            <a:off x="548640" y="3771900"/>
+            <a:ext cx="2109155" cy="960120"/>
+          </a:xfrm>
+          <a:prstGeom prst="roundRect">
+            <a:avLst>
+              <a:gd name="adj" fmla="val 6000"/>
+            </a:avLst>
+          </a:prstGeom>
+          <a:solidFill>
+            <a:srgbClr val="EAF3FF"/>
+          </a:solidFill>
+          <a:ln>
+            <a:noFill/>
+          </a:ln>
+          <a:effectLst/>
+        </p:spPr>
+        <p:style>
+          <a:lnRef idx="1">
+            <a:schemeClr val="accent1"/>
+          </a:lnRef>
+          <a:fillRef idx="3">
+            <a:schemeClr val="accent1"/>
+          </a:fillRef>
+          <a:effectRef idx="2">
+            <a:schemeClr val="accent1"/>
+          </a:effectRef>
+          <a:fontRef idx="minor">
+            <a:schemeClr val="lt1"/>
+          </a:fontRef>
+        </p:style>
+        <p:txBody>
+          <a:bodyPr rtlCol="0" anchor="ctr"/>
+          <a:lstStyle/>
+          <a:p/>
+        </p:txBody>
+      </p:sp>
+      <p:sp>
+        <p:nvSpPr>
+          <p:cNvPr id="10" name="TextBox 9"/>
+          <p:cNvSpPr txBox="1"/>
+          <p:nvPr/>
+        </p:nvSpPr>
+        <p:spPr>
+          <a:xfrm>
+            <a:off x="685800" y="3909060"/>
+            <a:ext cx="1834835" cy="685800"/>
+          </a:xfrm>
+          <a:prstGeom prst="rect">
+            <a:avLst/>
+          </a:prstGeom>
+          <a:noFill/>
+        </p:spPr>
+        <p:txBody>
+          <a:bodyPr wrap="square" anchor="t" lIns="0" rIns="0" tIns="0" bIns="0"/>
+          <a:lstStyle/>
+          <a:p>
+            <a:pPr algn="l"/>
+            <a:r>
+              <a:rPr sz="1800" b="0" i="0">
+                <a:solidFill>
+                  <a:srgbClr val="202122"/>
+                </a:solidFill>
+                <a:latin typeface="Calibri"/>
+              </a:rPr>
+              <a:t>What will be tested.</a:t>
+            </a:r>
+          </a:p>
+        </p:txBody>
+      </p:sp>
+      <p:sp>
+        <p:nvSpPr>
+          <p:cNvPr id="11" name="Oval 10"/>
+          <p:cNvSpPr/>
+          <p:nvPr/>
+        </p:nvSpPr>
+        <p:spPr>
+          <a:xfrm>
+            <a:off x="3529492" y="2217420"/>
+            <a:ext cx="640080" cy="640080"/>
+          </a:xfrm>
+          <a:prstGeom prst="ellipse">
+            <a:avLst/>
+          </a:prstGeom>
+          <a:solidFill>
+            <a:srgbClr val="F2B705"/>
+          </a:solidFill>
+          <a:ln>
+            <a:noFill/>
+          </a:ln>
+          <a:effectLst/>
+        </p:spPr>
+        <p:style>
+          <a:lnRef idx="1">
+            <a:schemeClr val="accent1"/>
+          </a:lnRef>
+          <a:fillRef idx="3">
+            <a:schemeClr val="accent1"/>
+          </a:fillRef>
+          <a:effectRef idx="2">
+            <a:schemeClr val="accent1"/>
+          </a:effectRef>
+          <a:fontRef idx="minor">
+            <a:schemeClr val="lt1"/>
+          </a:fontRef>
+        </p:style>
+        <p:txBody>
+          <a:bodyPr rtlCol="0" anchor="ctr" lIns="0" rIns="0" tIns="0" bIns="0"/>
+          <a:lstStyle/>
+          <a:p>
+            <a:pPr algn="ctr"/>
+            <a:r>
+              <a:rPr sz="2000" b="1">
+                <a:solidFill>
+                  <a:srgbClr val="202122"/>
+                </a:solidFill>
+                <a:latin typeface="Calibri"/>
+              </a:rPr>
+              <a:t>2</a:t>
+            </a:r>
+          </a:p>
+        </p:txBody>
+      </p:sp>
+      <p:sp>
+        <p:nvSpPr>
+          <p:cNvPr id="12" name="TextBox 11"/>
+          <p:cNvSpPr txBox="1"/>
+          <p:nvPr/>
+        </p:nvSpPr>
+        <p:spPr>
+          <a:xfrm>
+            <a:off x="2794955" y="2994660"/>
+            <a:ext cx="2109155" cy="731520"/>
+          </a:xfrm>
+          <a:prstGeom prst="rect">
+            <a:avLst/>
+          </a:prstGeom>
+          <a:noFill/>
+        </p:spPr>
+        <p:txBody>
+          <a:bodyPr wrap="square" anchor="t" lIns="0" rIns="0" tIns="0" bIns="0"/>
+          <a:lstStyle/>
+          <a:p>
+            <a:pPr algn="ctr"/>
+            <a:r>
+              <a:rPr sz="1700" b="1" i="0">
+                <a:solidFill>
+                  <a:srgbClr val="03306E"/>
+                </a:solidFill>
+                <a:latin typeface="Calibri"/>
+              </a:rPr>
+              <a:t>Purpose</a:t>
+            </a:r>
+          </a:p>
+        </p:txBody>
+      </p:sp>
+      <p:sp>
+        <p:nvSpPr>
+          <p:cNvPr id="13" name="Rounded Rectangle 12"/>
+          <p:cNvSpPr/>
+          <p:nvPr/>
+        </p:nvSpPr>
+        <p:spPr>
+          <a:xfrm>
+            <a:off x="2794955" y="3771900"/>
+            <a:ext cx="2109155" cy="960120"/>
+          </a:xfrm>
+          <a:prstGeom prst="roundRect">
+            <a:avLst>
+              <a:gd name="adj" fmla="val 6000"/>
+            </a:avLst>
+          </a:prstGeom>
+          <a:solidFill>
+            <a:srgbClr val="EAF3FF"/>
+          </a:solidFill>
+          <a:ln>
+            <a:noFill/>
+          </a:ln>
+          <a:effectLst/>
+        </p:spPr>
+        <p:style>
+          <a:lnRef idx="1">
+            <a:schemeClr val="accent1"/>
+          </a:lnRef>
+          <a:fillRef idx="3">
+            <a:schemeClr val="accent1"/>
+          </a:fillRef>
+          <a:effectRef idx="2">
+            <a:schemeClr val="accent1"/>
+          </a:effectRef>
+          <a:fontRef idx="minor">
+            <a:schemeClr val="lt1"/>
+          </a:fontRef>
+        </p:style>
+        <p:txBody>
+          <a:bodyPr rtlCol="0" anchor="ctr"/>
+          <a:lstStyle/>
+          <a:p/>
+        </p:txBody>
+      </p:sp>
+      <p:sp>
+        <p:nvSpPr>
+          <p:cNvPr id="14" name="TextBox 13"/>
+          <p:cNvSpPr txBox="1"/>
+          <p:nvPr/>
+        </p:nvSpPr>
+        <p:spPr>
+          <a:xfrm>
+            <a:off x="2932115" y="3909060"/>
+            <a:ext cx="1834835" cy="685800"/>
+          </a:xfrm>
+          <a:prstGeom prst="rect">
+            <a:avLst/>
+          </a:prstGeom>
+          <a:noFill/>
+        </p:spPr>
+        <p:txBody>
+          <a:bodyPr wrap="square" anchor="t" lIns="0" rIns="0" tIns="0" bIns="0"/>
+          <a:lstStyle/>
+          <a:p>
+            <a:pPr algn="l"/>
+            <a:r>
+              <a:rPr sz="1800" b="0" i="0">
+                <a:solidFill>
+                  <a:srgbClr val="202122"/>
+                </a:solidFill>
+                <a:latin typeface="Calibri"/>
+              </a:rPr>
+              <a:t>Why each test matters.</a:t>
+            </a:r>
+          </a:p>
+        </p:txBody>
+      </p:sp>
+      <p:sp>
+        <p:nvSpPr>
+          <p:cNvPr id="15" name="Oval 14"/>
+          <p:cNvSpPr/>
+          <p:nvPr/>
+        </p:nvSpPr>
+        <p:spPr>
+          <a:xfrm>
+            <a:off x="5775807" y="2217420"/>
+            <a:ext cx="640080" cy="640080"/>
+          </a:xfrm>
+          <a:prstGeom prst="ellipse">
+            <a:avLst/>
+          </a:prstGeom>
+          <a:solidFill>
+            <a:srgbClr val="F2B705"/>
+          </a:solidFill>
+          <a:ln>
+            <a:noFill/>
+          </a:ln>
+          <a:effectLst/>
+        </p:spPr>
+        <p:style>
+          <a:lnRef idx="1">
+            <a:schemeClr val="accent1"/>
+          </a:lnRef>
+          <a:fillRef idx="3">
+            <a:schemeClr val="accent1"/>
+          </a:fillRef>
+          <a:effectRef idx="2">
+            <a:schemeClr val="accent1"/>
+          </a:effectRef>
+          <a:fontRef idx="minor">
+            <a:schemeClr val="lt1"/>
+          </a:fontRef>
+        </p:style>
+        <p:txBody>
+          <a:bodyPr rtlCol="0" anchor="ctr" lIns="0" rIns="0" tIns="0" bIns="0"/>
+          <a:lstStyle/>
+          <a:p>
+            <a:pPr algn="ctr"/>
+            <a:r>
+              <a:rPr sz="2000" b="1">
+                <a:solidFill>
+                  <a:srgbClr val="202122"/>
+                </a:solidFill>
+                <a:latin typeface="Calibri"/>
+              </a:rPr>
+              <a:t>3</a:t>
+            </a:r>
+          </a:p>
+        </p:txBody>
+      </p:sp>
+      <p:sp>
+        <p:nvSpPr>
+          <p:cNvPr id="16" name="TextBox 15"/>
+          <p:cNvSpPr txBox="1"/>
+          <p:nvPr/>
+        </p:nvSpPr>
+        <p:spPr>
+          <a:xfrm>
+            <a:off x="5041270" y="2994660"/>
+            <a:ext cx="2109155" cy="731520"/>
+          </a:xfrm>
+          <a:prstGeom prst="rect">
+            <a:avLst/>
+          </a:prstGeom>
+          <a:noFill/>
+        </p:spPr>
+        <p:txBody>
+          <a:bodyPr wrap="square" anchor="t" lIns="0" rIns="0" tIns="0" bIns="0"/>
+          <a:lstStyle/>
+          <a:p>
+            <a:pPr algn="ctr"/>
+            <a:r>
+              <a:rPr sz="1700" b="1" i="0">
+                <a:solidFill>
+                  <a:srgbClr val="03306E"/>
+                </a:solidFill>
+                <a:latin typeface="Calibri"/>
+              </a:rPr>
+              <a:t>Test data</a:t>
+            </a:r>
+          </a:p>
+        </p:txBody>
+      </p:sp>
+      <p:sp>
+        <p:nvSpPr>
+          <p:cNvPr id="17" name="Rounded Rectangle 16"/>
+          <p:cNvSpPr/>
+          <p:nvPr/>
+        </p:nvSpPr>
+        <p:spPr>
+          <a:xfrm>
+            <a:off x="5041270" y="3771900"/>
+            <a:ext cx="2109155" cy="960120"/>
+          </a:xfrm>
+          <a:prstGeom prst="roundRect">
+            <a:avLst>
+              <a:gd name="adj" fmla="val 6000"/>
+            </a:avLst>
+          </a:prstGeom>
+          <a:solidFill>
+            <a:srgbClr val="EAF3FF"/>
+          </a:solidFill>
+          <a:ln>
+            <a:noFill/>
+          </a:ln>
+          <a:effectLst/>
+        </p:spPr>
+        <p:style>
+          <a:lnRef idx="1">
+            <a:schemeClr val="accent1"/>
+          </a:lnRef>
+          <a:fillRef idx="3">
+            <a:schemeClr val="accent1"/>
+          </a:fillRef>
+          <a:effectRef idx="2">
+            <a:schemeClr val="accent1"/>
+          </a:effectRef>
+          <a:fontRef idx="minor">
+            <a:schemeClr val="lt1"/>
+          </a:fontRef>
+        </p:style>
+        <p:txBody>
+          <a:bodyPr rtlCol="0" anchor="ctr"/>
+          <a:lstStyle/>
+          <a:p/>
+        </p:txBody>
+      </p:sp>
+      <p:sp>
+        <p:nvSpPr>
+          <p:cNvPr id="18" name="TextBox 17"/>
+          <p:cNvSpPr txBox="1"/>
+          <p:nvPr/>
+        </p:nvSpPr>
+        <p:spPr>
+          <a:xfrm>
+            <a:off x="5178430" y="3909060"/>
+            <a:ext cx="1834835" cy="685800"/>
+          </a:xfrm>
+          <a:prstGeom prst="rect">
+            <a:avLst/>
+          </a:prstGeom>
+          <a:noFill/>
+        </p:spPr>
+        <p:txBody>
+          <a:bodyPr wrap="square" anchor="t" lIns="0" rIns="0" tIns="0" bIns="0"/>
+          <a:lstStyle/>
+          <a:p>
+            <a:pPr algn="l"/>
+            <a:r>
+              <a:rPr sz="1800" b="0" i="0">
+                <a:solidFill>
+                  <a:srgbClr val="202122"/>
+                </a:solidFill>
+                <a:latin typeface="Calibri"/>
+              </a:rPr>
+              <a:t>The data to use.</a:t>
+            </a:r>
+          </a:p>
+        </p:txBody>
+      </p:sp>
+      <p:sp>
+        <p:nvSpPr>
+          <p:cNvPr id="19" name="Oval 18"/>
+          <p:cNvSpPr/>
+          <p:nvPr/>
+        </p:nvSpPr>
+        <p:spPr>
+          <a:xfrm>
+            <a:off x="8022122" y="2217420"/>
+            <a:ext cx="640080" cy="640080"/>
+          </a:xfrm>
+          <a:prstGeom prst="ellipse">
+            <a:avLst/>
+          </a:prstGeom>
+          <a:solidFill>
+            <a:srgbClr val="F2B705"/>
+          </a:solidFill>
+          <a:ln>
+            <a:noFill/>
+          </a:ln>
+          <a:effectLst/>
+        </p:spPr>
+        <p:style>
+          <a:lnRef idx="1">
+            <a:schemeClr val="accent1"/>
+          </a:lnRef>
+          <a:fillRef idx="3">
+            <a:schemeClr val="accent1"/>
+          </a:fillRef>
+          <a:effectRef idx="2">
+            <a:schemeClr val="accent1"/>
+          </a:effectRef>
+          <a:fontRef idx="minor">
+            <a:schemeClr val="lt1"/>
+          </a:fontRef>
+        </p:style>
+        <p:txBody>
+          <a:bodyPr rtlCol="0" anchor="ctr" lIns="0" rIns="0" tIns="0" bIns="0"/>
+          <a:lstStyle/>
+          <a:p>
+            <a:pPr algn="ctr"/>
+            <a:r>
+              <a:rPr sz="2000" b="1">
+                <a:solidFill>
+                  <a:srgbClr val="202122"/>
+                </a:solidFill>
+                <a:latin typeface="Calibri"/>
+              </a:rPr>
+              <a:t>4</a:t>
+            </a:r>
+          </a:p>
+        </p:txBody>
+      </p:sp>
+      <p:sp>
+        <p:nvSpPr>
+          <p:cNvPr id="20" name="TextBox 19"/>
+          <p:cNvSpPr txBox="1"/>
+          <p:nvPr/>
+        </p:nvSpPr>
+        <p:spPr>
+          <a:xfrm>
+            <a:off x="7287585" y="2994660"/>
+            <a:ext cx="2109155" cy="731520"/>
+          </a:xfrm>
+          <a:prstGeom prst="rect">
+            <a:avLst/>
+          </a:prstGeom>
+          <a:noFill/>
+        </p:spPr>
+        <p:txBody>
+          <a:bodyPr wrap="square" anchor="t" lIns="0" rIns="0" tIns="0" bIns="0"/>
+          <a:lstStyle/>
+          <a:p>
+            <a:pPr algn="ctr"/>
+            <a:r>
+              <a:rPr sz="1700" b="1" i="0">
+                <a:solidFill>
+                  <a:srgbClr val="03306E"/>
+                </a:solidFill>
+                <a:latin typeface="Calibri"/>
+              </a:rPr>
+              <a:t>Expected result</a:t>
+            </a:r>
+          </a:p>
+        </p:txBody>
+      </p:sp>
+      <p:sp>
+        <p:nvSpPr>
+          <p:cNvPr id="21" name="Rounded Rectangle 20"/>
+          <p:cNvSpPr/>
+          <p:nvPr/>
+        </p:nvSpPr>
+        <p:spPr>
+          <a:xfrm>
+            <a:off x="7287585" y="3771900"/>
+            <a:ext cx="2109155" cy="960120"/>
+          </a:xfrm>
+          <a:prstGeom prst="roundRect">
+            <a:avLst>
+              <a:gd name="adj" fmla="val 6000"/>
+            </a:avLst>
+          </a:prstGeom>
+          <a:solidFill>
+            <a:srgbClr val="EAF3FF"/>
+          </a:solidFill>
+          <a:ln>
+            <a:noFill/>
+          </a:ln>
+          <a:effectLst/>
+        </p:spPr>
+        <p:style>
+          <a:lnRef idx="1">
+            <a:schemeClr val="accent1"/>
+          </a:lnRef>
+          <a:fillRef idx="3">
+            <a:schemeClr val="accent1"/>
+          </a:fillRef>
+          <a:effectRef idx="2">
+            <a:schemeClr val="accent1"/>
+          </a:effectRef>
+          <a:fontRef idx="minor">
+            <a:schemeClr val="lt1"/>
+          </a:fontRef>
+        </p:style>
+        <p:txBody>
+          <a:bodyPr rtlCol="0" anchor="ctr"/>
+          <a:lstStyle/>
+          <a:p/>
+        </p:txBody>
+      </p:sp>
+      <p:sp>
+        <p:nvSpPr>
+          <p:cNvPr id="22" name="TextBox 21"/>
+          <p:cNvSpPr txBox="1"/>
+          <p:nvPr/>
+        </p:nvSpPr>
+        <p:spPr>
+          <a:xfrm>
+            <a:off x="7424745" y="3909060"/>
+            <a:ext cx="1834835" cy="685800"/>
+          </a:xfrm>
+          <a:prstGeom prst="rect">
+            <a:avLst/>
+          </a:prstGeom>
+          <a:noFill/>
+        </p:spPr>
+        <p:txBody>
+          <a:bodyPr wrap="square" anchor="t" lIns="0" rIns="0" tIns="0" bIns="0"/>
+          <a:lstStyle/>
+          <a:p>
+            <a:pPr algn="l"/>
+            <a:r>
+              <a:rPr sz="1800" b="0" i="0">
+                <a:solidFill>
+                  <a:srgbClr val="202122"/>
+                </a:solidFill>
+                <a:latin typeface="Calibri"/>
+              </a:rPr>
+              <a:t>What should happen.</a:t>
+            </a:r>
+          </a:p>
+        </p:txBody>
+      </p:sp>
+      <p:sp>
+        <p:nvSpPr>
+          <p:cNvPr id="23" name="Oval 22"/>
+          <p:cNvSpPr/>
+          <p:nvPr/>
+        </p:nvSpPr>
+        <p:spPr>
+          <a:xfrm>
+            <a:off x="10268437" y="2217420"/>
+            <a:ext cx="640080" cy="640080"/>
+          </a:xfrm>
+          <a:prstGeom prst="ellipse">
+            <a:avLst/>
+          </a:prstGeom>
+          <a:solidFill>
+            <a:srgbClr val="F2B705"/>
+          </a:solidFill>
+          <a:ln>
+            <a:noFill/>
+          </a:ln>
+          <a:effectLst/>
+        </p:spPr>
+        <p:style>
+          <a:lnRef idx="1">
+            <a:schemeClr val="accent1"/>
+          </a:lnRef>
+          <a:fillRef idx="3">
+            <a:schemeClr val="accent1"/>
+          </a:fillRef>
+          <a:effectRef idx="2">
+            <a:schemeClr val="accent1"/>
+          </a:effectRef>
+          <a:fontRef idx="minor">
+            <a:schemeClr val="lt1"/>
+          </a:fontRef>
+        </p:style>
+        <p:txBody>
+          <a:bodyPr rtlCol="0" anchor="ctr" lIns="0" rIns="0" tIns="0" bIns="0"/>
+          <a:lstStyle/>
+          <a:p>
+            <a:pPr algn="ctr"/>
+            <a:r>
+              <a:rPr sz="2000" b="1">
+                <a:solidFill>
+                  <a:srgbClr val="202122"/>
+                </a:solidFill>
+                <a:latin typeface="Calibri"/>
+              </a:rPr>
+              <a:t>5</a:t>
+            </a:r>
+          </a:p>
+        </p:txBody>
+      </p:sp>
+      <p:sp>
+        <p:nvSpPr>
+          <p:cNvPr id="24" name="TextBox 23"/>
+          <p:cNvSpPr txBox="1"/>
+          <p:nvPr/>
+        </p:nvSpPr>
+        <p:spPr>
+          <a:xfrm>
+            <a:off x="9533900" y="2994660"/>
+            <a:ext cx="2109155" cy="731520"/>
+          </a:xfrm>
+          <a:prstGeom prst="rect">
+            <a:avLst/>
+          </a:prstGeom>
+          <a:noFill/>
+        </p:spPr>
+        <p:txBody>
+          <a:bodyPr wrap="square" anchor="t" lIns="0" rIns="0" tIns="0" bIns="0"/>
+          <a:lstStyle/>
+          <a:p>
+            <a:pPr algn="ctr"/>
+            <a:r>
+              <a:rPr sz="1700" b="1" i="0">
+                <a:solidFill>
+                  <a:srgbClr val="03306E"/>
+                </a:solidFill>
+                <a:latin typeface="Calibri"/>
+              </a:rPr>
+              <a:t>Actual result</a:t>
+            </a:r>
+          </a:p>
+        </p:txBody>
+      </p:sp>
+      <p:sp>
+        <p:nvSpPr>
+          <p:cNvPr id="25" name="Rounded Rectangle 24"/>
+          <p:cNvSpPr/>
+          <p:nvPr/>
+        </p:nvSpPr>
+        <p:spPr>
+          <a:xfrm>
+            <a:off x="9533900" y="3771900"/>
+            <a:ext cx="2109155" cy="960120"/>
+          </a:xfrm>
+          <a:prstGeom prst="roundRect">
+            <a:avLst>
+              <a:gd name="adj" fmla="val 6000"/>
+            </a:avLst>
+          </a:prstGeom>
+          <a:solidFill>
+            <a:srgbClr val="EAF3FF"/>
+          </a:solidFill>
+          <a:ln>
+            <a:noFill/>
+          </a:ln>
+          <a:effectLst/>
+        </p:spPr>
+        <p:style>
+          <a:lnRef idx="1">
+            <a:schemeClr val="accent1"/>
+          </a:lnRef>
+          <a:fillRef idx="3">
+            <a:schemeClr val="accent1"/>
+          </a:fillRef>
+          <a:effectRef idx="2">
+            <a:schemeClr val="accent1"/>
+          </a:effectRef>
+          <a:fontRef idx="minor">
+            <a:schemeClr val="lt1"/>
+          </a:fontRef>
+        </p:style>
+        <p:txBody>
+          <a:bodyPr rtlCol="0" anchor="ctr"/>
+          <a:lstStyle/>
+          <a:p/>
+        </p:txBody>
+      </p:sp>
+      <p:sp>
+        <p:nvSpPr>
+          <p:cNvPr id="26" name="TextBox 25"/>
+          <p:cNvSpPr txBox="1"/>
+          <p:nvPr/>
+        </p:nvSpPr>
+        <p:spPr>
+          <a:xfrm>
+            <a:off x="9671060" y="3909060"/>
+            <a:ext cx="1834835" cy="685800"/>
+          </a:xfrm>
+          <a:prstGeom prst="rect">
+            <a:avLst/>
+          </a:prstGeom>
+          <a:noFill/>
+        </p:spPr>
+        <p:txBody>
+          <a:bodyPr wrap="square" anchor="t" lIns="0" rIns="0" tIns="0" bIns="0"/>
+          <a:lstStyle/>
+          <a:p>
+            <a:pPr algn="l"/>
+            <a:r>
+              <a:rPr sz="1800" b="0" i="0">
+                <a:solidFill>
+                  <a:srgbClr val="202122"/>
+                </a:solidFill>
+                <a:latin typeface="Calibri"/>
+              </a:rPr>
+              <a:t>What really happened.</a:t>
+            </a:r>
+          </a:p>
+        </p:txBody>
+      </p:sp>
+      <p:sp>
+        <p:nvSpPr>
+          <p:cNvPr id="27" name="TextBox 26"/>
+          <p:cNvSpPr txBox="1"/>
+          <p:nvPr/>
+        </p:nvSpPr>
+        <p:spPr>
+          <a:xfrm>
+            <a:off x="548640" y="5006340"/>
+            <a:ext cx="11094415" cy="548640"/>
+          </a:xfrm>
+          <a:prstGeom prst="rect">
+            <a:avLst/>
+          </a:prstGeom>
+          <a:noFill/>
+        </p:spPr>
+        <p:txBody>
+          <a:bodyPr wrap="square" anchor="t" lIns="0" rIns="0" tIns="0" bIns="0"/>
+          <a:lstStyle/>
+          <a:p>
+            <a:pPr algn="l"/>
+            <a:r>
+              <a:rPr sz="1600" b="0" i="1">
+                <a:solidFill>
+                  <a:srgbClr val="54595D"/>
+                </a:solidFill>
+                <a:latin typeface="Calibri"/>
+              </a:rPr>
+              <a:t>Automation: macros, scripts and functional testing tools can rerun tests after every change.</a:t>
+            </a:r>
+          </a:p>
+        </p:txBody>
+      </p:sp>
+    </p:spTree>
+  </p:cSld>
+  <p:clrMapOvr>
+    <a:masterClrMapping/>
+  </p:clrMapOvr>
+</p:sld>
+</file>
+
+<file path=ppt/slides/slide11.xml><?xml version="1.0" encoding="utf-8"?>
+<p:sld xmlns:a="http://schemas.openxmlformats.org/drawingml/2006/main" xmlns:p="http://schemas.openxmlformats.org/presentationml/2006/main" xmlns:r="http://schemas.openxmlformats.org/officeDocument/2006/relationships">
+  <p:cSld>
+    <p:bg>
+      <p:bgPr>
+        <a:solidFill>
+          <a:srgbClr val="FFFFFF"/>
+        </a:solidFill>
+        <a:effectLst/>
+      </p:bgPr>
+    </p:bg>
+    <p:spTree>
+      <p:nvGrpSpPr>
+        <p:cNvPr id="1" name=""/>
+        <p:cNvGrpSpPr/>
+        <p:nvPr/>
+      </p:nvGrpSpPr>
+      <p:grpSpPr/>
+      <p:sp>
+        <p:nvSpPr>
+          <p:cNvPr id="2" name="TextBox 1"/>
+          <p:cNvSpPr txBox="1"/>
+          <p:nvPr/>
+        </p:nvSpPr>
+        <p:spPr>
+          <a:xfrm>
+            <a:off x="548640" y="320040"/>
+            <a:ext cx="11094415" cy="274320"/>
+          </a:xfrm>
+          <a:prstGeom prst="rect">
+            <a:avLst/>
+          </a:prstGeom>
+          <a:noFill/>
+        </p:spPr>
+        <p:txBody>
+          <a:bodyPr wrap="square" anchor="t" lIns="0" rIns="0" tIns="0" bIns="0"/>
+          <a:lstStyle/>
+          <a:p>
+            <a:pPr algn="l"/>
+            <a:r>
+              <a:rPr sz="1100" b="1" i="0">
+                <a:solidFill>
+                  <a:srgbClr val="54595D"/>
+                </a:solidFill>
+                <a:latin typeface="Calibri"/>
+              </a:rPr>
+              <a:t>CORE COMPONENT  ·  Core Paper 1</a:t>
+            </a:r>
+          </a:p>
+        </p:txBody>
+      </p:sp>
+      <p:sp>
+        <p:nvSpPr>
+          <p:cNvPr id="3" name="TextBox 2"/>
+          <p:cNvSpPr txBox="1"/>
+          <p:nvPr/>
+        </p:nvSpPr>
+        <p:spPr>
+          <a:xfrm>
+            <a:off x="548640" y="566928"/>
+            <a:ext cx="11094415" cy="822960"/>
+          </a:xfrm>
+          <a:prstGeom prst="rect">
+            <a:avLst/>
+          </a:prstGeom>
+          <a:noFill/>
+        </p:spPr>
+        <p:txBody>
+          <a:bodyPr wrap="square" anchor="ctr" lIns="0" rIns="0" tIns="0" bIns="0"/>
+          <a:lstStyle/>
+          <a:p>
+            <a:pPr algn="l"/>
+            <a:r>
+              <a:rPr sz="3200" b="1" i="0">
+                <a:solidFill>
+                  <a:srgbClr val="03306E"/>
+                </a:solidFill>
+                <a:latin typeface="Cambria"/>
+              </a:rPr>
+              <a:t>Quick check: Structure of a test plan</a:t>
+            </a:r>
+          </a:p>
+        </p:txBody>
+      </p:sp>
+      <p:sp>
+        <p:nvSpPr>
+          <p:cNvPr id="4" name="TextBox 3"/>
+          <p:cNvSpPr txBox="1"/>
+          <p:nvPr/>
+        </p:nvSpPr>
+        <p:spPr>
+          <a:xfrm>
+            <a:off x="548640" y="6446520"/>
+            <a:ext cx="8229600" cy="274320"/>
+          </a:xfrm>
+          <a:prstGeom prst="rect">
+            <a:avLst/>
+          </a:prstGeom>
+          <a:noFill/>
+        </p:spPr>
+        <p:txBody>
+          <a:bodyPr wrap="square" anchor="t" lIns="0" rIns="0" tIns="0" bIns="0"/>
+          <a:lstStyle/>
+          <a:p>
+            <a:pPr algn="l"/>
+            <a:r>
+              <a:rPr sz="1000" b="0" i="0">
+                <a:solidFill>
+                  <a:srgbClr val="54595D"/>
+                </a:solidFill>
+                <a:latin typeface="Calibri"/>
+              </a:rPr>
+              <a:t>Digital Software Development T Level  ·  Testing</a:t>
+            </a:r>
+          </a:p>
+        </p:txBody>
+      </p:sp>
+      <p:sp>
+        <p:nvSpPr>
+          <p:cNvPr id="5" name="TextBox 4"/>
+          <p:cNvSpPr txBox="1"/>
+          <p:nvPr/>
+        </p:nvSpPr>
+        <p:spPr>
+          <a:xfrm>
+            <a:off x="10728655" y="6446520"/>
+            <a:ext cx="914400" cy="274320"/>
+          </a:xfrm>
+          <a:prstGeom prst="rect">
+            <a:avLst/>
+          </a:prstGeom>
+          <a:noFill/>
+        </p:spPr>
+        <p:txBody>
+          <a:bodyPr wrap="square" anchor="t" lIns="0" rIns="0" tIns="0" bIns="0"/>
+          <a:lstStyle/>
+          <a:p>
+            <a:pPr algn="r"/>
+            <a:r>
+              <a:rPr sz="1000" b="0" i="0">
+                <a:solidFill>
+                  <a:srgbClr val="54595D"/>
+                </a:solidFill>
+                <a:latin typeface="Calibri"/>
+              </a:rPr>
+              <a:t>11</a:t>
+            </a:r>
+          </a:p>
+        </p:txBody>
+      </p:sp>
+      <p:sp>
+        <p:nvSpPr>
+          <p:cNvPr id="6" name="Oval 5"/>
+          <p:cNvSpPr/>
+          <p:nvPr/>
+        </p:nvSpPr>
+        <p:spPr>
+          <a:xfrm>
+            <a:off x="548640" y="1691640"/>
+            <a:ext cx="502920" cy="502920"/>
+          </a:xfrm>
+          <a:prstGeom prst="ellipse">
+            <a:avLst/>
+          </a:prstGeom>
+          <a:solidFill>
+            <a:srgbClr val="F2B705"/>
+          </a:solidFill>
+          <a:ln>
+            <a:noFill/>
+          </a:ln>
+          <a:effectLst/>
+        </p:spPr>
+        <p:style>
+          <a:lnRef idx="1">
+            <a:schemeClr val="accent1"/>
+          </a:lnRef>
+          <a:fillRef idx="3">
+            <a:schemeClr val="accent1"/>
+          </a:fillRef>
+          <a:effectRef idx="2">
+            <a:schemeClr val="accent1"/>
+          </a:effectRef>
+          <a:fontRef idx="minor">
+            <a:schemeClr val="lt1"/>
+          </a:fontRef>
+        </p:style>
+        <p:txBody>
+          <a:bodyPr rtlCol="0" anchor="ctr" lIns="0" rIns="0" tIns="0" bIns="0"/>
+          <a:lstStyle/>
+          <a:p>
+            <a:pPr algn="ctr"/>
+            <a:r>
+              <a:rPr sz="1600" b="1">
+                <a:solidFill>
+                  <a:srgbClr val="202122"/>
+                </a:solidFill>
+                <a:latin typeface="Calibri"/>
+              </a:rPr>
+              <a:t>1</a:t>
+            </a:r>
+          </a:p>
+        </p:txBody>
+      </p:sp>
+      <p:sp>
+        <p:nvSpPr>
+          <p:cNvPr id="7" name="TextBox 6"/>
+          <p:cNvSpPr txBox="1"/>
+          <p:nvPr/>
+        </p:nvSpPr>
+        <p:spPr>
+          <a:xfrm>
+            <a:off x="1371600" y="1645920"/>
+            <a:ext cx="10271455" cy="1188720"/>
+          </a:xfrm>
+          <a:prstGeom prst="rect">
+            <a:avLst/>
+          </a:prstGeom>
+          <a:noFill/>
+        </p:spPr>
+        <p:txBody>
+          <a:bodyPr wrap="square" anchor="t" lIns="0" rIns="0" tIns="0" bIns="0"/>
+          <a:lstStyle/>
+          <a:p>
+            <a:pPr algn="l"/>
+            <a:r>
+              <a:rPr sz="2400" b="0" i="0">
+                <a:solidFill>
+                  <a:srgbClr val="202122"/>
+                </a:solidFill>
+                <a:latin typeface="Calibri"/>
+              </a:rPr>
+              <a:t>Why write the expected result first?</a:t>
+            </a:r>
+          </a:p>
+        </p:txBody>
+      </p:sp>
+      <p:sp>
+        <p:nvSpPr>
+          <p:cNvPr id="8" name="Oval 7"/>
+          <p:cNvSpPr/>
+          <p:nvPr/>
+        </p:nvSpPr>
+        <p:spPr>
+          <a:xfrm>
+            <a:off x="548640" y="3108960"/>
+            <a:ext cx="502920" cy="502920"/>
+          </a:xfrm>
+          <a:prstGeom prst="ellipse">
+            <a:avLst/>
+          </a:prstGeom>
+          <a:solidFill>
+            <a:srgbClr val="F2B705"/>
+          </a:solidFill>
+          <a:ln>
+            <a:noFill/>
+          </a:ln>
+          <a:effectLst/>
+        </p:spPr>
+        <p:style>
+          <a:lnRef idx="1">
+            <a:schemeClr val="accent1"/>
+          </a:lnRef>
+          <a:fillRef idx="3">
+            <a:schemeClr val="accent1"/>
+          </a:fillRef>
+          <a:effectRef idx="2">
+            <a:schemeClr val="accent1"/>
+          </a:effectRef>
+          <a:fontRef idx="minor">
+            <a:schemeClr val="lt1"/>
+          </a:fontRef>
+        </p:style>
+        <p:txBody>
+          <a:bodyPr rtlCol="0" anchor="ctr" lIns="0" rIns="0" tIns="0" bIns="0"/>
+          <a:lstStyle/>
+          <a:p>
+            <a:pPr algn="ctr"/>
+            <a:r>
+              <a:rPr sz="1600" b="1">
+                <a:solidFill>
+                  <a:srgbClr val="202122"/>
+                </a:solidFill>
+                <a:latin typeface="Calibri"/>
+              </a:rPr>
+              <a:t>2</a:t>
+            </a:r>
+          </a:p>
+        </p:txBody>
+      </p:sp>
+      <p:sp>
+        <p:nvSpPr>
+          <p:cNvPr id="9" name="TextBox 8"/>
+          <p:cNvSpPr txBox="1"/>
+          <p:nvPr/>
+        </p:nvSpPr>
+        <p:spPr>
+          <a:xfrm>
+            <a:off x="1371600" y="3063240"/>
+            <a:ext cx="10271455" cy="1188720"/>
+          </a:xfrm>
+          <a:prstGeom prst="rect">
+            <a:avLst/>
+          </a:prstGeom>
+          <a:noFill/>
+        </p:spPr>
+        <p:txBody>
+          <a:bodyPr wrap="square" anchor="t" lIns="0" rIns="0" tIns="0" bIns="0"/>
+          <a:lstStyle/>
+          <a:p>
+            <a:pPr algn="l"/>
+            <a:r>
+              <a:rPr sz="2400" b="0" i="0">
+                <a:solidFill>
+                  <a:srgbClr val="202122"/>
+                </a:solidFill>
+                <a:latin typeface="Calibri"/>
+              </a:rPr>
+              <a:t>What should you do when a test fails?</a:t>
+            </a:r>
+          </a:p>
+        </p:txBody>
+      </p:sp>
+      <p:sp>
+        <p:nvSpPr>
+          <p:cNvPr id="10" name="Oval 9"/>
+          <p:cNvSpPr/>
+          <p:nvPr/>
+        </p:nvSpPr>
+        <p:spPr>
+          <a:xfrm>
+            <a:off x="548640" y="4526280"/>
+            <a:ext cx="502920" cy="502920"/>
+          </a:xfrm>
+          <a:prstGeom prst="ellipse">
+            <a:avLst/>
+          </a:prstGeom>
+          <a:solidFill>
+            <a:srgbClr val="F2B705"/>
+          </a:solidFill>
+          <a:ln>
+            <a:noFill/>
+          </a:ln>
+          <a:effectLst/>
+        </p:spPr>
+        <p:style>
+          <a:lnRef idx="1">
+            <a:schemeClr val="accent1"/>
+          </a:lnRef>
+          <a:fillRef idx="3">
+            <a:schemeClr val="accent1"/>
+          </a:fillRef>
+          <a:effectRef idx="2">
+            <a:schemeClr val="accent1"/>
+          </a:effectRef>
+          <a:fontRef idx="minor">
+            <a:schemeClr val="lt1"/>
+          </a:fontRef>
+        </p:style>
+        <p:txBody>
+          <a:bodyPr rtlCol="0" anchor="ctr" lIns="0" rIns="0" tIns="0" bIns="0"/>
+          <a:lstStyle/>
+          <a:p>
+            <a:pPr algn="ctr"/>
+            <a:r>
+              <a:rPr sz="1600" b="1">
+                <a:solidFill>
+                  <a:srgbClr val="202122"/>
+                </a:solidFill>
+                <a:latin typeface="Calibri"/>
+              </a:rPr>
+              <a:t>3</a:t>
+            </a:r>
+          </a:p>
+        </p:txBody>
+      </p:sp>
+      <p:sp>
+        <p:nvSpPr>
+          <p:cNvPr id="11" name="TextBox 10"/>
+          <p:cNvSpPr txBox="1"/>
+          <p:nvPr/>
+        </p:nvSpPr>
+        <p:spPr>
+          <a:xfrm>
+            <a:off x="1371600" y="4480560"/>
+            <a:ext cx="10271455" cy="1188720"/>
+          </a:xfrm>
+          <a:prstGeom prst="rect">
+            <a:avLst/>
+          </a:prstGeom>
+          <a:noFill/>
+        </p:spPr>
+        <p:txBody>
+          <a:bodyPr wrap="square" anchor="t" lIns="0" rIns="0" tIns="0" bIns="0"/>
+          <a:lstStyle/>
+          <a:p>
+            <a:pPr algn="l"/>
+            <a:r>
+              <a:rPr sz="2400" b="0" i="0">
+                <a:solidFill>
+                  <a:srgbClr val="202122"/>
+                </a:solidFill>
+                <a:latin typeface="Calibri"/>
+              </a:rPr>
+              <a:t>How can repeated tests be automated?</a:t>
+            </a:r>
+          </a:p>
+        </p:txBody>
+      </p:sp>
+      <p:sp>
+        <p:nvSpPr>
+          <p:cNvPr id="12" name="TextBox 11"/>
+          <p:cNvSpPr txBox="1"/>
+          <p:nvPr/>
+        </p:nvSpPr>
+        <p:spPr>
+          <a:xfrm>
+            <a:off x="548640" y="5852160"/>
+            <a:ext cx="11094415" cy="365760"/>
+          </a:xfrm>
+          <a:prstGeom prst="rect">
+            <a:avLst/>
+          </a:prstGeom>
+          <a:noFill/>
+        </p:spPr>
+        <p:txBody>
+          <a:bodyPr wrap="square" anchor="t" lIns="0" rIns="0" tIns="0" bIns="0"/>
+          <a:lstStyle/>
+          <a:p>
+            <a:pPr algn="l"/>
+            <a:r>
+              <a:rPr sz="1300" b="0" i="1">
+                <a:solidFill>
+                  <a:srgbClr val="54595D"/>
+                </a:solidFill>
+                <a:latin typeface="Calibri"/>
+              </a:rPr>
+              <a:t>Answer on mini whiteboards or in your book. Answers are in the speaker notes.</a:t>
+            </a:r>
+          </a:p>
+        </p:txBody>
+      </p:sp>
+    </p:spTree>
+  </p:cSld>
+  <p:clrMapOvr>
+    <a:masterClrMapping/>
+  </p:clrMapOvr>
+</p:sld>
+</file>
+
+<file path=ppt/slides/slide12.xml><?xml version="1.0" encoding="utf-8"?>
+<p:sld xmlns:a="http://schemas.openxmlformats.org/drawingml/2006/main" xmlns:p="http://schemas.openxmlformats.org/presentationml/2006/main" xmlns:r="http://schemas.openxmlformats.org/officeDocument/2006/relationships">
+  <p:cSld>
+    <p:bg>
+      <p:bgPr>
+        <a:solidFill>
+          <a:srgbClr val="FFFFFF"/>
+        </a:solidFill>
+        <a:effectLst/>
+      </p:bgPr>
+    </p:bg>
+    <p:spTree>
+      <p:nvGrpSpPr>
+        <p:cNvPr id="1" name=""/>
+        <p:cNvGrpSpPr/>
+        <p:nvPr/>
+      </p:nvGrpSpPr>
+      <p:grpSpPr/>
+      <p:sp>
+        <p:nvSpPr>
+          <p:cNvPr id="2" name="TextBox 1"/>
+          <p:cNvSpPr txBox="1"/>
+          <p:nvPr/>
+        </p:nvSpPr>
+        <p:spPr>
+          <a:xfrm>
+            <a:off x="548640" y="320040"/>
+            <a:ext cx="11094415" cy="274320"/>
+          </a:xfrm>
+          <a:prstGeom prst="rect">
+            <a:avLst/>
+          </a:prstGeom>
+          <a:noFill/>
+        </p:spPr>
+        <p:txBody>
+          <a:bodyPr wrap="square" anchor="t" lIns="0" rIns="0" tIns="0" bIns="0"/>
+          <a:lstStyle/>
+          <a:p>
+            <a:pPr algn="l"/>
+            <a:r>
+              <a:rPr sz="1100" b="1" i="0">
+                <a:solidFill>
+                  <a:srgbClr val="54595D"/>
+                </a:solidFill>
+                <a:latin typeface="Calibri"/>
+              </a:rPr>
+              <a:t>CORE COMPONENT  ·  Core Paper 1</a:t>
+            </a:r>
+          </a:p>
+        </p:txBody>
+      </p:sp>
+      <p:sp>
+        <p:nvSpPr>
+          <p:cNvPr id="3" name="TextBox 2"/>
+          <p:cNvSpPr txBox="1"/>
+          <p:nvPr/>
+        </p:nvSpPr>
+        <p:spPr>
+          <a:xfrm>
+            <a:off x="548640" y="566928"/>
+            <a:ext cx="11094415" cy="822960"/>
+          </a:xfrm>
+          <a:prstGeom prst="rect">
+            <a:avLst/>
+          </a:prstGeom>
+          <a:noFill/>
+        </p:spPr>
+        <p:txBody>
+          <a:bodyPr wrap="square" anchor="ctr" lIns="0" rIns="0" tIns="0" bIns="0"/>
+          <a:lstStyle/>
+          <a:p>
+            <a:pPr algn="l"/>
+            <a:r>
+              <a:rPr sz="3200" b="1" i="0">
+                <a:solidFill>
+                  <a:srgbClr val="03306E"/>
+                </a:solidFill>
+                <a:latin typeface="Cambria"/>
+              </a:rPr>
+              <a:t>Check your understanding</a:t>
+            </a:r>
+          </a:p>
+        </p:txBody>
+      </p:sp>
+      <p:sp>
+        <p:nvSpPr>
+          <p:cNvPr id="4" name="TextBox 3"/>
+          <p:cNvSpPr txBox="1"/>
+          <p:nvPr/>
+        </p:nvSpPr>
+        <p:spPr>
+          <a:xfrm>
+            <a:off x="548640" y="6446520"/>
+            <a:ext cx="8229600" cy="274320"/>
+          </a:xfrm>
+          <a:prstGeom prst="rect">
+            <a:avLst/>
+          </a:prstGeom>
+          <a:noFill/>
+        </p:spPr>
+        <p:txBody>
+          <a:bodyPr wrap="square" anchor="t" lIns="0" rIns="0" tIns="0" bIns="0"/>
+          <a:lstStyle/>
+          <a:p>
+            <a:pPr algn="l"/>
+            <a:r>
+              <a:rPr sz="1000" b="0" i="0">
+                <a:solidFill>
+                  <a:srgbClr val="54595D"/>
+                </a:solidFill>
+                <a:latin typeface="Calibri"/>
+              </a:rPr>
+              <a:t>Digital Software Development T Level  ·  Testing</a:t>
+            </a:r>
+          </a:p>
+        </p:txBody>
+      </p:sp>
+      <p:sp>
+        <p:nvSpPr>
+          <p:cNvPr id="5" name="TextBox 4"/>
+          <p:cNvSpPr txBox="1"/>
+          <p:nvPr/>
+        </p:nvSpPr>
+        <p:spPr>
+          <a:xfrm>
+            <a:off x="10728655" y="6446520"/>
+            <a:ext cx="914400" cy="274320"/>
+          </a:xfrm>
+          <a:prstGeom prst="rect">
+            <a:avLst/>
+          </a:prstGeom>
+          <a:noFill/>
+        </p:spPr>
+        <p:txBody>
+          <a:bodyPr wrap="square" anchor="t" lIns="0" rIns="0" tIns="0" bIns="0"/>
+          <a:lstStyle/>
+          <a:p>
+            <a:pPr algn="r"/>
+            <a:r>
+              <a:rPr sz="1000" b="0" i="0">
+                <a:solidFill>
+                  <a:srgbClr val="54595D"/>
+                </a:solidFill>
+                <a:latin typeface="Calibri"/>
+              </a:rPr>
+              <a:t>12</a:t>
+            </a:r>
+          </a:p>
+        </p:txBody>
+      </p:sp>
+      <p:sp>
+        <p:nvSpPr>
+          <p:cNvPr id="6" name="Oval 5"/>
+          <p:cNvSpPr/>
+          <p:nvPr/>
+        </p:nvSpPr>
+        <p:spPr>
+          <a:xfrm>
+            <a:off x="548640" y="1618488"/>
+            <a:ext cx="411480" cy="411480"/>
+          </a:xfrm>
+          <a:prstGeom prst="ellipse">
+            <a:avLst/>
+          </a:prstGeom>
+          <a:solidFill>
+            <a:srgbClr val="F2B705"/>
+          </a:solidFill>
+          <a:ln>
+            <a:noFill/>
+          </a:ln>
+          <a:effectLst/>
+        </p:spPr>
+        <p:style>
+          <a:lnRef idx="1">
+            <a:schemeClr val="accent1"/>
+          </a:lnRef>
+          <a:fillRef idx="3">
+            <a:schemeClr val="accent1"/>
+          </a:fillRef>
+          <a:effectRef idx="2">
+            <a:schemeClr val="accent1"/>
+          </a:effectRef>
+          <a:fontRef idx="minor">
+            <a:schemeClr val="lt1"/>
+          </a:fontRef>
+        </p:style>
+        <p:txBody>
+          <a:bodyPr rtlCol="0" anchor="ctr" lIns="0" rIns="0" tIns="0" bIns="0"/>
+          <a:lstStyle/>
+          <a:p>
+            <a:pPr algn="ctr"/>
+            <a:r>
+              <a:rPr sz="1400" b="1">
+                <a:solidFill>
+                  <a:srgbClr val="202122"/>
+                </a:solidFill>
+                <a:latin typeface="Calibri"/>
+              </a:rPr>
+              <a:t>1</a:t>
+            </a:r>
+          </a:p>
+        </p:txBody>
+      </p:sp>
+      <p:sp>
+        <p:nvSpPr>
+          <p:cNvPr id="7" name="TextBox 6"/>
+          <p:cNvSpPr txBox="1"/>
+          <p:nvPr/>
+        </p:nvSpPr>
+        <p:spPr>
+          <a:xfrm>
+            <a:off x="1234440" y="1600200"/>
+            <a:ext cx="10408615" cy="1030986"/>
+          </a:xfrm>
+          <a:prstGeom prst="rect">
+            <a:avLst/>
+          </a:prstGeom>
+          <a:noFill/>
+        </p:spPr>
+        <p:txBody>
+          <a:bodyPr wrap="square" anchor="t" lIns="0" rIns="0" tIns="0" bIns="0"/>
+          <a:lstStyle/>
+          <a:p>
+            <a:pPr algn="l"/>
+            <a:r>
+              <a:rPr sz="2200" b="0" i="0">
+                <a:solidFill>
+                  <a:srgbClr val="202122"/>
+                </a:solidFill>
+                <a:latin typeface="Calibri"/>
+              </a:rPr>
+              <a:t>What does regression testing check?</a:t>
+            </a:r>
+          </a:p>
+        </p:txBody>
+      </p:sp>
+      <p:sp>
+        <p:nvSpPr>
+          <p:cNvPr id="8" name="Oval 7"/>
+          <p:cNvSpPr/>
+          <p:nvPr/>
+        </p:nvSpPr>
+        <p:spPr>
+          <a:xfrm>
+            <a:off x="548640" y="2814066"/>
+            <a:ext cx="411480" cy="411480"/>
+          </a:xfrm>
+          <a:prstGeom prst="ellipse">
+            <a:avLst/>
+          </a:prstGeom>
+          <a:solidFill>
+            <a:srgbClr val="F2B705"/>
+          </a:solidFill>
+          <a:ln>
+            <a:noFill/>
+          </a:ln>
+          <a:effectLst/>
+        </p:spPr>
+        <p:style>
+          <a:lnRef idx="1">
+            <a:schemeClr val="accent1"/>
+          </a:lnRef>
+          <a:fillRef idx="3">
+            <a:schemeClr val="accent1"/>
+          </a:fillRef>
+          <a:effectRef idx="2">
+            <a:schemeClr val="accent1"/>
+          </a:effectRef>
+          <a:fontRef idx="minor">
+            <a:schemeClr val="lt1"/>
+          </a:fontRef>
+        </p:style>
+        <p:txBody>
+          <a:bodyPr rtlCol="0" anchor="ctr" lIns="0" rIns="0" tIns="0" bIns="0"/>
+          <a:lstStyle/>
+          <a:p>
+            <a:pPr algn="ctr"/>
+            <a:r>
+              <a:rPr sz="1400" b="1">
+                <a:solidFill>
+                  <a:srgbClr val="202122"/>
+                </a:solidFill>
+                <a:latin typeface="Calibri"/>
+              </a:rPr>
+              <a:t>2</a:t>
+            </a:r>
+          </a:p>
+        </p:txBody>
+      </p:sp>
+      <p:sp>
+        <p:nvSpPr>
+          <p:cNvPr id="9" name="TextBox 8"/>
+          <p:cNvSpPr txBox="1"/>
+          <p:nvPr/>
+        </p:nvSpPr>
+        <p:spPr>
+          <a:xfrm>
+            <a:off x="1234440" y="2795778"/>
+            <a:ext cx="10408615" cy="1030986"/>
+          </a:xfrm>
+          <a:prstGeom prst="rect">
+            <a:avLst/>
+          </a:prstGeom>
+          <a:noFill/>
+        </p:spPr>
+        <p:txBody>
+          <a:bodyPr wrap="square" anchor="t" lIns="0" rIns="0" tIns="0" bIns="0"/>
+          <a:lstStyle/>
+          <a:p>
+            <a:pPr algn="l"/>
+            <a:r>
+              <a:rPr sz="2200" b="0" i="0">
+                <a:solidFill>
+                  <a:srgbClr val="202122"/>
+                </a:solidFill>
+                <a:latin typeface="Calibri"/>
+              </a:rPr>
+              <a:t>A field accepts 1 to 8. Give an erroneous test value.</a:t>
+            </a:r>
+          </a:p>
+        </p:txBody>
+      </p:sp>
+      <p:sp>
+        <p:nvSpPr>
+          <p:cNvPr id="10" name="Oval 9"/>
+          <p:cNvSpPr/>
+          <p:nvPr/>
+        </p:nvSpPr>
+        <p:spPr>
+          <a:xfrm>
+            <a:off x="548640" y="4009644"/>
+            <a:ext cx="411480" cy="411480"/>
+          </a:xfrm>
+          <a:prstGeom prst="ellipse">
+            <a:avLst/>
+          </a:prstGeom>
+          <a:solidFill>
+            <a:srgbClr val="F2B705"/>
+          </a:solidFill>
+          <a:ln>
+            <a:noFill/>
+          </a:ln>
+          <a:effectLst/>
+        </p:spPr>
+        <p:style>
+          <a:lnRef idx="1">
+            <a:schemeClr val="accent1"/>
+          </a:lnRef>
+          <a:fillRef idx="3">
+            <a:schemeClr val="accent1"/>
+          </a:fillRef>
+          <a:effectRef idx="2">
+            <a:schemeClr val="accent1"/>
+          </a:effectRef>
+          <a:fontRef idx="minor">
+            <a:schemeClr val="lt1"/>
+          </a:fontRef>
+        </p:style>
+        <p:txBody>
+          <a:bodyPr rtlCol="0" anchor="ctr" lIns="0" rIns="0" tIns="0" bIns="0"/>
+          <a:lstStyle/>
+          <a:p>
+            <a:pPr algn="ctr"/>
+            <a:r>
+              <a:rPr sz="1400" b="1">
+                <a:solidFill>
+                  <a:srgbClr val="202122"/>
+                </a:solidFill>
+                <a:latin typeface="Calibri"/>
+              </a:rPr>
+              <a:t>3</a:t>
+            </a:r>
+          </a:p>
+        </p:txBody>
+      </p:sp>
+      <p:sp>
+        <p:nvSpPr>
+          <p:cNvPr id="11" name="TextBox 10"/>
+          <p:cNvSpPr txBox="1"/>
+          <p:nvPr/>
+        </p:nvSpPr>
+        <p:spPr>
+          <a:xfrm>
+            <a:off x="1234440" y="3991356"/>
+            <a:ext cx="10408615" cy="1030986"/>
+          </a:xfrm>
+          <a:prstGeom prst="rect">
+            <a:avLst/>
+          </a:prstGeom>
+          <a:noFill/>
+        </p:spPr>
+        <p:txBody>
+          <a:bodyPr wrap="square" anchor="t" lIns="0" rIns="0" tIns="0" bIns="0"/>
+          <a:lstStyle/>
+          <a:p>
+            <a:pPr algn="l"/>
+            <a:r>
+              <a:rPr sz="2200" b="0" i="0">
+                <a:solidFill>
+                  <a:srgbClr val="202122"/>
+                </a:solidFill>
+                <a:latin typeface="Calibri"/>
+              </a:rPr>
+              <a:t>What is the difference between unit and integration testing?</a:t>
+            </a:r>
+          </a:p>
+        </p:txBody>
+      </p:sp>
+      <p:sp>
+        <p:nvSpPr>
+          <p:cNvPr id="12" name="Oval 11"/>
+          <p:cNvSpPr/>
+          <p:nvPr/>
+        </p:nvSpPr>
+        <p:spPr>
+          <a:xfrm>
+            <a:off x="548640" y="5205221"/>
+            <a:ext cx="411480" cy="411480"/>
+          </a:xfrm>
+          <a:prstGeom prst="ellipse">
+            <a:avLst/>
+          </a:prstGeom>
+          <a:solidFill>
+            <a:srgbClr val="F2B705"/>
+          </a:solidFill>
+          <a:ln>
+            <a:noFill/>
+          </a:ln>
+          <a:effectLst/>
+        </p:spPr>
+        <p:style>
+          <a:lnRef idx="1">
+            <a:schemeClr val="accent1"/>
+          </a:lnRef>
+          <a:fillRef idx="3">
+            <a:schemeClr val="accent1"/>
+          </a:fillRef>
+          <a:effectRef idx="2">
+            <a:schemeClr val="accent1"/>
+          </a:effectRef>
+          <a:fontRef idx="minor">
+            <a:schemeClr val="lt1"/>
+          </a:fontRef>
+        </p:style>
+        <p:txBody>
+          <a:bodyPr rtlCol="0" anchor="ctr" lIns="0" rIns="0" tIns="0" bIns="0"/>
+          <a:lstStyle/>
+          <a:p>
+            <a:pPr algn="ctr"/>
+            <a:r>
+              <a:rPr sz="1400" b="1">
+                <a:solidFill>
+                  <a:srgbClr val="202122"/>
+                </a:solidFill>
+                <a:latin typeface="Calibri"/>
+              </a:rPr>
+              <a:t>4</a:t>
+            </a:r>
+          </a:p>
+        </p:txBody>
+      </p:sp>
+      <p:sp>
+        <p:nvSpPr>
+          <p:cNvPr id="13" name="TextBox 12"/>
+          <p:cNvSpPr txBox="1"/>
+          <p:nvPr/>
+        </p:nvSpPr>
+        <p:spPr>
+          <a:xfrm>
+            <a:off x="1234440" y="5186933"/>
+            <a:ext cx="10408615" cy="1030986"/>
+          </a:xfrm>
+          <a:prstGeom prst="rect">
+            <a:avLst/>
+          </a:prstGeom>
+          <a:noFill/>
+        </p:spPr>
+        <p:txBody>
+          <a:bodyPr wrap="square" anchor="t" lIns="0" rIns="0" tIns="0" bIns="0"/>
+          <a:lstStyle/>
+          <a:p>
+            <a:pPr algn="l"/>
+            <a:r>
+              <a:rPr sz="2200" b="0" i="0">
+                <a:solidFill>
+                  <a:srgbClr val="202122"/>
+                </a:solidFill>
+                <a:latin typeface="Calibri"/>
+              </a:rPr>
+              <a:t>Why test components before integration?</a:t>
+            </a:r>
+          </a:p>
+        </p:txBody>
+      </p:sp>
+    </p:spTree>
+  </p:cSld>
+  <p:clrMapOvr>
+    <a:masterClrMapping/>
+  </p:clrMapOvr>
+</p:sld>
+</file>
+
+<file path=ppt/slides/slide13.xml><?xml version="1.0" encoding="utf-8"?>
+<p:sld xmlns:a="http://schemas.openxmlformats.org/drawingml/2006/main" xmlns:p="http://schemas.openxmlformats.org/presentationml/2006/main" xmlns:r="http://schemas.openxmlformats.org/officeDocument/2006/relationships">
+  <p:cSld>
+    <p:bg>
+      <p:bgPr>
+        <a:solidFill>
+          <a:srgbClr val="FFFFFF"/>
+        </a:solidFill>
+        <a:effectLst/>
+      </p:bgPr>
+    </p:bg>
+    <p:spTree>
+      <p:nvGrpSpPr>
+        <p:cNvPr id="1" name=""/>
+        <p:cNvGrpSpPr/>
+        <p:nvPr/>
+      </p:nvGrpSpPr>
+      <p:grpSpPr/>
+      <p:sp>
+        <p:nvSpPr>
+          <p:cNvPr id="2" name="TextBox 1"/>
+          <p:cNvSpPr txBox="1"/>
+          <p:nvPr/>
+        </p:nvSpPr>
+        <p:spPr>
+          <a:xfrm>
+            <a:off x="548640" y="320040"/>
+            <a:ext cx="11094415" cy="274320"/>
+          </a:xfrm>
+          <a:prstGeom prst="rect">
+            <a:avLst/>
+          </a:prstGeom>
+          <a:noFill/>
+        </p:spPr>
+        <p:txBody>
+          <a:bodyPr wrap="square" anchor="t" lIns="0" rIns="0" tIns="0" bIns="0"/>
+          <a:lstStyle/>
+          <a:p>
+            <a:pPr algn="l"/>
+            <a:r>
+              <a:rPr sz="1100" b="1" i="0">
+                <a:solidFill>
+                  <a:srgbClr val="54595D"/>
+                </a:solidFill>
+                <a:latin typeface="Calibri"/>
+              </a:rPr>
+              <a:t>CORE COMPONENT  ·  Core Paper 1</a:t>
+            </a:r>
+          </a:p>
+        </p:txBody>
+      </p:sp>
+      <p:sp>
+        <p:nvSpPr>
+          <p:cNvPr id="3" name="TextBox 2"/>
+          <p:cNvSpPr txBox="1"/>
+          <p:nvPr/>
+        </p:nvSpPr>
+        <p:spPr>
+          <a:xfrm>
+            <a:off x="548640" y="566928"/>
+            <a:ext cx="11094415" cy="822960"/>
+          </a:xfrm>
+          <a:prstGeom prst="rect">
+            <a:avLst/>
+          </a:prstGeom>
+          <a:noFill/>
+        </p:spPr>
+        <p:txBody>
+          <a:bodyPr wrap="square" anchor="ctr" lIns="0" rIns="0" tIns="0" bIns="0"/>
+          <a:lstStyle/>
+          <a:p>
+            <a:pPr algn="l"/>
+            <a:r>
+              <a:rPr sz="3200" b="1" i="0">
+                <a:solidFill>
+                  <a:srgbClr val="03306E"/>
+                </a:solidFill>
+                <a:latin typeface="Cambria"/>
+              </a:rPr>
+              <a:t>Answers</a:t>
+            </a:r>
+          </a:p>
+        </p:txBody>
+      </p:sp>
+      <p:sp>
+        <p:nvSpPr>
+          <p:cNvPr id="4" name="TextBox 3"/>
+          <p:cNvSpPr txBox="1"/>
+          <p:nvPr/>
+        </p:nvSpPr>
+        <p:spPr>
+          <a:xfrm>
+            <a:off x="548640" y="6446520"/>
+            <a:ext cx="8229600" cy="274320"/>
+          </a:xfrm>
+          <a:prstGeom prst="rect">
+            <a:avLst/>
+          </a:prstGeom>
+          <a:noFill/>
+        </p:spPr>
+        <p:txBody>
+          <a:bodyPr wrap="square" anchor="t" lIns="0" rIns="0" tIns="0" bIns="0"/>
+          <a:lstStyle/>
+          <a:p>
+            <a:pPr algn="l"/>
+            <a:r>
+              <a:rPr sz="1000" b="0" i="0">
+                <a:solidFill>
+                  <a:srgbClr val="54595D"/>
+                </a:solidFill>
+                <a:latin typeface="Calibri"/>
+              </a:rPr>
+              <a:t>Digital Software Development T Level  ·  Testing</a:t>
+            </a:r>
+          </a:p>
+        </p:txBody>
+      </p:sp>
+      <p:sp>
+        <p:nvSpPr>
+          <p:cNvPr id="5" name="TextBox 4"/>
+          <p:cNvSpPr txBox="1"/>
+          <p:nvPr/>
+        </p:nvSpPr>
+        <p:spPr>
+          <a:xfrm>
+            <a:off x="10728655" y="6446520"/>
+            <a:ext cx="914400" cy="274320"/>
+          </a:xfrm>
+          <a:prstGeom prst="rect">
+            <a:avLst/>
+          </a:prstGeom>
+          <a:noFill/>
+        </p:spPr>
+        <p:txBody>
+          <a:bodyPr wrap="square" anchor="t" lIns="0" rIns="0" tIns="0" bIns="0"/>
+          <a:lstStyle/>
+          <a:p>
+            <a:pPr algn="r"/>
+            <a:r>
+              <a:rPr sz="1000" b="0" i="0">
+                <a:solidFill>
+                  <a:srgbClr val="54595D"/>
+                </a:solidFill>
+                <a:latin typeface="Calibri"/>
+              </a:rPr>
+              <a:t>13</a:t>
+            </a:r>
+          </a:p>
+        </p:txBody>
+      </p:sp>
+      <p:sp>
+        <p:nvSpPr>
+          <p:cNvPr id="6" name="Oval 5"/>
+          <p:cNvSpPr/>
+          <p:nvPr/>
+        </p:nvSpPr>
+        <p:spPr>
+          <a:xfrm>
+            <a:off x="548640" y="1618488"/>
+            <a:ext cx="411480" cy="411480"/>
+          </a:xfrm>
+          <a:prstGeom prst="ellipse">
+            <a:avLst/>
+          </a:prstGeom>
+          <a:solidFill>
+            <a:srgbClr val="F2B705"/>
+          </a:solidFill>
+          <a:ln>
+            <a:noFill/>
+          </a:ln>
+          <a:effectLst/>
+        </p:spPr>
+        <p:style>
+          <a:lnRef idx="1">
+            <a:schemeClr val="accent1"/>
+          </a:lnRef>
+          <a:fillRef idx="3">
+            <a:schemeClr val="accent1"/>
+          </a:fillRef>
+          <a:effectRef idx="2">
+            <a:schemeClr val="accent1"/>
+          </a:effectRef>
+          <a:fontRef idx="minor">
+            <a:schemeClr val="lt1"/>
+          </a:fontRef>
+        </p:style>
+        <p:txBody>
+          <a:bodyPr rtlCol="0" anchor="ctr" lIns="0" rIns="0" tIns="0" bIns="0"/>
+          <a:lstStyle/>
+          <a:p>
+            <a:pPr algn="ctr"/>
+            <a:r>
+              <a:rPr sz="1400" b="1">
+                <a:solidFill>
+                  <a:srgbClr val="202122"/>
+                </a:solidFill>
+                <a:latin typeface="Calibri"/>
+              </a:rPr>
+              <a:t>1</a:t>
+            </a:r>
+          </a:p>
+        </p:txBody>
+      </p:sp>
+      <p:sp>
+        <p:nvSpPr>
+          <p:cNvPr id="7" name="TextBox 6"/>
+          <p:cNvSpPr txBox="1"/>
+          <p:nvPr/>
+        </p:nvSpPr>
+        <p:spPr>
+          <a:xfrm>
+            <a:off x="1234440" y="1600200"/>
+            <a:ext cx="10408615" cy="1030986"/>
+          </a:xfrm>
+          <a:prstGeom prst="rect">
+            <a:avLst/>
+          </a:prstGeom>
+          <a:noFill/>
+        </p:spPr>
+        <p:txBody>
+          <a:bodyPr wrap="square" anchor="t" lIns="0" rIns="0" tIns="0" bIns="0"/>
+          <a:lstStyle/>
+          <a:p>
+            <a:pPr algn="l"/>
+            <a:r>
+              <a:rPr sz="1800" b="0" i="0">
+                <a:solidFill>
+                  <a:srgbClr val="54595D"/>
+                </a:solidFill>
+                <a:latin typeface="Calibri"/>
+              </a:rPr>
+              <a:t>What does regression testing check?</a:t>
+            </a:r>
+          </a:p>
+          <a:p>
+            <a:r>
+              <a:rPr sz="1800" b="1">
+                <a:solidFill>
+                  <a:srgbClr val="03306E"/>
+                </a:solidFill>
+                <a:latin typeface="Calibri"/>
+              </a:rPr>
+              <a:t>That changes have not broken existing functionality.</a:t>
+            </a:r>
+          </a:p>
+        </p:txBody>
+      </p:sp>
+      <p:sp>
+        <p:nvSpPr>
+          <p:cNvPr id="8" name="Oval 7"/>
+          <p:cNvSpPr/>
+          <p:nvPr/>
+        </p:nvSpPr>
+        <p:spPr>
+          <a:xfrm>
+            <a:off x="548640" y="2814066"/>
+            <a:ext cx="411480" cy="411480"/>
+          </a:xfrm>
+          <a:prstGeom prst="ellipse">
+            <a:avLst/>
+          </a:prstGeom>
+          <a:solidFill>
+            <a:srgbClr val="F2B705"/>
+          </a:solidFill>
+          <a:ln>
+            <a:noFill/>
+          </a:ln>
+          <a:effectLst/>
+        </p:spPr>
+        <p:style>
+          <a:lnRef idx="1">
+            <a:schemeClr val="accent1"/>
+          </a:lnRef>
+          <a:fillRef idx="3">
+            <a:schemeClr val="accent1"/>
+          </a:fillRef>
+          <a:effectRef idx="2">
+            <a:schemeClr val="accent1"/>
+          </a:effectRef>
+          <a:fontRef idx="minor">
+            <a:schemeClr val="lt1"/>
+          </a:fontRef>
+        </p:style>
+        <p:txBody>
+          <a:bodyPr rtlCol="0" anchor="ctr" lIns="0" rIns="0" tIns="0" bIns="0"/>
+          <a:lstStyle/>
+          <a:p>
+            <a:pPr algn="ctr"/>
+            <a:r>
+              <a:rPr sz="1400" b="1">
+                <a:solidFill>
+                  <a:srgbClr val="202122"/>
+                </a:solidFill>
+                <a:latin typeface="Calibri"/>
+              </a:rPr>
+              <a:t>2</a:t>
+            </a:r>
+          </a:p>
+        </p:txBody>
+      </p:sp>
+      <p:sp>
+        <p:nvSpPr>
+          <p:cNvPr id="9" name="TextBox 8"/>
+          <p:cNvSpPr txBox="1"/>
+          <p:nvPr/>
+        </p:nvSpPr>
+        <p:spPr>
+          <a:xfrm>
+            <a:off x="1234440" y="2795778"/>
+            <a:ext cx="10408615" cy="1030986"/>
+          </a:xfrm>
+          <a:prstGeom prst="rect">
+            <a:avLst/>
+          </a:prstGeom>
+          <a:noFill/>
+        </p:spPr>
+        <p:txBody>
+          <a:bodyPr wrap="square" anchor="t" lIns="0" rIns="0" tIns="0" bIns="0"/>
+          <a:lstStyle/>
+          <a:p>
+            <a:pPr algn="l"/>
+            <a:r>
+              <a:rPr sz="1800" b="0" i="0">
+                <a:solidFill>
+                  <a:srgbClr val="54595D"/>
+                </a:solidFill>
+                <a:latin typeface="Calibri"/>
+              </a:rPr>
+              <a:t>A field accepts 1 to 8. Give an erroneous test value.</a:t>
+            </a:r>
+          </a:p>
+          <a:p>
+            <a:r>
+              <a:rPr sz="1800" b="1">
+                <a:solidFill>
+                  <a:srgbClr val="03306E"/>
+                </a:solidFill>
+                <a:latin typeface="Calibri"/>
+              </a:rPr>
+              <a:t>Any non-number, e.g. 'four'.</a:t>
+            </a:r>
+          </a:p>
+        </p:txBody>
+      </p:sp>
+      <p:sp>
+        <p:nvSpPr>
+          <p:cNvPr id="10" name="Oval 9"/>
+          <p:cNvSpPr/>
+          <p:nvPr/>
+        </p:nvSpPr>
+        <p:spPr>
+          <a:xfrm>
+            <a:off x="548640" y="4009644"/>
+            <a:ext cx="411480" cy="411480"/>
+          </a:xfrm>
+          <a:prstGeom prst="ellipse">
+            <a:avLst/>
+          </a:prstGeom>
+          <a:solidFill>
+            <a:srgbClr val="F2B705"/>
+          </a:solidFill>
+          <a:ln>
+            <a:noFill/>
+          </a:ln>
+          <a:effectLst/>
+        </p:spPr>
+        <p:style>
+          <a:lnRef idx="1">
+            <a:schemeClr val="accent1"/>
+          </a:lnRef>
+          <a:fillRef idx="3">
+            <a:schemeClr val="accent1"/>
+          </a:fillRef>
+          <a:effectRef idx="2">
+            <a:schemeClr val="accent1"/>
+          </a:effectRef>
+          <a:fontRef idx="minor">
+            <a:schemeClr val="lt1"/>
+          </a:fontRef>
+        </p:style>
+        <p:txBody>
+          <a:bodyPr rtlCol="0" anchor="ctr" lIns="0" rIns="0" tIns="0" bIns="0"/>
+          <a:lstStyle/>
+          <a:p>
+            <a:pPr algn="ctr"/>
+            <a:r>
+              <a:rPr sz="1400" b="1">
+                <a:solidFill>
+                  <a:srgbClr val="202122"/>
+                </a:solidFill>
+                <a:latin typeface="Calibri"/>
+              </a:rPr>
+              <a:t>3</a:t>
+            </a:r>
+          </a:p>
+        </p:txBody>
+      </p:sp>
+      <p:sp>
+        <p:nvSpPr>
+          <p:cNvPr id="11" name="TextBox 10"/>
+          <p:cNvSpPr txBox="1"/>
+          <p:nvPr/>
+        </p:nvSpPr>
+        <p:spPr>
+          <a:xfrm>
+            <a:off x="1234440" y="3991356"/>
+            <a:ext cx="10408615" cy="1030986"/>
+          </a:xfrm>
+          <a:prstGeom prst="rect">
+            <a:avLst/>
+          </a:prstGeom>
+          <a:noFill/>
+        </p:spPr>
+        <p:txBody>
+          <a:bodyPr wrap="square" anchor="t" lIns="0" rIns="0" tIns="0" bIns="0"/>
+          <a:lstStyle/>
+          <a:p>
+            <a:pPr algn="l"/>
+            <a:r>
+              <a:rPr sz="1800" b="0" i="0">
+                <a:solidFill>
+                  <a:srgbClr val="54595D"/>
+                </a:solidFill>
+                <a:latin typeface="Calibri"/>
+              </a:rPr>
+              <a:t>What is the difference between unit and integration testing?</a:t>
+            </a:r>
+          </a:p>
+          <a:p>
+            <a:r>
+              <a:rPr sz="1800" b="1">
+                <a:solidFill>
+                  <a:srgbClr val="03306E"/>
+                </a:solidFill>
+                <a:latin typeface="Calibri"/>
+              </a:rPr>
+              <a:t>Unit tests one component; integration tests components working together.</a:t>
+            </a:r>
+          </a:p>
+        </p:txBody>
+      </p:sp>
+      <p:sp>
+        <p:nvSpPr>
+          <p:cNvPr id="12" name="Oval 11"/>
+          <p:cNvSpPr/>
+          <p:nvPr/>
+        </p:nvSpPr>
+        <p:spPr>
+          <a:xfrm>
+            <a:off x="548640" y="5205221"/>
+            <a:ext cx="411480" cy="411480"/>
+          </a:xfrm>
+          <a:prstGeom prst="ellipse">
+            <a:avLst/>
+          </a:prstGeom>
+          <a:solidFill>
+            <a:srgbClr val="F2B705"/>
+          </a:solidFill>
+          <a:ln>
+            <a:noFill/>
+          </a:ln>
+          <a:effectLst/>
+        </p:spPr>
+        <p:style>
+          <a:lnRef idx="1">
+            <a:schemeClr val="accent1"/>
+          </a:lnRef>
+          <a:fillRef idx="3">
+            <a:schemeClr val="accent1"/>
+          </a:fillRef>
+          <a:effectRef idx="2">
+            <a:schemeClr val="accent1"/>
+          </a:effectRef>
+          <a:fontRef idx="minor">
+            <a:schemeClr val="lt1"/>
+          </a:fontRef>
+        </p:style>
+        <p:txBody>
+          <a:bodyPr rtlCol="0" anchor="ctr" lIns="0" rIns="0" tIns="0" bIns="0"/>
+          <a:lstStyle/>
+          <a:p>
+            <a:pPr algn="ctr"/>
+            <a:r>
+              <a:rPr sz="1400" b="1">
+                <a:solidFill>
+                  <a:srgbClr val="202122"/>
+                </a:solidFill>
+                <a:latin typeface="Calibri"/>
+              </a:rPr>
+              <a:t>4</a:t>
+            </a:r>
+          </a:p>
+        </p:txBody>
+      </p:sp>
+      <p:sp>
+        <p:nvSpPr>
+          <p:cNvPr id="13" name="TextBox 12"/>
+          <p:cNvSpPr txBox="1"/>
+          <p:nvPr/>
+        </p:nvSpPr>
+        <p:spPr>
+          <a:xfrm>
+            <a:off x="1234440" y="5186933"/>
+            <a:ext cx="10408615" cy="1030986"/>
+          </a:xfrm>
+          <a:prstGeom prst="rect">
+            <a:avLst/>
+          </a:prstGeom>
+          <a:noFill/>
+        </p:spPr>
+        <p:txBody>
+          <a:bodyPr wrap="square" anchor="t" lIns="0" rIns="0" tIns="0" bIns="0"/>
+          <a:lstStyle/>
+          <a:p>
+            <a:pPr algn="l"/>
+            <a:r>
+              <a:rPr sz="1800" b="0" i="0">
+                <a:solidFill>
+                  <a:srgbClr val="54595D"/>
+                </a:solidFill>
+                <a:latin typeface="Calibri"/>
+              </a:rPr>
+              <a:t>Why test components before integration?</a:t>
+            </a:r>
+          </a:p>
+          <a:p>
+            <a:r>
+              <a:rPr sz="1800" b="1">
+                <a:solidFill>
+                  <a:srgbClr val="03306E"/>
+                </a:solidFill>
+                <a:latin typeface="Calibri"/>
+              </a:rPr>
+              <a:t>Faults are easier to find and fix in isolation.</a:t>
+            </a:r>
+          </a:p>
+        </p:txBody>
+      </p:sp>
+    </p:spTree>
+  </p:cSld>
+  <p:clrMapOvr>
+    <a:masterClrMapping/>
+  </p:clrMapOvr>
+</p:sld>
+</file>
+
+<file path=ppt/slides/slide14.xml><?xml version="1.0" encoding="utf-8"?>
+<p:sld xmlns:a="http://schemas.openxmlformats.org/drawingml/2006/main" xmlns:p="http://schemas.openxmlformats.org/presentationml/2006/main" xmlns:r="http://schemas.openxmlformats.org/officeDocument/2006/relationships">
+  <p:cSld>
+    <p:bg>
+      <p:bgPr>
+        <a:solidFill>
+          <a:srgbClr val="FFFFFF"/>
+        </a:solidFill>
+        <a:effectLst/>
+      </p:bgPr>
+    </p:bg>
+    <p:spTree>
+      <p:nvGrpSpPr>
+        <p:cNvPr id="1" name=""/>
+        <p:cNvGrpSpPr/>
+        <p:nvPr/>
+      </p:nvGrpSpPr>
+      <p:grpSpPr/>
+      <p:sp>
+        <p:nvSpPr>
+          <p:cNvPr id="2" name="TextBox 1"/>
+          <p:cNvSpPr txBox="1"/>
+          <p:nvPr/>
+        </p:nvSpPr>
+        <p:spPr>
+          <a:xfrm>
+            <a:off x="548640" y="320040"/>
+            <a:ext cx="11094415" cy="274320"/>
+          </a:xfrm>
+          <a:prstGeom prst="rect">
+            <a:avLst/>
+          </a:prstGeom>
+          <a:noFill/>
+        </p:spPr>
+        <p:txBody>
+          <a:bodyPr wrap="square" anchor="t" lIns="0" rIns="0" tIns="0" bIns="0"/>
+          <a:lstStyle/>
+          <a:p>
+            <a:pPr algn="l"/>
+            <a:r>
+              <a:rPr sz="1100" b="1" i="0">
+                <a:solidFill>
+                  <a:srgbClr val="54595D"/>
+                </a:solidFill>
+                <a:latin typeface="Calibri"/>
+              </a:rPr>
+              <a:t>CORE COMPONENT  ·  Core Paper 1</a:t>
+            </a:r>
+          </a:p>
+        </p:txBody>
+      </p:sp>
+      <p:sp>
+        <p:nvSpPr>
+          <p:cNvPr id="3" name="TextBox 2"/>
+          <p:cNvSpPr txBox="1"/>
+          <p:nvPr/>
+        </p:nvSpPr>
+        <p:spPr>
+          <a:xfrm>
+            <a:off x="548640" y="566928"/>
+            <a:ext cx="11094415" cy="822960"/>
+          </a:xfrm>
+          <a:prstGeom prst="rect">
+            <a:avLst/>
+          </a:prstGeom>
+          <a:noFill/>
+        </p:spPr>
+        <p:txBody>
+          <a:bodyPr wrap="square" anchor="ctr" lIns="0" rIns="0" tIns="0" bIns="0"/>
+          <a:lstStyle/>
+          <a:p>
+            <a:pPr algn="l"/>
+            <a:r>
+              <a:rPr sz="3200" b="1" i="0">
+                <a:solidFill>
+                  <a:srgbClr val="03306E"/>
+                </a:solidFill>
+                <a:latin typeface="Cambria"/>
+              </a:rPr>
+              <a:t>Activity: Test a login form</a:t>
+            </a:r>
+          </a:p>
+        </p:txBody>
+      </p:sp>
+      <p:sp>
+        <p:nvSpPr>
+          <p:cNvPr id="4" name="TextBox 3"/>
+          <p:cNvSpPr txBox="1"/>
+          <p:nvPr/>
+        </p:nvSpPr>
+        <p:spPr>
+          <a:xfrm>
+            <a:off x="548640" y="6446520"/>
+            <a:ext cx="8229600" cy="274320"/>
+          </a:xfrm>
+          <a:prstGeom prst="rect">
+            <a:avLst/>
+          </a:prstGeom>
+          <a:noFill/>
+        </p:spPr>
+        <p:txBody>
+          <a:bodyPr wrap="square" anchor="t" lIns="0" rIns="0" tIns="0" bIns="0"/>
+          <a:lstStyle/>
+          <a:p>
+            <a:pPr algn="l"/>
+            <a:r>
+              <a:rPr sz="1000" b="0" i="0">
+                <a:solidFill>
+                  <a:srgbClr val="54595D"/>
+                </a:solidFill>
+                <a:latin typeface="Calibri"/>
+              </a:rPr>
+              <a:t>Digital Software Development T Level  ·  Testing</a:t>
+            </a:r>
+          </a:p>
+        </p:txBody>
+      </p:sp>
+      <p:sp>
+        <p:nvSpPr>
+          <p:cNvPr id="5" name="TextBox 4"/>
+          <p:cNvSpPr txBox="1"/>
+          <p:nvPr/>
+        </p:nvSpPr>
+        <p:spPr>
+          <a:xfrm>
+            <a:off x="10728655" y="6446520"/>
+            <a:ext cx="914400" cy="274320"/>
+          </a:xfrm>
+          <a:prstGeom prst="rect">
+            <a:avLst/>
+          </a:prstGeom>
+          <a:noFill/>
+        </p:spPr>
+        <p:txBody>
+          <a:bodyPr wrap="square" anchor="t" lIns="0" rIns="0" tIns="0" bIns="0"/>
+          <a:lstStyle/>
+          <a:p>
+            <a:pPr algn="r"/>
+            <a:r>
+              <a:rPr sz="1000" b="0" i="0">
+                <a:solidFill>
+                  <a:srgbClr val="54595D"/>
+                </a:solidFill>
+                <a:latin typeface="Calibri"/>
+              </a:rPr>
+              <a:t>14</a:t>
+            </a:r>
+          </a:p>
+        </p:txBody>
+      </p:sp>
+      <p:sp>
+        <p:nvSpPr>
+          <p:cNvPr id="6" name="Rounded Rectangle 5"/>
+          <p:cNvSpPr/>
+          <p:nvPr/>
+        </p:nvSpPr>
+        <p:spPr>
+          <a:xfrm>
+            <a:off x="548640" y="1508760"/>
+            <a:ext cx="2011680" cy="457200"/>
+          </a:xfrm>
+          <a:prstGeom prst="roundRect">
+            <a:avLst>
+              <a:gd name="adj" fmla="val 50000"/>
+            </a:avLst>
+          </a:prstGeom>
+          <a:solidFill>
+            <a:srgbClr val="F2B705"/>
+          </a:solidFill>
+          <a:ln>
+            <a:noFill/>
+          </a:ln>
+          <a:effectLst/>
+        </p:spPr>
+        <p:style>
+          <a:lnRef idx="1">
+            <a:schemeClr val="accent1"/>
+          </a:lnRef>
+          <a:fillRef idx="3">
+            <a:schemeClr val="accent1"/>
+          </a:fillRef>
+          <a:effectRef idx="2">
+            <a:schemeClr val="accent1"/>
+          </a:effectRef>
+          <a:fontRef idx="minor">
+            <a:schemeClr val="lt1"/>
+          </a:fontRef>
+        </p:style>
+        <p:txBody>
+          <a:bodyPr rtlCol="0" anchor="ctr"/>
+          <a:lstStyle/>
+          <a:p/>
+        </p:txBody>
+      </p:sp>
+      <p:sp>
+        <p:nvSpPr>
+          <p:cNvPr id="7" name="TextBox 6"/>
+          <p:cNvSpPr txBox="1"/>
+          <p:nvPr/>
+        </p:nvSpPr>
+        <p:spPr>
+          <a:xfrm>
+            <a:off x="548640" y="1508760"/>
+            <a:ext cx="2011680" cy="457200"/>
+          </a:xfrm>
+          <a:prstGeom prst="rect">
+            <a:avLst/>
+          </a:prstGeom>
+          <a:noFill/>
+        </p:spPr>
+        <p:txBody>
+          <a:bodyPr wrap="square" anchor="ctr" lIns="0" rIns="0" tIns="0" bIns="0"/>
+          <a:lstStyle/>
+          <a:p>
+            <a:pPr algn="ctr"/>
+            <a:r>
+              <a:rPr sz="1400" b="1" i="0">
+                <a:solidFill>
+                  <a:srgbClr val="202122"/>
+                </a:solidFill>
+                <a:latin typeface="Calibri"/>
+              </a:rPr>
+              <a:t>25 minutes</a:t>
+            </a:r>
+          </a:p>
+        </p:txBody>
+      </p:sp>
+      <p:sp>
+        <p:nvSpPr>
+          <p:cNvPr id="8" name="TextBox 7"/>
+          <p:cNvSpPr txBox="1"/>
+          <p:nvPr/>
+        </p:nvSpPr>
+        <p:spPr>
+          <a:xfrm>
+            <a:off x="2743200" y="1508760"/>
+            <a:ext cx="4754880" cy="457200"/>
+          </a:xfrm>
+          <a:prstGeom prst="rect">
+            <a:avLst/>
+          </a:prstGeom>
+          <a:noFill/>
+        </p:spPr>
+        <p:txBody>
+          <a:bodyPr wrap="square" anchor="ctr" lIns="0" rIns="0" tIns="0" bIns="0"/>
+          <a:lstStyle/>
+          <a:p>
+            <a:pPr algn="l"/>
+            <a:r>
+              <a:rPr sz="1400" b="0" i="1">
+                <a:solidFill>
+                  <a:srgbClr val="54595D"/>
+                </a:solidFill>
+                <a:latin typeface="Calibri"/>
+              </a:rPr>
+              <a:t>Pairs</a:t>
+            </a:r>
+          </a:p>
+        </p:txBody>
+      </p:sp>
+      <p:sp>
+        <p:nvSpPr>
+          <p:cNvPr id="9" name="Oval 8"/>
+          <p:cNvSpPr/>
+          <p:nvPr/>
+        </p:nvSpPr>
+        <p:spPr>
+          <a:xfrm>
+            <a:off x="548640" y="2482596"/>
+            <a:ext cx="384048" cy="384048"/>
+          </a:xfrm>
+          <a:prstGeom prst="ellipse">
+            <a:avLst/>
+          </a:prstGeom>
+          <a:solidFill>
+            <a:srgbClr val="0645AD"/>
+          </a:solidFill>
+          <a:ln>
+            <a:noFill/>
+          </a:ln>
+          <a:effectLst/>
+        </p:spPr>
+        <p:style>
+          <a:lnRef idx="1">
+            <a:schemeClr val="accent1"/>
+          </a:lnRef>
+          <a:fillRef idx="3">
+            <a:schemeClr val="accent1"/>
+          </a:fillRef>
+          <a:effectRef idx="2">
+            <a:schemeClr val="accent1"/>
+          </a:effectRef>
+          <a:fontRef idx="minor">
+            <a:schemeClr val="lt1"/>
+          </a:fontRef>
+        </p:style>
+        <p:txBody>
+          <a:bodyPr rtlCol="0" anchor="ctr" lIns="0" rIns="0" tIns="0" bIns="0"/>
+          <a:lstStyle/>
+          <a:p>
+            <a:pPr algn="ctr"/>
+            <a:r>
+              <a:rPr sz="1300" b="1">
+                <a:solidFill>
+                  <a:srgbClr val="FFFFFF"/>
+                </a:solidFill>
+                <a:latin typeface="Calibri"/>
+              </a:rPr>
+              <a:t>1</a:t>
+            </a:r>
+          </a:p>
+        </p:txBody>
+      </p:sp>
+      <p:sp>
+        <p:nvSpPr>
+          <p:cNvPr id="10" name="TextBox 9"/>
+          <p:cNvSpPr txBox="1"/>
+          <p:nvPr/>
+        </p:nvSpPr>
+        <p:spPr>
+          <a:xfrm>
+            <a:off x="1143000" y="2240280"/>
+            <a:ext cx="5943600" cy="868680"/>
+          </a:xfrm>
+          <a:prstGeom prst="rect">
+            <a:avLst/>
+          </a:prstGeom>
+          <a:noFill/>
+        </p:spPr>
+        <p:txBody>
+          <a:bodyPr wrap="square" anchor="ctr" lIns="0" rIns="0" tIns="0" bIns="0"/>
+          <a:lstStyle/>
+          <a:p>
+            <a:pPr algn="l"/>
+            <a:r>
+              <a:rPr sz="1700" b="0" i="0">
+                <a:solidFill>
+                  <a:srgbClr val="202122"/>
+                </a:solidFill>
+                <a:latin typeface="Calibri"/>
+              </a:rPr>
+              <a:t>The form needs a username of 3 to 15 characters and a password of at least 8.</a:t>
+            </a:r>
+          </a:p>
+        </p:txBody>
+      </p:sp>
+      <p:sp>
+        <p:nvSpPr>
+          <p:cNvPr id="11" name="Oval 10"/>
+          <p:cNvSpPr/>
+          <p:nvPr/>
+        </p:nvSpPr>
+        <p:spPr>
+          <a:xfrm>
+            <a:off x="548640" y="3461004"/>
+            <a:ext cx="384048" cy="384048"/>
+          </a:xfrm>
+          <a:prstGeom prst="ellipse">
+            <a:avLst/>
+          </a:prstGeom>
+          <a:solidFill>
+            <a:srgbClr val="0645AD"/>
+          </a:solidFill>
+          <a:ln>
+            <a:noFill/>
+          </a:ln>
+          <a:effectLst/>
+        </p:spPr>
+        <p:style>
+          <a:lnRef idx="1">
+            <a:schemeClr val="accent1"/>
+          </a:lnRef>
+          <a:fillRef idx="3">
+            <a:schemeClr val="accent1"/>
+          </a:fillRef>
+          <a:effectRef idx="2">
+            <a:schemeClr val="accent1"/>
+          </a:effectRef>
+          <a:fontRef idx="minor">
+            <a:schemeClr val="lt1"/>
+          </a:fontRef>
+        </p:style>
+        <p:txBody>
+          <a:bodyPr rtlCol="0" anchor="ctr" lIns="0" rIns="0" tIns="0" bIns="0"/>
+          <a:lstStyle/>
+          <a:p>
+            <a:pPr algn="ctr"/>
+            <a:r>
+              <a:rPr sz="1300" b="1">
+                <a:solidFill>
+                  <a:srgbClr val="FFFFFF"/>
+                </a:solidFill>
+                <a:latin typeface="Calibri"/>
+              </a:rPr>
+              <a:t>2</a:t>
+            </a:r>
+          </a:p>
+        </p:txBody>
+      </p:sp>
+      <p:sp>
+        <p:nvSpPr>
+          <p:cNvPr id="12" name="TextBox 11"/>
+          <p:cNvSpPr txBox="1"/>
+          <p:nvPr/>
+        </p:nvSpPr>
+        <p:spPr>
+          <a:xfrm>
+            <a:off x="1143000" y="3218688"/>
+            <a:ext cx="5943600" cy="868680"/>
+          </a:xfrm>
+          <a:prstGeom prst="rect">
+            <a:avLst/>
+          </a:prstGeom>
+          <a:noFill/>
+        </p:spPr>
+        <p:txBody>
+          <a:bodyPr wrap="square" anchor="ctr" lIns="0" rIns="0" tIns="0" bIns="0"/>
+          <a:lstStyle/>
+          <a:p>
+            <a:pPr algn="l"/>
+            <a:r>
+              <a:rPr sz="1700" b="0" i="0">
+                <a:solidFill>
+                  <a:srgbClr val="202122"/>
+                </a:solidFill>
+                <a:latin typeface="Calibri"/>
+              </a:rPr>
+              <a:t>Write a test plan with at least ten tests.</a:t>
+            </a:r>
+          </a:p>
+        </p:txBody>
+      </p:sp>
+      <p:sp>
+        <p:nvSpPr>
+          <p:cNvPr id="13" name="Oval 12"/>
+          <p:cNvSpPr/>
+          <p:nvPr/>
+        </p:nvSpPr>
+        <p:spPr>
+          <a:xfrm>
+            <a:off x="548640" y="4439412"/>
+            <a:ext cx="384048" cy="384048"/>
+          </a:xfrm>
+          <a:prstGeom prst="ellipse">
+            <a:avLst/>
+          </a:prstGeom>
+          <a:solidFill>
+            <a:srgbClr val="0645AD"/>
+          </a:solidFill>
+          <a:ln>
+            <a:noFill/>
+          </a:ln>
+          <a:effectLst/>
+        </p:spPr>
+        <p:style>
+          <a:lnRef idx="1">
+            <a:schemeClr val="accent1"/>
+          </a:lnRef>
+          <a:fillRef idx="3">
+            <a:schemeClr val="accent1"/>
+          </a:fillRef>
+          <a:effectRef idx="2">
+            <a:schemeClr val="accent1"/>
+          </a:effectRef>
+          <a:fontRef idx="minor">
+            <a:schemeClr val="lt1"/>
+          </a:fontRef>
+        </p:style>
+        <p:txBody>
+          <a:bodyPr rtlCol="0" anchor="ctr" lIns="0" rIns="0" tIns="0" bIns="0"/>
+          <a:lstStyle/>
+          <a:p>
+            <a:pPr algn="ctr"/>
+            <a:r>
+              <a:rPr sz="1300" b="1">
+                <a:solidFill>
+                  <a:srgbClr val="FFFFFF"/>
+                </a:solidFill>
+                <a:latin typeface="Calibri"/>
+              </a:rPr>
+              <a:t>3</a:t>
+            </a:r>
+          </a:p>
+        </p:txBody>
+      </p:sp>
+      <p:sp>
+        <p:nvSpPr>
+          <p:cNvPr id="14" name="TextBox 13"/>
+          <p:cNvSpPr txBox="1"/>
+          <p:nvPr/>
+        </p:nvSpPr>
+        <p:spPr>
+          <a:xfrm>
+            <a:off x="1143000" y="4197096"/>
+            <a:ext cx="5943600" cy="868680"/>
+          </a:xfrm>
+          <a:prstGeom prst="rect">
+            <a:avLst/>
+          </a:prstGeom>
+          <a:noFill/>
+        </p:spPr>
+        <p:txBody>
+          <a:bodyPr wrap="square" anchor="ctr" lIns="0" rIns="0" tIns="0" bIns="0"/>
+          <a:lstStyle/>
+          <a:p>
+            <a:pPr algn="l"/>
+            <a:r>
+              <a:rPr sz="1700" b="0" i="0">
+                <a:solidFill>
+                  <a:srgbClr val="202122"/>
+                </a:solidFill>
+                <a:latin typeface="Calibri"/>
+              </a:rPr>
+              <a:t>Use all four types of test data.</a:t>
+            </a:r>
+          </a:p>
+        </p:txBody>
+      </p:sp>
+      <p:sp>
+        <p:nvSpPr>
+          <p:cNvPr id="15" name="Oval 14"/>
+          <p:cNvSpPr/>
+          <p:nvPr/>
+        </p:nvSpPr>
+        <p:spPr>
+          <a:xfrm>
+            <a:off x="548640" y="5417820"/>
+            <a:ext cx="384048" cy="384048"/>
+          </a:xfrm>
+          <a:prstGeom prst="ellipse">
+            <a:avLst/>
+          </a:prstGeom>
+          <a:solidFill>
+            <a:srgbClr val="0645AD"/>
+          </a:solidFill>
+          <a:ln>
+            <a:noFill/>
+          </a:ln>
+          <a:effectLst/>
+        </p:spPr>
+        <p:style>
+          <a:lnRef idx="1">
+            <a:schemeClr val="accent1"/>
+          </a:lnRef>
+          <a:fillRef idx="3">
+            <a:schemeClr val="accent1"/>
+          </a:fillRef>
+          <a:effectRef idx="2">
+            <a:schemeClr val="accent1"/>
+          </a:effectRef>
+          <a:fontRef idx="minor">
+            <a:schemeClr val="lt1"/>
+          </a:fontRef>
+        </p:style>
+        <p:txBody>
+          <a:bodyPr rtlCol="0" anchor="ctr" lIns="0" rIns="0" tIns="0" bIns="0"/>
+          <a:lstStyle/>
+          <a:p>
+            <a:pPr algn="ctr"/>
+            <a:r>
+              <a:rPr sz="1300" b="1">
+                <a:solidFill>
+                  <a:srgbClr val="FFFFFF"/>
+                </a:solidFill>
+                <a:latin typeface="Calibri"/>
+              </a:rPr>
+              <a:t>4</a:t>
+            </a:r>
+          </a:p>
+        </p:txBody>
+      </p:sp>
+      <p:sp>
+        <p:nvSpPr>
+          <p:cNvPr id="16" name="TextBox 15"/>
+          <p:cNvSpPr txBox="1"/>
+          <p:nvPr/>
+        </p:nvSpPr>
+        <p:spPr>
+          <a:xfrm>
+            <a:off x="1143000" y="5175504"/>
+            <a:ext cx="5943600" cy="868680"/>
+          </a:xfrm>
+          <a:prstGeom prst="rect">
+            <a:avLst/>
+          </a:prstGeom>
+          <a:noFill/>
+        </p:spPr>
+        <p:txBody>
+          <a:bodyPr wrap="square" anchor="ctr" lIns="0" rIns="0" tIns="0" bIns="0"/>
+          <a:lstStyle/>
+          <a:p>
+            <a:pPr algn="l"/>
+            <a:r>
+              <a:rPr sz="1700" b="0" i="0">
+                <a:solidFill>
+                  <a:srgbClr val="202122"/>
+                </a:solidFill>
+                <a:latin typeface="Calibri"/>
+              </a:rPr>
+              <a:t>Run the tests on your teacher's sample code and record the results.</a:t>
+            </a:r>
+          </a:p>
+        </p:txBody>
+      </p:sp>
+      <p:sp>
+        <p:nvSpPr>
+          <p:cNvPr id="17" name="Rounded Rectangle 16"/>
+          <p:cNvSpPr/>
+          <p:nvPr/>
+        </p:nvSpPr>
+        <p:spPr>
+          <a:xfrm>
+            <a:off x="7772400" y="1508760"/>
+            <a:ext cx="3867912" cy="4572000"/>
+          </a:xfrm>
+          <a:prstGeom prst="roundRect">
+            <a:avLst>
+              <a:gd name="adj" fmla="val 8000"/>
+            </a:avLst>
+          </a:prstGeom>
+          <a:solidFill>
+            <a:srgbClr val="EAF3FF"/>
+          </a:solidFill>
+          <a:ln>
+            <a:noFill/>
+          </a:ln>
+          <a:effectLst/>
+        </p:spPr>
+        <p:style>
+          <a:lnRef idx="1">
+            <a:schemeClr val="accent1"/>
+          </a:lnRef>
+          <a:fillRef idx="3">
+            <a:schemeClr val="accent1"/>
+          </a:fillRef>
+          <a:effectRef idx="2">
+            <a:schemeClr val="accent1"/>
+          </a:effectRef>
+          <a:fontRef idx="minor">
+            <a:schemeClr val="lt1"/>
+          </a:fontRef>
+        </p:style>
+        <p:txBody>
+          <a:bodyPr rtlCol="0" anchor="ctr"/>
+          <a:lstStyle/>
+          <a:p/>
+        </p:txBody>
+      </p:sp>
+      <p:sp>
+        <p:nvSpPr>
+          <p:cNvPr id="18" name="TextBox 17"/>
+          <p:cNvSpPr txBox="1"/>
+          <p:nvPr/>
+        </p:nvSpPr>
+        <p:spPr>
+          <a:xfrm>
+            <a:off x="8046720" y="1737360"/>
+            <a:ext cx="3291840" cy="365760"/>
+          </a:xfrm>
+          <a:prstGeom prst="rect">
+            <a:avLst/>
+          </a:prstGeom>
+          <a:noFill/>
+        </p:spPr>
+        <p:txBody>
+          <a:bodyPr wrap="square" anchor="t" lIns="0" rIns="0" tIns="0" bIns="0"/>
+          <a:lstStyle/>
+          <a:p>
+            <a:pPr algn="l"/>
+            <a:r>
+              <a:rPr sz="1300" b="1" i="0">
+                <a:solidFill>
+                  <a:srgbClr val="0645AD"/>
+                </a:solidFill>
+                <a:latin typeface="Calibri"/>
+              </a:rPr>
+              <a:t>SUCCESS CRITERIA</a:t>
+            </a:r>
+          </a:p>
+        </p:txBody>
+      </p:sp>
+      <p:sp>
+        <p:nvSpPr>
+          <p:cNvPr id="19" name="TextBox 18"/>
+          <p:cNvSpPr txBox="1"/>
+          <p:nvPr/>
+        </p:nvSpPr>
+        <p:spPr>
+          <a:xfrm>
+            <a:off x="8046720" y="2240280"/>
+            <a:ext cx="3337560" cy="3657600"/>
+          </a:xfrm>
+          <a:prstGeom prst="rect">
+            <a:avLst/>
+          </a:prstGeom>
+          <a:noFill/>
+        </p:spPr>
+        <p:txBody>
+          <a:bodyPr wrap="square" lIns="0" rIns="0" tIns="0" bIns="0">
+            <a:spAutoFit/>
+          </a:bodyPr>
+          <a:lstStyle/>
+          <a:p>
+            <a:pPr marL="274320" indent="-274320">
+              <a:spcAft>
+                <a:spcPts val="810"/>
+              </a:spcAft>
+              <a:buClr>
+                <a:srgbClr val="0645AD"/>
+              </a:buClr>
+              <a:buFont typeface="Arial"/>
+              <a:buChar char="•"/>
+            </a:pPr>
+            <a:r>
+              <a:rPr sz="1800" b="0">
+                <a:solidFill>
+                  <a:srgbClr val="202122"/>
+                </a:solidFill>
+                <a:latin typeface="Calibri"/>
+              </a:rPr>
+              <a:t>All five columns completed</a:t>
+            </a:r>
+          </a:p>
+          <a:p>
+            <a:pPr marL="274320" indent="-274320">
+              <a:spcAft>
+                <a:spcPts val="810"/>
+              </a:spcAft>
+              <a:buClr>
+                <a:srgbClr val="0645AD"/>
+              </a:buClr>
+              <a:buFont typeface="Arial"/>
+              <a:buChar char="•"/>
+            </a:pPr>
+            <a:r>
+              <a:rPr sz="1800" b="0">
+                <a:solidFill>
+                  <a:srgbClr val="202122"/>
+                </a:solidFill>
+                <a:latin typeface="Calibri"/>
+              </a:rPr>
+              <a:t>Boundaries 3, 15 and 8 tested</a:t>
+            </a:r>
+          </a:p>
+          <a:p>
+            <a:pPr marL="274320" indent="-274320">
+              <a:spcAft>
+                <a:spcPts val="810"/>
+              </a:spcAft>
+              <a:buClr>
+                <a:srgbClr val="0645AD"/>
+              </a:buClr>
+              <a:buFont typeface="Arial"/>
+              <a:buChar char="•"/>
+            </a:pPr>
+            <a:r>
+              <a:rPr sz="1800" b="0">
+                <a:solidFill>
+                  <a:srgbClr val="202122"/>
+                </a:solidFill>
+                <a:latin typeface="Calibri"/>
+              </a:rPr>
+              <a:t>Failures clearly recorded</a:t>
+            </a:r>
+          </a:p>
+        </p:txBody>
+      </p:sp>
+    </p:spTree>
+  </p:cSld>
+  <p:clrMapOvr>
+    <a:masterClrMapping/>
+  </p:clrMapOvr>
+</p:sld>
+</file>
+
+<file path=ppt/slides/slide15.xml><?xml version="1.0" encoding="utf-8"?>
+<p:sld xmlns:a="http://schemas.openxmlformats.org/drawingml/2006/main" xmlns:p="http://schemas.openxmlformats.org/presentationml/2006/main" xmlns:r="http://schemas.openxmlformats.org/officeDocument/2006/relationships">
+  <p:cSld>
+    <p:bg>
+      <p:bgPr>
+        <a:solidFill>
+          <a:srgbClr val="03306E"/>
+        </a:solidFill>
+        <a:effectLst/>
+      </p:bgPr>
+    </p:bg>
+    <p:spTree>
+      <p:nvGrpSpPr>
+        <p:cNvPr id="1" name=""/>
+        <p:cNvGrpSpPr/>
+        <p:nvPr/>
+      </p:nvGrpSpPr>
+      <p:grpSpPr/>
+      <p:sp>
+        <p:nvSpPr>
+          <p:cNvPr id="2" name="TextBox 1"/>
+          <p:cNvSpPr txBox="1"/>
+          <p:nvPr/>
+        </p:nvSpPr>
+        <p:spPr>
+          <a:xfrm>
+            <a:off x="548640" y="320040"/>
+            <a:ext cx="11094415" cy="274320"/>
+          </a:xfrm>
+          <a:prstGeom prst="rect">
+            <a:avLst/>
+          </a:prstGeom>
+          <a:noFill/>
+        </p:spPr>
+        <p:txBody>
+          <a:bodyPr wrap="square" anchor="t" lIns="0" rIns="0" tIns="0" bIns="0"/>
+          <a:lstStyle/>
+          <a:p>
+            <a:pPr algn="l"/>
+            <a:r>
+              <a:rPr sz="1100" b="1" i="0">
+                <a:solidFill>
+                  <a:srgbClr val="A9C8F0"/>
+                </a:solidFill>
+                <a:latin typeface="Calibri"/>
+              </a:rPr>
+              <a:t>CORE COMPONENT  ·  Core Paper 1</a:t>
+            </a:r>
+          </a:p>
+        </p:txBody>
+      </p:sp>
+      <p:sp>
+        <p:nvSpPr>
+          <p:cNvPr id="3" name="TextBox 2"/>
+          <p:cNvSpPr txBox="1"/>
+          <p:nvPr/>
+        </p:nvSpPr>
+        <p:spPr>
+          <a:xfrm>
+            <a:off x="548640" y="566928"/>
+            <a:ext cx="11094415" cy="822960"/>
+          </a:xfrm>
+          <a:prstGeom prst="rect">
+            <a:avLst/>
+          </a:prstGeom>
+          <a:noFill/>
+        </p:spPr>
+        <p:txBody>
+          <a:bodyPr wrap="square" anchor="ctr" lIns="0" rIns="0" tIns="0" bIns="0"/>
+          <a:lstStyle/>
+          <a:p>
+            <a:pPr algn="l"/>
+            <a:r>
+              <a:rPr sz="3200" b="1" i="0">
+                <a:solidFill>
+                  <a:srgbClr val="FFFFFF"/>
+                </a:solidFill>
+                <a:latin typeface="Cambria"/>
+              </a:rPr>
+              <a:t>Exit ticket</a:t>
+            </a:r>
+          </a:p>
+        </p:txBody>
+      </p:sp>
+      <p:sp>
+        <p:nvSpPr>
+          <p:cNvPr id="4" name="Oval 3"/>
+          <p:cNvSpPr/>
+          <p:nvPr/>
+        </p:nvSpPr>
+        <p:spPr>
+          <a:xfrm>
+            <a:off x="548640" y="1737360"/>
+            <a:ext cx="502920" cy="502920"/>
+          </a:xfrm>
+          <a:prstGeom prst="ellipse">
+            <a:avLst/>
+          </a:prstGeom>
+          <a:solidFill>
+            <a:srgbClr val="F2B705"/>
+          </a:solidFill>
+          <a:ln>
+            <a:noFill/>
+          </a:ln>
+          <a:effectLst/>
+        </p:spPr>
+        <p:style>
+          <a:lnRef idx="1">
+            <a:schemeClr val="accent1"/>
+          </a:lnRef>
+          <a:fillRef idx="3">
+            <a:schemeClr val="accent1"/>
+          </a:fillRef>
+          <a:effectRef idx="2">
+            <a:schemeClr val="accent1"/>
+          </a:effectRef>
+          <a:fontRef idx="minor">
+            <a:schemeClr val="lt1"/>
+          </a:fontRef>
+        </p:style>
+        <p:txBody>
+          <a:bodyPr rtlCol="0" anchor="ctr" lIns="0" rIns="0" tIns="0" bIns="0"/>
+          <a:lstStyle/>
+          <a:p>
+            <a:pPr algn="ctr"/>
+            <a:r>
+              <a:rPr sz="1700" b="1">
+                <a:solidFill>
+                  <a:srgbClr val="202122"/>
+                </a:solidFill>
+                <a:latin typeface="Calibri"/>
+              </a:rPr>
+              <a:t>1</a:t>
+            </a:r>
+          </a:p>
+        </p:txBody>
+      </p:sp>
+      <p:sp>
+        <p:nvSpPr>
+          <p:cNvPr id="5" name="TextBox 4"/>
+          <p:cNvSpPr txBox="1"/>
+          <p:nvPr/>
+        </p:nvSpPr>
+        <p:spPr>
+          <a:xfrm>
+            <a:off x="1325880" y="1645920"/>
+            <a:ext cx="6583680" cy="822960"/>
+          </a:xfrm>
+          <a:prstGeom prst="rect">
+            <a:avLst/>
+          </a:prstGeom>
+          <a:noFill/>
+        </p:spPr>
+        <p:txBody>
+          <a:bodyPr wrap="square" anchor="ctr" lIns="0" rIns="0" tIns="0" bIns="0"/>
+          <a:lstStyle/>
+          <a:p>
+            <a:pPr algn="l"/>
+            <a:r>
+              <a:rPr sz="2000" b="0" i="0">
+                <a:solidFill>
+                  <a:srgbClr val="FFFFFF"/>
+                </a:solidFill>
+                <a:latin typeface="Calibri"/>
+              </a:rPr>
+              <a:t>What is closed box testing?</a:t>
+            </a:r>
+          </a:p>
+        </p:txBody>
+      </p:sp>
+      <p:sp>
+        <p:nvSpPr>
+          <p:cNvPr id="6" name="Oval 5"/>
+          <p:cNvSpPr/>
+          <p:nvPr/>
+        </p:nvSpPr>
+        <p:spPr>
+          <a:xfrm>
+            <a:off x="548640" y="2697480"/>
+            <a:ext cx="502920" cy="502920"/>
+          </a:xfrm>
+          <a:prstGeom prst="ellipse">
+            <a:avLst/>
+          </a:prstGeom>
+          <a:solidFill>
+            <a:srgbClr val="F2B705"/>
+          </a:solidFill>
+          <a:ln>
+            <a:noFill/>
+          </a:ln>
+          <a:effectLst/>
+        </p:spPr>
+        <p:style>
+          <a:lnRef idx="1">
+            <a:schemeClr val="accent1"/>
+          </a:lnRef>
+          <a:fillRef idx="3">
+            <a:schemeClr val="accent1"/>
+          </a:fillRef>
+          <a:effectRef idx="2">
+            <a:schemeClr val="accent1"/>
+          </a:effectRef>
+          <a:fontRef idx="minor">
+            <a:schemeClr val="lt1"/>
+          </a:fontRef>
+        </p:style>
+        <p:txBody>
+          <a:bodyPr rtlCol="0" anchor="ctr" lIns="0" rIns="0" tIns="0" bIns="0"/>
+          <a:lstStyle/>
+          <a:p>
+            <a:pPr algn="ctr"/>
+            <a:r>
+              <a:rPr sz="1700" b="1">
+                <a:solidFill>
+                  <a:srgbClr val="202122"/>
+                </a:solidFill>
+                <a:latin typeface="Calibri"/>
+              </a:rPr>
+              <a:t>2</a:t>
+            </a:r>
+          </a:p>
+        </p:txBody>
+      </p:sp>
+      <p:sp>
+        <p:nvSpPr>
+          <p:cNvPr id="7" name="TextBox 6"/>
+          <p:cNvSpPr txBox="1"/>
+          <p:nvPr/>
+        </p:nvSpPr>
+        <p:spPr>
+          <a:xfrm>
+            <a:off x="1325880" y="2606040"/>
+            <a:ext cx="6583680" cy="822960"/>
+          </a:xfrm>
+          <a:prstGeom prst="rect">
+            <a:avLst/>
+          </a:prstGeom>
+          <a:noFill/>
+        </p:spPr>
+        <p:txBody>
+          <a:bodyPr wrap="square" anchor="ctr" lIns="0" rIns="0" tIns="0" bIns="0"/>
+          <a:lstStyle/>
+          <a:p>
+            <a:pPr algn="l"/>
+            <a:r>
+              <a:rPr sz="2000" b="0" i="0">
+                <a:solidFill>
+                  <a:srgbClr val="FFFFFF"/>
+                </a:solidFill>
+                <a:latin typeface="Calibri"/>
+              </a:rPr>
+              <a:t>Why write the expected result before testing?</a:t>
+            </a:r>
+          </a:p>
+        </p:txBody>
+      </p:sp>
+      <p:sp>
+        <p:nvSpPr>
+          <p:cNvPr id="8" name="Oval 7"/>
+          <p:cNvSpPr/>
+          <p:nvPr/>
+        </p:nvSpPr>
+        <p:spPr>
+          <a:xfrm>
+            <a:off x="548640" y="3657600"/>
+            <a:ext cx="502920" cy="502920"/>
+          </a:xfrm>
+          <a:prstGeom prst="ellipse">
+            <a:avLst/>
+          </a:prstGeom>
+          <a:solidFill>
+            <a:srgbClr val="F2B705"/>
+          </a:solidFill>
+          <a:ln>
+            <a:noFill/>
+          </a:ln>
+          <a:effectLst/>
+        </p:spPr>
+        <p:style>
+          <a:lnRef idx="1">
+            <a:schemeClr val="accent1"/>
+          </a:lnRef>
+          <a:fillRef idx="3">
+            <a:schemeClr val="accent1"/>
+          </a:fillRef>
+          <a:effectRef idx="2">
+            <a:schemeClr val="accent1"/>
+          </a:effectRef>
+          <a:fontRef idx="minor">
+            <a:schemeClr val="lt1"/>
+          </a:fontRef>
+        </p:style>
+        <p:txBody>
+          <a:bodyPr rtlCol="0" anchor="ctr" lIns="0" rIns="0" tIns="0" bIns="0"/>
+          <a:lstStyle/>
+          <a:p>
+            <a:pPr algn="ctr"/>
+            <a:r>
+              <a:rPr sz="1700" b="1">
+                <a:solidFill>
+                  <a:srgbClr val="202122"/>
+                </a:solidFill>
+                <a:latin typeface="Calibri"/>
+              </a:rPr>
+              <a:t>3</a:t>
+            </a:r>
+          </a:p>
+        </p:txBody>
+      </p:sp>
+      <p:sp>
+        <p:nvSpPr>
+          <p:cNvPr id="9" name="TextBox 8"/>
+          <p:cNvSpPr txBox="1"/>
+          <p:nvPr/>
+        </p:nvSpPr>
+        <p:spPr>
+          <a:xfrm>
+            <a:off x="1325880" y="3566160"/>
+            <a:ext cx="6583680" cy="822960"/>
+          </a:xfrm>
+          <a:prstGeom prst="rect">
+            <a:avLst/>
+          </a:prstGeom>
+          <a:noFill/>
+        </p:spPr>
+        <p:txBody>
+          <a:bodyPr wrap="square" anchor="ctr" lIns="0" rIns="0" tIns="0" bIns="0"/>
+          <a:lstStyle/>
+          <a:p>
+            <a:pPr algn="l"/>
+            <a:r>
+              <a:rPr sz="2000" b="0" i="0">
+                <a:solidFill>
+                  <a:srgbClr val="FFFFFF"/>
+                </a:solidFill>
+                <a:latin typeface="Calibri"/>
+              </a:rPr>
+              <a:t>Which test would find a slow website on launch day?</a:t>
+            </a:r>
+          </a:p>
+        </p:txBody>
+      </p:sp>
+      <p:sp>
+        <p:nvSpPr>
+          <p:cNvPr id="10" name="Rounded Rectangle 9"/>
+          <p:cNvSpPr/>
+          <p:nvPr/>
+        </p:nvSpPr>
+        <p:spPr>
+          <a:xfrm>
+            <a:off x="8229600" y="1645920"/>
+            <a:ext cx="3410712" cy="2926080"/>
+          </a:xfrm>
+          <a:prstGeom prst="roundRect">
+            <a:avLst>
+              <a:gd name="adj" fmla="val 8000"/>
+            </a:avLst>
+          </a:prstGeom>
+          <a:solidFill>
+            <a:srgbClr val="0645AD"/>
+          </a:solidFill>
+          <a:ln>
+            <a:noFill/>
+          </a:ln>
+          <a:effectLst/>
+        </p:spPr>
+        <p:style>
+          <a:lnRef idx="1">
+            <a:schemeClr val="accent1"/>
+          </a:lnRef>
+          <a:fillRef idx="3">
+            <a:schemeClr val="accent1"/>
+          </a:fillRef>
+          <a:effectRef idx="2">
+            <a:schemeClr val="accent1"/>
+          </a:effectRef>
+          <a:fontRef idx="minor">
+            <a:schemeClr val="lt1"/>
+          </a:fontRef>
+        </p:style>
+        <p:txBody>
+          <a:bodyPr rtlCol="0" anchor="ctr"/>
+          <a:lstStyle/>
+          <a:p/>
+        </p:txBody>
+      </p:sp>
+      <p:sp>
+        <p:nvSpPr>
+          <p:cNvPr id="11" name="TextBox 10"/>
+          <p:cNvSpPr txBox="1"/>
+          <p:nvPr/>
+        </p:nvSpPr>
+        <p:spPr>
+          <a:xfrm>
+            <a:off x="8503920" y="1874519"/>
+            <a:ext cx="2926080" cy="365760"/>
+          </a:xfrm>
+          <a:prstGeom prst="rect">
+            <a:avLst/>
+          </a:prstGeom>
+          <a:noFill/>
+        </p:spPr>
+        <p:txBody>
+          <a:bodyPr wrap="square" anchor="t" lIns="0" rIns="0" tIns="0" bIns="0"/>
+          <a:lstStyle/>
+          <a:p>
+            <a:pPr algn="l"/>
+            <a:r>
+              <a:rPr sz="1300" b="1" i="0">
+                <a:solidFill>
+                  <a:srgbClr val="A9C8F0"/>
+                </a:solidFill>
+                <a:latin typeface="Calibri"/>
+              </a:rPr>
+              <a:t>REVISE THIS TOPIC</a:t>
+            </a:r>
+          </a:p>
+        </p:txBody>
+      </p:sp>
+      <p:sp>
+        <p:nvSpPr>
+          <p:cNvPr id="12" name="TextBox 11"/>
+          <p:cNvSpPr txBox="1"/>
+          <p:nvPr/>
+        </p:nvSpPr>
+        <p:spPr>
+          <a:xfrm>
+            <a:off x="8503920" y="2286000"/>
+            <a:ext cx="2926080" cy="548640"/>
+          </a:xfrm>
+          <a:prstGeom prst="rect">
+            <a:avLst/>
+          </a:prstGeom>
+          <a:noFill/>
+        </p:spPr>
+        <p:txBody>
+          <a:bodyPr wrap="square" anchor="t" lIns="0" rIns="0" tIns="0" bIns="0"/>
+          <a:lstStyle/>
+          <a:p>
+            <a:pPr algn="l"/>
+            <a:r>
+              <a:rPr sz="1400" b="0" i="0">
+                <a:solidFill>
+                  <a:srgbClr val="FFFFFF"/>
+                </a:solidFill>
+                <a:latin typeface="Calibri"/>
+              </a:rPr>
+              <a:t>Revision notes for this lesson are on the study wiki:</a:t>
+            </a:r>
+          </a:p>
+        </p:txBody>
+      </p:sp>
+      <p:sp>
+        <p:nvSpPr>
+          <p:cNvPr id="13" name="TextBox 12"/>
+          <p:cNvSpPr txBox="1"/>
+          <p:nvPr/>
+        </p:nvSpPr>
+        <p:spPr>
+          <a:xfrm>
+            <a:off x="8503920" y="2926080"/>
+            <a:ext cx="2926080" cy="1463040"/>
+          </a:xfrm>
+          <a:prstGeom prst="rect">
+            <a:avLst/>
+          </a:prstGeom>
+          <a:noFill/>
+        </p:spPr>
+        <p:txBody>
+          <a:bodyPr wrap="square" anchor="t" lIns="0" rIns="0" tIns="0" bIns="0"/>
+          <a:lstStyle/>
+          <a:p>
+            <a:pPr algn="l"/>
+            <a:r>
+              <a:rPr sz="2000" b="1" i="0">
+                <a:solidFill>
+                  <a:srgbClr val="FFFFFF"/>
+                </a:solidFill>
+                <a:latin typeface="Cambria"/>
+              </a:rPr>
+              <a:t>Core Paper 1: Problem Solving, Programming, Emerging Issues and Legislation</a:t>
+            </a:r>
+          </a:p>
+        </p:txBody>
+      </p:sp>
+      <p:sp>
+        <p:nvSpPr>
+          <p:cNvPr id="14" name="TextBox 13"/>
+          <p:cNvSpPr txBox="1"/>
+          <p:nvPr/>
+        </p:nvSpPr>
+        <p:spPr>
+          <a:xfrm>
+            <a:off x="548640" y="5669280"/>
+            <a:ext cx="11094415" cy="548640"/>
+          </a:xfrm>
+          <a:prstGeom prst="rect">
+            <a:avLst/>
+          </a:prstGeom>
+          <a:noFill/>
+        </p:spPr>
+        <p:txBody>
+          <a:bodyPr wrap="square" anchor="t" lIns="0" rIns="0" tIns="0" bIns="0"/>
+          <a:lstStyle/>
+          <a:p>
+            <a:pPr algn="l"/>
+            <a:r>
+              <a:rPr sz="1200" b="0" i="0">
+                <a:solidFill>
+                  <a:srgbClr val="A9C8F0"/>
+                </a:solidFill>
+                <a:latin typeface="Calibri"/>
+              </a:rPr>
+              <a:t>https://lana6478.github.io/T-level-Digital-Software-Development/#/01-core-component/01-core-paper-1.md</a:t>
+            </a:r>
+          </a:p>
+        </p:txBody>
+      </p:sp>
+    </p:spTree>
+  </p:cSld>
+  <p:clrMapOvr>
+    <a:masterClrMapping/>
+  </p:clrMapOvr>
+</p:sld>
+</file>
+
 <file path=ppt/slides/slide2.xml><?xml version="1.0" encoding="utf-8"?>
 <p:sld xmlns:a="http://schemas.openxmlformats.org/drawingml/2006/main" xmlns:p="http://schemas.openxmlformats.org/presentationml/2006/main" xmlns:r="http://schemas.openxmlformats.org/officeDocument/2006/relationships">
   <p:cSld>
@@ -4766,6 +8873,398 @@
                 <a:latin typeface="Calibri"/>
               </a:rPr>
               <a:t>3</a:t>
+            </a:r>
+          </a:p>
+        </p:txBody>
+      </p:sp>
+      <p:sp>
+        <p:nvSpPr>
+          <p:cNvPr id="6" name="TextBox 5"/>
+          <p:cNvSpPr txBox="1"/>
+          <p:nvPr/>
+        </p:nvSpPr>
+        <p:spPr>
+          <a:xfrm>
+            <a:off x="548640" y="1554480"/>
+            <a:ext cx="6720840" cy="4617720"/>
+          </a:xfrm>
+          <a:prstGeom prst="rect">
+            <a:avLst/>
+          </a:prstGeom>
+          <a:noFill/>
+        </p:spPr>
+        <p:txBody>
+          <a:bodyPr wrap="square" lIns="0" rIns="0" tIns="0" bIns="0">
+            <a:spAutoFit/>
+          </a:bodyPr>
+          <a:lstStyle/>
+          <a:p>
+            <a:pPr>
+              <a:spcAft>
+                <a:spcPts val="1200"/>
+              </a:spcAft>
+            </a:pPr>
+            <a:r>
+              <a:rPr sz="2000" b="0">
+                <a:solidFill>
+                  <a:srgbClr val="202122"/>
+                </a:solidFill>
+                <a:latin typeface="Calibri"/>
+              </a:rPr>
+              <a:t>Test components separately before combining them, because a bug is far easier to find in a small piece.</a:t>
+            </a:r>
+          </a:p>
+          <a:p>
+            <a:pPr>
+              <a:spcAft>
+                <a:spcPts val="1200"/>
+              </a:spcAft>
+            </a:pPr>
+            <a:r>
+              <a:rPr sz="2000" b="0">
+                <a:solidFill>
+                  <a:srgbClr val="202122"/>
+                </a:solidFill>
+                <a:latin typeface="Calibri"/>
+              </a:rPr>
+              <a:t>Unit testing checks one function or module; integration testing checks modules working together; system testing checks the whole program; acceptance testing checks it meets the user's requirements.</a:t>
+            </a:r>
+          </a:p>
+          <a:p>
+            <a:pPr>
+              <a:spcAft>
+                <a:spcPts val="1200"/>
+              </a:spcAft>
+            </a:pPr>
+            <a:r>
+              <a:rPr sz="2000" b="0">
+                <a:solidFill>
+                  <a:srgbClr val="202122"/>
+                </a:solidFill>
+                <a:latin typeface="Calibri"/>
+              </a:rPr>
+              <a:t>Boundary testing uses edge values. Performance, load and stress testing check speed under normal, heavy and extreme use. Usability testing checks it's easy to use. Regression testing checks a change hasn't broken old features. Closed box testing uses only inputs and outputs; open box uses knowledge of the code.</a:t>
+            </a:r>
+          </a:p>
+        </p:txBody>
+      </p:sp>
+      <p:sp>
+        <p:nvSpPr>
+          <p:cNvPr id="7" name="Rounded Rectangle 6"/>
+          <p:cNvSpPr/>
+          <p:nvPr/>
+        </p:nvSpPr>
+        <p:spPr>
+          <a:xfrm>
+            <a:off x="7772400" y="1554480"/>
+            <a:ext cx="3867912" cy="4526280"/>
+          </a:xfrm>
+          <a:prstGeom prst="roundRect">
+            <a:avLst>
+              <a:gd name="adj" fmla="val 8000"/>
+            </a:avLst>
+          </a:prstGeom>
+          <a:solidFill>
+            <a:srgbClr val="03306E"/>
+          </a:solidFill>
+          <a:ln>
+            <a:noFill/>
+          </a:ln>
+          <a:effectLst/>
+        </p:spPr>
+        <p:style>
+          <a:lnRef idx="1">
+            <a:schemeClr val="accent1"/>
+          </a:lnRef>
+          <a:fillRef idx="3">
+            <a:schemeClr val="accent1"/>
+          </a:fillRef>
+          <a:effectRef idx="2">
+            <a:schemeClr val="accent1"/>
+          </a:effectRef>
+          <a:fontRef idx="minor">
+            <a:schemeClr val="lt1"/>
+          </a:fontRef>
+        </p:style>
+        <p:txBody>
+          <a:bodyPr rtlCol="0" anchor="ctr"/>
+          <a:lstStyle/>
+          <a:p/>
+        </p:txBody>
+      </p:sp>
+      <p:sp>
+        <p:nvSpPr>
+          <p:cNvPr id="8" name="Oval 7"/>
+          <p:cNvSpPr/>
+          <p:nvPr/>
+        </p:nvSpPr>
+        <p:spPr>
+          <a:xfrm>
+            <a:off x="8046720" y="1828800"/>
+            <a:ext cx="548640" cy="548640"/>
+          </a:xfrm>
+          <a:prstGeom prst="ellipse">
+            <a:avLst/>
+          </a:prstGeom>
+          <a:solidFill>
+            <a:srgbClr val="F2B705"/>
+          </a:solidFill>
+          <a:ln>
+            <a:noFill/>
+          </a:ln>
+          <a:effectLst/>
+        </p:spPr>
+        <p:style>
+          <a:lnRef idx="1">
+            <a:schemeClr val="accent1"/>
+          </a:lnRef>
+          <a:fillRef idx="3">
+            <a:schemeClr val="accent1"/>
+          </a:fillRef>
+          <a:effectRef idx="2">
+            <a:schemeClr val="accent1"/>
+          </a:effectRef>
+          <a:fontRef idx="minor">
+            <a:schemeClr val="lt1"/>
+          </a:fontRef>
+        </p:style>
+        <p:txBody>
+          <a:bodyPr rtlCol="0" anchor="ctr" lIns="0" rIns="0" tIns="0" bIns="0"/>
+          <a:lstStyle/>
+          <a:p>
+            <a:pPr algn="ctr"/>
+            <a:r>
+              <a:rPr sz="1300" b="1">
+                <a:solidFill>
+                  <a:srgbClr val="202122"/>
+                </a:solidFill>
+                <a:latin typeface="Calibri"/>
+              </a:rPr>
+              <a:t>e.g.</a:t>
+            </a:r>
+          </a:p>
+        </p:txBody>
+      </p:sp>
+      <p:sp>
+        <p:nvSpPr>
+          <p:cNvPr id="9" name="TextBox 8"/>
+          <p:cNvSpPr txBox="1"/>
+          <p:nvPr/>
+        </p:nvSpPr>
+        <p:spPr>
+          <a:xfrm>
+            <a:off x="8046720" y="2560320"/>
+            <a:ext cx="3291840" cy="365760"/>
+          </a:xfrm>
+          <a:prstGeom prst="rect">
+            <a:avLst/>
+          </a:prstGeom>
+          <a:noFill/>
+        </p:spPr>
+        <p:txBody>
+          <a:bodyPr wrap="square" anchor="t" lIns="0" rIns="0" tIns="0" bIns="0"/>
+          <a:lstStyle/>
+          <a:p>
+            <a:pPr algn="l"/>
+            <a:r>
+              <a:rPr sz="1300" b="1" i="0">
+                <a:solidFill>
+                  <a:srgbClr val="A9C8F0"/>
+                </a:solidFill>
+                <a:latin typeface="Calibri"/>
+              </a:rPr>
+              <a:t>EXAMPLE</a:t>
+            </a:r>
+          </a:p>
+        </p:txBody>
+      </p:sp>
+      <p:sp>
+        <p:nvSpPr>
+          <p:cNvPr id="10" name="TextBox 9"/>
+          <p:cNvSpPr txBox="1"/>
+          <p:nvPr/>
+        </p:nvSpPr>
+        <p:spPr>
+          <a:xfrm>
+            <a:off x="8046720" y="2971800"/>
+            <a:ext cx="3291840" cy="2971800"/>
+          </a:xfrm>
+          <a:prstGeom prst="rect">
+            <a:avLst/>
+          </a:prstGeom>
+          <a:noFill/>
+        </p:spPr>
+        <p:txBody>
+          <a:bodyPr wrap="square" anchor="t" lIns="0" rIns="0" tIns="0" bIns="0"/>
+          <a:lstStyle/>
+          <a:p>
+            <a:pPr algn="l"/>
+            <a:r>
+              <a:rPr sz="1900" b="0" i="0">
+                <a:solidFill>
+                  <a:srgbClr val="FFFFFF"/>
+                </a:solidFill>
+                <a:latin typeface="Cambria"/>
+              </a:rPr>
+              <a:t>A shop's checkout: unit test the total function, integration test basket plus payment, load test 1,000 shoppers, then regression test after every change.</a:t>
+            </a:r>
+          </a:p>
+        </p:txBody>
+      </p:sp>
+    </p:spTree>
+  </p:cSld>
+  <p:clrMapOvr>
+    <a:masterClrMapping/>
+  </p:clrMapOvr>
+</p:sld>
+</file>
+
+<file path=ppt/slides/slide4.xml><?xml version="1.0" encoding="utf-8"?>
+<p:sld xmlns:a="http://schemas.openxmlformats.org/drawingml/2006/main" xmlns:p="http://schemas.openxmlformats.org/presentationml/2006/main" xmlns:r="http://schemas.openxmlformats.org/officeDocument/2006/relationships">
+  <p:cSld>
+    <p:bg>
+      <p:bgPr>
+        <a:solidFill>
+          <a:srgbClr val="FFFFFF"/>
+        </a:solidFill>
+        <a:effectLst/>
+      </p:bgPr>
+    </p:bg>
+    <p:spTree>
+      <p:nvGrpSpPr>
+        <p:cNvPr id="1" name=""/>
+        <p:cNvGrpSpPr/>
+        <p:nvPr/>
+      </p:nvGrpSpPr>
+      <p:grpSpPr/>
+      <p:sp>
+        <p:nvSpPr>
+          <p:cNvPr id="2" name="TextBox 1"/>
+          <p:cNvSpPr txBox="1"/>
+          <p:nvPr/>
+        </p:nvSpPr>
+        <p:spPr>
+          <a:xfrm>
+            <a:off x="548640" y="320040"/>
+            <a:ext cx="11094415" cy="274320"/>
+          </a:xfrm>
+          <a:prstGeom prst="rect">
+            <a:avLst/>
+          </a:prstGeom>
+          <a:noFill/>
+        </p:spPr>
+        <p:txBody>
+          <a:bodyPr wrap="square" anchor="t" lIns="0" rIns="0" tIns="0" bIns="0"/>
+          <a:lstStyle/>
+          <a:p>
+            <a:pPr algn="l"/>
+            <a:r>
+              <a:rPr sz="1100" b="1" i="0">
+                <a:solidFill>
+                  <a:srgbClr val="54595D"/>
+                </a:solidFill>
+                <a:latin typeface="Calibri"/>
+              </a:rPr>
+              <a:t>CORE COMPONENT  ·  Core Paper 1</a:t>
+            </a:r>
+          </a:p>
+        </p:txBody>
+      </p:sp>
+      <p:sp>
+        <p:nvSpPr>
+          <p:cNvPr id="3" name="TextBox 2"/>
+          <p:cNvSpPr txBox="1"/>
+          <p:nvPr/>
+        </p:nvSpPr>
+        <p:spPr>
+          <a:xfrm>
+            <a:off x="548640" y="566928"/>
+            <a:ext cx="11094415" cy="822960"/>
+          </a:xfrm>
+          <a:prstGeom prst="rect">
+            <a:avLst/>
+          </a:prstGeom>
+          <a:noFill/>
+        </p:spPr>
+        <p:txBody>
+          <a:bodyPr wrap="square" anchor="ctr" lIns="0" rIns="0" tIns="0" bIns="0"/>
+          <a:lstStyle/>
+          <a:p>
+            <a:pPr algn="l"/>
+            <a:r>
+              <a:rPr sz="3200" b="1" i="0">
+                <a:solidFill>
+                  <a:srgbClr val="03306E"/>
+                </a:solidFill>
+                <a:latin typeface="Cambria"/>
+              </a:rPr>
+              <a:t>Testing methods</a:t>
+            </a:r>
+          </a:p>
+        </p:txBody>
+      </p:sp>
+      <p:sp>
+        <p:nvSpPr>
+          <p:cNvPr id="4" name="TextBox 3"/>
+          <p:cNvSpPr txBox="1"/>
+          <p:nvPr/>
+        </p:nvSpPr>
+        <p:spPr>
+          <a:xfrm>
+            <a:off x="548640" y="6446520"/>
+            <a:ext cx="8229600" cy="274320"/>
+          </a:xfrm>
+          <a:prstGeom prst="rect">
+            <a:avLst/>
+          </a:prstGeom>
+          <a:noFill/>
+        </p:spPr>
+        <p:txBody>
+          <a:bodyPr wrap="square" anchor="t" lIns="0" rIns="0" tIns="0" bIns="0"/>
+          <a:lstStyle/>
+          <a:p>
+            <a:pPr algn="l"/>
+            <a:r>
+              <a:rPr sz="1000" b="0" i="0">
+                <a:solidFill>
+                  <a:srgbClr val="54595D"/>
+                </a:solidFill>
+                <a:latin typeface="Calibri"/>
+              </a:rPr>
+              <a:t>Digital Software Development T Level  ·  Testing</a:t>
+            </a:r>
+          </a:p>
+        </p:txBody>
+      </p:sp>
+      <p:sp>
+        <p:nvSpPr>
+          <p:cNvPr id="5" name="TextBox 4"/>
+          <p:cNvSpPr txBox="1"/>
+          <p:nvPr/>
+        </p:nvSpPr>
+        <p:spPr>
+          <a:xfrm>
+            <a:off x="10728655" y="6446520"/>
+            <a:ext cx="914400" cy="274320"/>
+          </a:xfrm>
+          <a:prstGeom prst="rect">
+            <a:avLst/>
+          </a:prstGeom>
+          <a:noFill/>
+        </p:spPr>
+        <p:txBody>
+          <a:bodyPr wrap="square" anchor="t" lIns="0" rIns="0" tIns="0" bIns="0"/>
+          <a:lstStyle/>
+          <a:p>
+            <a:pPr algn="r"/>
+            <a:r>
+              <a:rPr sz="1000" b="0" i="0">
+                <a:solidFill>
+                  <a:srgbClr val="54595D"/>
+                </a:solidFill>
+                <a:latin typeface="Calibri"/>
+              </a:rPr>
+              <a:t>4</a:t>
             </a:r>
           </a:p>
         </p:txBody>
@@ -5172,816 +9671,6 @@
 </p:sld>
 </file>
 
-<file path=ppt/slides/slide4.xml><?xml version="1.0" encoding="utf-8"?>
-<p:sld xmlns:a="http://schemas.openxmlformats.org/drawingml/2006/main" xmlns:p="http://schemas.openxmlformats.org/presentationml/2006/main" xmlns:r="http://schemas.openxmlformats.org/officeDocument/2006/relationships">
-  <p:cSld>
-    <p:bg>
-      <p:bgPr>
-        <a:solidFill>
-          <a:srgbClr val="FFFFFF"/>
-        </a:solidFill>
-        <a:effectLst/>
-      </p:bgPr>
-    </p:bg>
-    <p:spTree>
-      <p:nvGrpSpPr>
-        <p:cNvPr id="1" name=""/>
-        <p:cNvGrpSpPr/>
-        <p:nvPr/>
-      </p:nvGrpSpPr>
-      <p:grpSpPr/>
-      <p:sp>
-        <p:nvSpPr>
-          <p:cNvPr id="2" name="TextBox 1"/>
-          <p:cNvSpPr txBox="1"/>
-          <p:nvPr/>
-        </p:nvSpPr>
-        <p:spPr>
-          <a:xfrm>
-            <a:off x="548640" y="320040"/>
-            <a:ext cx="11094415" cy="274320"/>
-          </a:xfrm>
-          <a:prstGeom prst="rect">
-            <a:avLst/>
-          </a:prstGeom>
-          <a:noFill/>
-        </p:spPr>
-        <p:txBody>
-          <a:bodyPr wrap="square" anchor="t" lIns="0" rIns="0" tIns="0" bIns="0"/>
-          <a:lstStyle/>
-          <a:p>
-            <a:pPr algn="l"/>
-            <a:r>
-              <a:rPr sz="1100" b="1" i="0">
-                <a:solidFill>
-                  <a:srgbClr val="54595D"/>
-                </a:solidFill>
-                <a:latin typeface="Calibri"/>
-              </a:rPr>
-              <a:t>CORE COMPONENT  ·  Core Paper 1</a:t>
-            </a:r>
-          </a:p>
-        </p:txBody>
-      </p:sp>
-      <p:sp>
-        <p:nvSpPr>
-          <p:cNvPr id="3" name="TextBox 2"/>
-          <p:cNvSpPr txBox="1"/>
-          <p:nvPr/>
-        </p:nvSpPr>
-        <p:spPr>
-          <a:xfrm>
-            <a:off x="548640" y="566928"/>
-            <a:ext cx="11094415" cy="822960"/>
-          </a:xfrm>
-          <a:prstGeom prst="rect">
-            <a:avLst/>
-          </a:prstGeom>
-          <a:noFill/>
-        </p:spPr>
-        <p:txBody>
-          <a:bodyPr wrap="square" anchor="ctr" lIns="0" rIns="0" tIns="0" bIns="0"/>
-          <a:lstStyle/>
-          <a:p>
-            <a:pPr algn="l"/>
-            <a:r>
-              <a:rPr sz="3200" b="1" i="0">
-                <a:solidFill>
-                  <a:srgbClr val="03306E"/>
-                </a:solidFill>
-                <a:latin typeface="Cambria"/>
-              </a:rPr>
-              <a:t>Test data</a:t>
-            </a:r>
-          </a:p>
-        </p:txBody>
-      </p:sp>
-      <p:sp>
-        <p:nvSpPr>
-          <p:cNvPr id="4" name="TextBox 3"/>
-          <p:cNvSpPr txBox="1"/>
-          <p:nvPr/>
-        </p:nvSpPr>
-        <p:spPr>
-          <a:xfrm>
-            <a:off x="548640" y="6446520"/>
-            <a:ext cx="8229600" cy="274320"/>
-          </a:xfrm>
-          <a:prstGeom prst="rect">
-            <a:avLst/>
-          </a:prstGeom>
-          <a:noFill/>
-        </p:spPr>
-        <p:txBody>
-          <a:bodyPr wrap="square" anchor="t" lIns="0" rIns="0" tIns="0" bIns="0"/>
-          <a:lstStyle/>
-          <a:p>
-            <a:pPr algn="l"/>
-            <a:r>
-              <a:rPr sz="1000" b="0" i="0">
-                <a:solidFill>
-                  <a:srgbClr val="54595D"/>
-                </a:solidFill>
-                <a:latin typeface="Calibri"/>
-              </a:rPr>
-              <a:t>Digital Software Development T Level  ·  Testing</a:t>
-            </a:r>
-          </a:p>
-        </p:txBody>
-      </p:sp>
-      <p:sp>
-        <p:nvSpPr>
-          <p:cNvPr id="5" name="TextBox 4"/>
-          <p:cNvSpPr txBox="1"/>
-          <p:nvPr/>
-        </p:nvSpPr>
-        <p:spPr>
-          <a:xfrm>
-            <a:off x="10728655" y="6446520"/>
-            <a:ext cx="914400" cy="274320"/>
-          </a:xfrm>
-          <a:prstGeom prst="rect">
-            <a:avLst/>
-          </a:prstGeom>
-          <a:noFill/>
-        </p:spPr>
-        <p:txBody>
-          <a:bodyPr wrap="square" anchor="t" lIns="0" rIns="0" tIns="0" bIns="0"/>
-          <a:lstStyle/>
-          <a:p>
-            <a:pPr algn="r"/>
-            <a:r>
-              <a:rPr sz="1000" b="0" i="0">
-                <a:solidFill>
-                  <a:srgbClr val="54595D"/>
-                </a:solidFill>
-                <a:latin typeface="Calibri"/>
-              </a:rPr>
-              <a:t>4</a:t>
-            </a:r>
-          </a:p>
-        </p:txBody>
-      </p:sp>
-      <p:sp>
-        <p:nvSpPr>
-          <p:cNvPr id="6" name="Rounded Rectangle 5"/>
-          <p:cNvSpPr/>
-          <p:nvPr/>
-        </p:nvSpPr>
-        <p:spPr>
-          <a:xfrm>
-            <a:off x="548640" y="1600200"/>
-            <a:ext cx="5410047" cy="2148840"/>
-          </a:xfrm>
-          <a:prstGeom prst="roundRect">
-            <a:avLst>
-              <a:gd name="adj" fmla="val 6000"/>
-            </a:avLst>
-          </a:prstGeom>
-          <a:solidFill>
-            <a:srgbClr val="EAF3FF"/>
-          </a:solidFill>
-          <a:ln>
-            <a:noFill/>
-          </a:ln>
-          <a:effectLst/>
-        </p:spPr>
-        <p:style>
-          <a:lnRef idx="1">
-            <a:schemeClr val="accent1"/>
-          </a:lnRef>
-          <a:fillRef idx="3">
-            <a:schemeClr val="accent1"/>
-          </a:fillRef>
-          <a:effectRef idx="2">
-            <a:schemeClr val="accent1"/>
-          </a:effectRef>
-          <a:fontRef idx="minor">
-            <a:schemeClr val="lt1"/>
-          </a:fontRef>
-        </p:style>
-        <p:txBody>
-          <a:bodyPr rtlCol="0" anchor="ctr"/>
-          <a:lstStyle/>
-          <a:p/>
-        </p:txBody>
-      </p:sp>
-      <p:sp>
-        <p:nvSpPr>
-          <p:cNvPr id="7" name="Oval 6"/>
-          <p:cNvSpPr/>
-          <p:nvPr/>
-        </p:nvSpPr>
-        <p:spPr>
-          <a:xfrm>
-            <a:off x="777240" y="1828800"/>
-            <a:ext cx="457200" cy="457200"/>
-          </a:xfrm>
-          <a:prstGeom prst="ellipse">
-            <a:avLst/>
-          </a:prstGeom>
-          <a:solidFill>
-            <a:srgbClr val="F2B705"/>
-          </a:solidFill>
-          <a:ln>
-            <a:noFill/>
-          </a:ln>
-          <a:effectLst/>
-        </p:spPr>
-        <p:style>
-          <a:lnRef idx="1">
-            <a:schemeClr val="accent1"/>
-          </a:lnRef>
-          <a:fillRef idx="3">
-            <a:schemeClr val="accent1"/>
-          </a:fillRef>
-          <a:effectRef idx="2">
-            <a:schemeClr val="accent1"/>
-          </a:effectRef>
-          <a:fontRef idx="minor">
-            <a:schemeClr val="lt1"/>
-          </a:fontRef>
-        </p:style>
-        <p:txBody>
-          <a:bodyPr rtlCol="0" anchor="ctr" lIns="0" rIns="0" tIns="0" bIns="0"/>
-          <a:lstStyle/>
-          <a:p>
-            <a:pPr algn="ctr"/>
-            <a:r>
-              <a:rPr sz="1500" b="1">
-                <a:solidFill>
-                  <a:srgbClr val="202122"/>
-                </a:solidFill>
-                <a:latin typeface="Calibri"/>
-              </a:rPr>
-              <a:t>1</a:t>
-            </a:r>
-          </a:p>
-        </p:txBody>
-      </p:sp>
-      <p:sp>
-        <p:nvSpPr>
-          <p:cNvPr id="8" name="TextBox 7"/>
-          <p:cNvSpPr txBox="1"/>
-          <p:nvPr/>
-        </p:nvSpPr>
-        <p:spPr>
-          <a:xfrm>
-            <a:off x="1371600" y="1801368"/>
-            <a:ext cx="4404207" cy="512064"/>
-          </a:xfrm>
-          <a:prstGeom prst="rect">
-            <a:avLst/>
-          </a:prstGeom>
-          <a:noFill/>
-        </p:spPr>
-        <p:txBody>
-          <a:bodyPr wrap="square" anchor="ctr" lIns="0" rIns="0" tIns="0" bIns="0"/>
-          <a:lstStyle/>
-          <a:p>
-            <a:pPr algn="l"/>
-            <a:r>
-              <a:rPr sz="1900" b="1" i="0">
-                <a:solidFill>
-                  <a:srgbClr val="03306E"/>
-                </a:solidFill>
-                <a:latin typeface="Calibri"/>
-              </a:rPr>
-              <a:t>Valid</a:t>
-            </a:r>
-          </a:p>
-        </p:txBody>
-      </p:sp>
-      <p:sp>
-        <p:nvSpPr>
-          <p:cNvPr id="9" name="TextBox 8"/>
-          <p:cNvSpPr txBox="1"/>
-          <p:nvPr/>
-        </p:nvSpPr>
-        <p:spPr>
-          <a:xfrm>
-            <a:off x="777240" y="2468880"/>
-            <a:ext cx="4952847" cy="1143000"/>
-          </a:xfrm>
-          <a:prstGeom prst="rect">
-            <a:avLst/>
-          </a:prstGeom>
-          <a:noFill/>
-        </p:spPr>
-        <p:txBody>
-          <a:bodyPr wrap="square" anchor="t" lIns="0" rIns="0" tIns="0" bIns="0"/>
-          <a:lstStyle/>
-          <a:p>
-            <a:pPr algn="l"/>
-            <a:r>
-              <a:rPr sz="2000" b="0" i="0">
-                <a:solidFill>
-                  <a:srgbClr val="202122"/>
-                </a:solidFill>
-                <a:latin typeface="Calibri"/>
-              </a:rPr>
-              <a:t>Should be accepted. Guests: 4</a:t>
-            </a:r>
-          </a:p>
-        </p:txBody>
-      </p:sp>
-      <p:sp>
-        <p:nvSpPr>
-          <p:cNvPr id="10" name="Rounded Rectangle 9"/>
-          <p:cNvSpPr/>
-          <p:nvPr/>
-        </p:nvSpPr>
-        <p:spPr>
-          <a:xfrm>
-            <a:off x="6233007" y="1600200"/>
-            <a:ext cx="5410047" cy="2148840"/>
-          </a:xfrm>
-          <a:prstGeom prst="roundRect">
-            <a:avLst>
-              <a:gd name="adj" fmla="val 6000"/>
-            </a:avLst>
-          </a:prstGeom>
-          <a:solidFill>
-            <a:srgbClr val="EAF3FF"/>
-          </a:solidFill>
-          <a:ln>
-            <a:noFill/>
-          </a:ln>
-          <a:effectLst/>
-        </p:spPr>
-        <p:style>
-          <a:lnRef idx="1">
-            <a:schemeClr val="accent1"/>
-          </a:lnRef>
-          <a:fillRef idx="3">
-            <a:schemeClr val="accent1"/>
-          </a:fillRef>
-          <a:effectRef idx="2">
-            <a:schemeClr val="accent1"/>
-          </a:effectRef>
-          <a:fontRef idx="minor">
-            <a:schemeClr val="lt1"/>
-          </a:fontRef>
-        </p:style>
-        <p:txBody>
-          <a:bodyPr rtlCol="0" anchor="ctr"/>
-          <a:lstStyle/>
-          <a:p/>
-        </p:txBody>
-      </p:sp>
-      <p:sp>
-        <p:nvSpPr>
-          <p:cNvPr id="11" name="Oval 10"/>
-          <p:cNvSpPr/>
-          <p:nvPr/>
-        </p:nvSpPr>
-        <p:spPr>
-          <a:xfrm>
-            <a:off x="6461607" y="1828800"/>
-            <a:ext cx="457200" cy="457200"/>
-          </a:xfrm>
-          <a:prstGeom prst="ellipse">
-            <a:avLst/>
-          </a:prstGeom>
-          <a:solidFill>
-            <a:srgbClr val="F2B705"/>
-          </a:solidFill>
-          <a:ln>
-            <a:noFill/>
-          </a:ln>
-          <a:effectLst/>
-        </p:spPr>
-        <p:style>
-          <a:lnRef idx="1">
-            <a:schemeClr val="accent1"/>
-          </a:lnRef>
-          <a:fillRef idx="3">
-            <a:schemeClr val="accent1"/>
-          </a:fillRef>
-          <a:effectRef idx="2">
-            <a:schemeClr val="accent1"/>
-          </a:effectRef>
-          <a:fontRef idx="minor">
-            <a:schemeClr val="lt1"/>
-          </a:fontRef>
-        </p:style>
-        <p:txBody>
-          <a:bodyPr rtlCol="0" anchor="ctr" lIns="0" rIns="0" tIns="0" bIns="0"/>
-          <a:lstStyle/>
-          <a:p>
-            <a:pPr algn="ctr"/>
-            <a:r>
-              <a:rPr sz="1500" b="1">
-                <a:solidFill>
-                  <a:srgbClr val="202122"/>
-                </a:solidFill>
-                <a:latin typeface="Calibri"/>
-              </a:rPr>
-              <a:t>2</a:t>
-            </a:r>
-          </a:p>
-        </p:txBody>
-      </p:sp>
-      <p:sp>
-        <p:nvSpPr>
-          <p:cNvPr id="12" name="TextBox 11"/>
-          <p:cNvSpPr txBox="1"/>
-          <p:nvPr/>
-        </p:nvSpPr>
-        <p:spPr>
-          <a:xfrm>
-            <a:off x="7055967" y="1801368"/>
-            <a:ext cx="4404207" cy="512064"/>
-          </a:xfrm>
-          <a:prstGeom prst="rect">
-            <a:avLst/>
-          </a:prstGeom>
-          <a:noFill/>
-        </p:spPr>
-        <p:txBody>
-          <a:bodyPr wrap="square" anchor="ctr" lIns="0" rIns="0" tIns="0" bIns="0"/>
-          <a:lstStyle/>
-          <a:p>
-            <a:pPr algn="l"/>
-            <a:r>
-              <a:rPr sz="1900" b="1" i="0">
-                <a:solidFill>
-                  <a:srgbClr val="03306E"/>
-                </a:solidFill>
-                <a:latin typeface="Calibri"/>
-              </a:rPr>
-              <a:t>Invalid</a:t>
-            </a:r>
-          </a:p>
-        </p:txBody>
-      </p:sp>
-      <p:sp>
-        <p:nvSpPr>
-          <p:cNvPr id="13" name="TextBox 12"/>
-          <p:cNvSpPr txBox="1"/>
-          <p:nvPr/>
-        </p:nvSpPr>
-        <p:spPr>
-          <a:xfrm>
-            <a:off x="6461607" y="2468880"/>
-            <a:ext cx="4952847" cy="1143000"/>
-          </a:xfrm>
-          <a:prstGeom prst="rect">
-            <a:avLst/>
-          </a:prstGeom>
-          <a:noFill/>
-        </p:spPr>
-        <p:txBody>
-          <a:bodyPr wrap="square" anchor="t" lIns="0" rIns="0" tIns="0" bIns="0"/>
-          <a:lstStyle/>
-          <a:p>
-            <a:pPr algn="l"/>
-            <a:r>
-              <a:rPr sz="2000" b="0" i="0">
-                <a:solidFill>
-                  <a:srgbClr val="202122"/>
-                </a:solidFill>
-                <a:latin typeface="Calibri"/>
-              </a:rPr>
-              <a:t>Right type, should be rejected. Guests: 12</a:t>
-            </a:r>
-          </a:p>
-        </p:txBody>
-      </p:sp>
-      <p:sp>
-        <p:nvSpPr>
-          <p:cNvPr id="14" name="Rounded Rectangle 13"/>
-          <p:cNvSpPr/>
-          <p:nvPr/>
-        </p:nvSpPr>
-        <p:spPr>
-          <a:xfrm>
-            <a:off x="548640" y="4023360"/>
-            <a:ext cx="5410047" cy="2148840"/>
-          </a:xfrm>
-          <a:prstGeom prst="roundRect">
-            <a:avLst>
-              <a:gd name="adj" fmla="val 6000"/>
-            </a:avLst>
-          </a:prstGeom>
-          <a:solidFill>
-            <a:srgbClr val="EAF3FF"/>
-          </a:solidFill>
-          <a:ln>
-            <a:noFill/>
-          </a:ln>
-          <a:effectLst/>
-        </p:spPr>
-        <p:style>
-          <a:lnRef idx="1">
-            <a:schemeClr val="accent1"/>
-          </a:lnRef>
-          <a:fillRef idx="3">
-            <a:schemeClr val="accent1"/>
-          </a:fillRef>
-          <a:effectRef idx="2">
-            <a:schemeClr val="accent1"/>
-          </a:effectRef>
-          <a:fontRef idx="minor">
-            <a:schemeClr val="lt1"/>
-          </a:fontRef>
-        </p:style>
-        <p:txBody>
-          <a:bodyPr rtlCol="0" anchor="ctr"/>
-          <a:lstStyle/>
-          <a:p/>
-        </p:txBody>
-      </p:sp>
-      <p:sp>
-        <p:nvSpPr>
-          <p:cNvPr id="15" name="Oval 14"/>
-          <p:cNvSpPr/>
-          <p:nvPr/>
-        </p:nvSpPr>
-        <p:spPr>
-          <a:xfrm>
-            <a:off x="777240" y="4251960"/>
-            <a:ext cx="457200" cy="457200"/>
-          </a:xfrm>
-          <a:prstGeom prst="ellipse">
-            <a:avLst/>
-          </a:prstGeom>
-          <a:solidFill>
-            <a:srgbClr val="F2B705"/>
-          </a:solidFill>
-          <a:ln>
-            <a:noFill/>
-          </a:ln>
-          <a:effectLst/>
-        </p:spPr>
-        <p:style>
-          <a:lnRef idx="1">
-            <a:schemeClr val="accent1"/>
-          </a:lnRef>
-          <a:fillRef idx="3">
-            <a:schemeClr val="accent1"/>
-          </a:fillRef>
-          <a:effectRef idx="2">
-            <a:schemeClr val="accent1"/>
-          </a:effectRef>
-          <a:fontRef idx="minor">
-            <a:schemeClr val="lt1"/>
-          </a:fontRef>
-        </p:style>
-        <p:txBody>
-          <a:bodyPr rtlCol="0" anchor="ctr" lIns="0" rIns="0" tIns="0" bIns="0"/>
-          <a:lstStyle/>
-          <a:p>
-            <a:pPr algn="ctr"/>
-            <a:r>
-              <a:rPr sz="1500" b="1">
-                <a:solidFill>
-                  <a:srgbClr val="202122"/>
-                </a:solidFill>
-                <a:latin typeface="Calibri"/>
-              </a:rPr>
-              <a:t>3</a:t>
-            </a:r>
-          </a:p>
-        </p:txBody>
-      </p:sp>
-      <p:sp>
-        <p:nvSpPr>
-          <p:cNvPr id="16" name="TextBox 15"/>
-          <p:cNvSpPr txBox="1"/>
-          <p:nvPr/>
-        </p:nvSpPr>
-        <p:spPr>
-          <a:xfrm>
-            <a:off x="1371600" y="4224528"/>
-            <a:ext cx="4404207" cy="512064"/>
-          </a:xfrm>
-          <a:prstGeom prst="rect">
-            <a:avLst/>
-          </a:prstGeom>
-          <a:noFill/>
-        </p:spPr>
-        <p:txBody>
-          <a:bodyPr wrap="square" anchor="ctr" lIns="0" rIns="0" tIns="0" bIns="0"/>
-          <a:lstStyle/>
-          <a:p>
-            <a:pPr algn="l"/>
-            <a:r>
-              <a:rPr sz="1900" b="1" i="0">
-                <a:solidFill>
-                  <a:srgbClr val="03306E"/>
-                </a:solidFill>
-                <a:latin typeface="Calibri"/>
-              </a:rPr>
-              <a:t>Boundary</a:t>
-            </a:r>
-          </a:p>
-        </p:txBody>
-      </p:sp>
-      <p:sp>
-        <p:nvSpPr>
-          <p:cNvPr id="17" name="TextBox 16"/>
-          <p:cNvSpPr txBox="1"/>
-          <p:nvPr/>
-        </p:nvSpPr>
-        <p:spPr>
-          <a:xfrm>
-            <a:off x="777240" y="4892040"/>
-            <a:ext cx="4952847" cy="1143000"/>
-          </a:xfrm>
-          <a:prstGeom prst="rect">
-            <a:avLst/>
-          </a:prstGeom>
-          <a:noFill/>
-        </p:spPr>
-        <p:txBody>
-          <a:bodyPr wrap="square" anchor="t" lIns="0" rIns="0" tIns="0" bIns="0"/>
-          <a:lstStyle/>
-          <a:p>
-            <a:pPr algn="l"/>
-            <a:r>
-              <a:rPr sz="2000" b="0" i="0">
-                <a:solidFill>
-                  <a:srgbClr val="202122"/>
-                </a:solidFill>
-                <a:latin typeface="Calibri"/>
-              </a:rPr>
-              <a:t>At the edge. Guests: 1 and 8</a:t>
-            </a:r>
-          </a:p>
-        </p:txBody>
-      </p:sp>
-      <p:sp>
-        <p:nvSpPr>
-          <p:cNvPr id="18" name="Rounded Rectangle 17"/>
-          <p:cNvSpPr/>
-          <p:nvPr/>
-        </p:nvSpPr>
-        <p:spPr>
-          <a:xfrm>
-            <a:off x="6233007" y="4023360"/>
-            <a:ext cx="5410047" cy="2148840"/>
-          </a:xfrm>
-          <a:prstGeom prst="roundRect">
-            <a:avLst>
-              <a:gd name="adj" fmla="val 6000"/>
-            </a:avLst>
-          </a:prstGeom>
-          <a:solidFill>
-            <a:srgbClr val="EAF3FF"/>
-          </a:solidFill>
-          <a:ln>
-            <a:noFill/>
-          </a:ln>
-          <a:effectLst/>
-        </p:spPr>
-        <p:style>
-          <a:lnRef idx="1">
-            <a:schemeClr val="accent1"/>
-          </a:lnRef>
-          <a:fillRef idx="3">
-            <a:schemeClr val="accent1"/>
-          </a:fillRef>
-          <a:effectRef idx="2">
-            <a:schemeClr val="accent1"/>
-          </a:effectRef>
-          <a:fontRef idx="minor">
-            <a:schemeClr val="lt1"/>
-          </a:fontRef>
-        </p:style>
-        <p:txBody>
-          <a:bodyPr rtlCol="0" anchor="ctr"/>
-          <a:lstStyle/>
-          <a:p/>
-        </p:txBody>
-      </p:sp>
-      <p:sp>
-        <p:nvSpPr>
-          <p:cNvPr id="19" name="Oval 18"/>
-          <p:cNvSpPr/>
-          <p:nvPr/>
-        </p:nvSpPr>
-        <p:spPr>
-          <a:xfrm>
-            <a:off x="6461607" y="4251960"/>
-            <a:ext cx="457200" cy="457200"/>
-          </a:xfrm>
-          <a:prstGeom prst="ellipse">
-            <a:avLst/>
-          </a:prstGeom>
-          <a:solidFill>
-            <a:srgbClr val="F2B705"/>
-          </a:solidFill>
-          <a:ln>
-            <a:noFill/>
-          </a:ln>
-          <a:effectLst/>
-        </p:spPr>
-        <p:style>
-          <a:lnRef idx="1">
-            <a:schemeClr val="accent1"/>
-          </a:lnRef>
-          <a:fillRef idx="3">
-            <a:schemeClr val="accent1"/>
-          </a:fillRef>
-          <a:effectRef idx="2">
-            <a:schemeClr val="accent1"/>
-          </a:effectRef>
-          <a:fontRef idx="minor">
-            <a:schemeClr val="lt1"/>
-          </a:fontRef>
-        </p:style>
-        <p:txBody>
-          <a:bodyPr rtlCol="0" anchor="ctr" lIns="0" rIns="0" tIns="0" bIns="0"/>
-          <a:lstStyle/>
-          <a:p>
-            <a:pPr algn="ctr"/>
-            <a:r>
-              <a:rPr sz="1500" b="1">
-                <a:solidFill>
-                  <a:srgbClr val="202122"/>
-                </a:solidFill>
-                <a:latin typeface="Calibri"/>
-              </a:rPr>
-              <a:t>4</a:t>
-            </a:r>
-          </a:p>
-        </p:txBody>
-      </p:sp>
-      <p:sp>
-        <p:nvSpPr>
-          <p:cNvPr id="20" name="TextBox 19"/>
-          <p:cNvSpPr txBox="1"/>
-          <p:nvPr/>
-        </p:nvSpPr>
-        <p:spPr>
-          <a:xfrm>
-            <a:off x="7055967" y="4224528"/>
-            <a:ext cx="4404207" cy="512064"/>
-          </a:xfrm>
-          <a:prstGeom prst="rect">
-            <a:avLst/>
-          </a:prstGeom>
-          <a:noFill/>
-        </p:spPr>
-        <p:txBody>
-          <a:bodyPr wrap="square" anchor="ctr" lIns="0" rIns="0" tIns="0" bIns="0"/>
-          <a:lstStyle/>
-          <a:p>
-            <a:pPr algn="l"/>
-            <a:r>
-              <a:rPr sz="1900" b="1" i="0">
-                <a:solidFill>
-                  <a:srgbClr val="03306E"/>
-                </a:solidFill>
-                <a:latin typeface="Calibri"/>
-              </a:rPr>
-              <a:t>Erroneous</a:t>
-            </a:r>
-          </a:p>
-        </p:txBody>
-      </p:sp>
-      <p:sp>
-        <p:nvSpPr>
-          <p:cNvPr id="21" name="TextBox 20"/>
-          <p:cNvSpPr txBox="1"/>
-          <p:nvPr/>
-        </p:nvSpPr>
-        <p:spPr>
-          <a:xfrm>
-            <a:off x="6461607" y="4892040"/>
-            <a:ext cx="4952847" cy="1143000"/>
-          </a:xfrm>
-          <a:prstGeom prst="rect">
-            <a:avLst/>
-          </a:prstGeom>
-          <a:noFill/>
-        </p:spPr>
-        <p:txBody>
-          <a:bodyPr wrap="square" anchor="t" lIns="0" rIns="0" tIns="0" bIns="0"/>
-          <a:lstStyle/>
-          <a:p>
-            <a:pPr algn="l"/>
-            <a:r>
-              <a:rPr sz="2000" b="0" i="0">
-                <a:solidFill>
-                  <a:srgbClr val="202122"/>
-                </a:solidFill>
-                <a:latin typeface="Calibri"/>
-              </a:rPr>
-              <a:t>Wrong type. Guests: 'four'</a:t>
-            </a:r>
-          </a:p>
-        </p:txBody>
-      </p:sp>
-    </p:spTree>
-  </p:cSld>
-  <p:clrMapOvr>
-    <a:masterClrMapping/>
-  </p:clrMapOvr>
-</p:sld>
-</file>
-
 <file path=ppt/slides/slide5.xml><?xml version="1.0" encoding="utf-8"?>
 <p:sld xmlns:a="http://schemas.openxmlformats.org/drawingml/2006/main" xmlns:p="http://schemas.openxmlformats.org/presentationml/2006/main" xmlns:r="http://schemas.openxmlformats.org/officeDocument/2006/relationships">
   <p:cSld>
@@ -6061,7 +9750,7 @@
                 </a:solidFill>
                 <a:latin typeface="Cambria"/>
               </a:rPr>
-              <a:t>Structure of a test plan</a:t>
+              <a:t>Quick check: Testing methods</a:t>
             </a:r>
           </a:p>
         </p:txBody>
@@ -6134,56 +9823,14 @@
       </p:sp>
       <p:sp>
         <p:nvSpPr>
-          <p:cNvPr id="6" name="Rectangle 5"/>
+          <p:cNvPr id="6" name="Oval 5"/>
           <p:cNvSpPr/>
           <p:nvPr/>
         </p:nvSpPr>
         <p:spPr>
           <a:xfrm>
-            <a:off x="1603217" y="2519172"/>
-            <a:ext cx="8985260" cy="36576"/>
-          </a:xfrm>
-          <a:prstGeom prst="rect">
-            <a:avLst/>
-          </a:prstGeom>
-          <a:solidFill>
-            <a:srgbClr val="A9C8F0"/>
-          </a:solidFill>
-          <a:ln>
-            <a:noFill/>
-          </a:ln>
-          <a:effectLst/>
-        </p:spPr>
-        <p:style>
-          <a:lnRef idx="1">
-            <a:schemeClr val="accent1"/>
-          </a:lnRef>
-          <a:fillRef idx="3">
-            <a:schemeClr val="accent1"/>
-          </a:fillRef>
-          <a:effectRef idx="2">
-            <a:schemeClr val="accent1"/>
-          </a:effectRef>
-          <a:fontRef idx="minor">
-            <a:schemeClr val="lt1"/>
-          </a:fontRef>
-        </p:style>
-        <p:txBody>
-          <a:bodyPr rtlCol="0" anchor="ctr"/>
-          <a:lstStyle/>
-          <a:p/>
-        </p:txBody>
-      </p:sp>
-      <p:sp>
-        <p:nvSpPr>
-          <p:cNvPr id="7" name="Oval 6"/>
-          <p:cNvSpPr/>
-          <p:nvPr/>
-        </p:nvSpPr>
-        <p:spPr>
-          <a:xfrm>
-            <a:off x="1283177" y="2217420"/>
-            <a:ext cx="640080" cy="640080"/>
+            <a:off x="548640" y="1691640"/>
+            <a:ext cx="502920" cy="502920"/>
           </a:xfrm>
           <a:prstGeom prst="ellipse">
             <a:avLst/>
@@ -6216,7 +9863,7 @@
           <a:p>
             <a:pPr algn="ctr"/>
             <a:r>
-              <a:rPr sz="2000" b="1">
+              <a:rPr sz="1600" b="1">
                 <a:solidFill>
                   <a:srgbClr val="202122"/>
                 </a:solidFill>
@@ -6229,14 +9876,14 @@
       </p:sp>
       <p:sp>
         <p:nvSpPr>
-          <p:cNvPr id="8" name="TextBox 7"/>
+          <p:cNvPr id="7" name="TextBox 6"/>
           <p:cNvSpPr txBox="1"/>
           <p:nvPr/>
         </p:nvSpPr>
         <p:spPr>
           <a:xfrm>
-            <a:off x="548640" y="2994660"/>
-            <a:ext cx="2109155" cy="731520"/>
+            <a:off x="1371600" y="1645920"/>
+            <a:ext cx="10271455" cy="1188720"/>
           </a:xfrm>
           <a:prstGeom prst="rect">
             <a:avLst/>
@@ -6247,106 +9894,29 @@
           <a:bodyPr wrap="square" anchor="t" lIns="0" rIns="0" tIns="0" bIns="0"/>
           <a:lstStyle/>
           <a:p>
-            <a:pPr algn="ctr"/>
-            <a:r>
-              <a:rPr sz="1700" b="1" i="0">
-                <a:solidFill>
-                  <a:srgbClr val="03306E"/>
-                </a:solidFill>
-                <a:latin typeface="Calibri"/>
-              </a:rPr>
-              <a:t>Identify tests</a:t>
-            </a:r>
-          </a:p>
-        </p:txBody>
-      </p:sp>
-      <p:sp>
-        <p:nvSpPr>
-          <p:cNvPr id="9" name="Rounded Rectangle 8"/>
+            <a:pPr algn="l"/>
+            <a:r>
+              <a:rPr sz="2400" b="0" i="0">
+                <a:solidFill>
+                  <a:srgbClr val="202122"/>
+                </a:solidFill>
+                <a:latin typeface="Calibri"/>
+              </a:rPr>
+              <a:t>What does unit testing check?</a:t>
+            </a:r>
+          </a:p>
+        </p:txBody>
+      </p:sp>
+      <p:sp>
+        <p:nvSpPr>
+          <p:cNvPr id="8" name="Oval 7"/>
           <p:cNvSpPr/>
           <p:nvPr/>
         </p:nvSpPr>
         <p:spPr>
           <a:xfrm>
-            <a:off x="548640" y="3771900"/>
-            <a:ext cx="2109155" cy="960120"/>
-          </a:xfrm>
-          <a:prstGeom prst="roundRect">
-            <a:avLst>
-              <a:gd name="adj" fmla="val 6000"/>
-            </a:avLst>
-          </a:prstGeom>
-          <a:solidFill>
-            <a:srgbClr val="EAF3FF"/>
-          </a:solidFill>
-          <a:ln>
-            <a:noFill/>
-          </a:ln>
-          <a:effectLst/>
-        </p:spPr>
-        <p:style>
-          <a:lnRef idx="1">
-            <a:schemeClr val="accent1"/>
-          </a:lnRef>
-          <a:fillRef idx="3">
-            <a:schemeClr val="accent1"/>
-          </a:fillRef>
-          <a:effectRef idx="2">
-            <a:schemeClr val="accent1"/>
-          </a:effectRef>
-          <a:fontRef idx="minor">
-            <a:schemeClr val="lt1"/>
-          </a:fontRef>
-        </p:style>
-        <p:txBody>
-          <a:bodyPr rtlCol="0" anchor="ctr"/>
-          <a:lstStyle/>
-          <a:p/>
-        </p:txBody>
-      </p:sp>
-      <p:sp>
-        <p:nvSpPr>
-          <p:cNvPr id="10" name="TextBox 9"/>
-          <p:cNvSpPr txBox="1"/>
-          <p:nvPr/>
-        </p:nvSpPr>
-        <p:spPr>
-          <a:xfrm>
-            <a:off x="685800" y="3909060"/>
-            <a:ext cx="1834835" cy="685800"/>
-          </a:xfrm>
-          <a:prstGeom prst="rect">
-            <a:avLst/>
-          </a:prstGeom>
-          <a:noFill/>
-        </p:spPr>
-        <p:txBody>
-          <a:bodyPr wrap="square" anchor="t" lIns="0" rIns="0" tIns="0" bIns="0"/>
-          <a:lstStyle/>
-          <a:p>
-            <a:pPr algn="l"/>
-            <a:r>
-              <a:rPr sz="1800" b="0" i="0">
-                <a:solidFill>
-                  <a:srgbClr val="202122"/>
-                </a:solidFill>
-                <a:latin typeface="Calibri"/>
-              </a:rPr>
-              <a:t>What will be tested.</a:t>
-            </a:r>
-          </a:p>
-        </p:txBody>
-      </p:sp>
-      <p:sp>
-        <p:nvSpPr>
-          <p:cNvPr id="11" name="Oval 10"/>
-          <p:cNvSpPr/>
-          <p:nvPr/>
-        </p:nvSpPr>
-        <p:spPr>
-          <a:xfrm>
-            <a:off x="3529492" y="2217420"/>
-            <a:ext cx="640080" cy="640080"/>
+            <a:off x="548640" y="3108960"/>
+            <a:ext cx="502920" cy="502920"/>
           </a:xfrm>
           <a:prstGeom prst="ellipse">
             <a:avLst/>
@@ -6379,7 +9949,7 @@
           <a:p>
             <a:pPr algn="ctr"/>
             <a:r>
-              <a:rPr sz="2000" b="1">
+              <a:rPr sz="1600" b="1">
                 <a:solidFill>
                   <a:srgbClr val="202122"/>
                 </a:solidFill>
@@ -6392,14 +9962,14 @@
       </p:sp>
       <p:sp>
         <p:nvSpPr>
-          <p:cNvPr id="12" name="TextBox 11"/>
+          <p:cNvPr id="9" name="TextBox 8"/>
           <p:cNvSpPr txBox="1"/>
           <p:nvPr/>
         </p:nvSpPr>
         <p:spPr>
           <a:xfrm>
-            <a:off x="2794955" y="2994660"/>
-            <a:ext cx="2109155" cy="731520"/>
+            <a:off x="1371600" y="3063240"/>
+            <a:ext cx="10271455" cy="1188720"/>
           </a:xfrm>
           <a:prstGeom prst="rect">
             <a:avLst/>
@@ -6410,106 +9980,29 @@
           <a:bodyPr wrap="square" anchor="t" lIns="0" rIns="0" tIns="0" bIns="0"/>
           <a:lstStyle/>
           <a:p>
-            <a:pPr algn="ctr"/>
-            <a:r>
-              <a:rPr sz="1700" b="1" i="0">
-                <a:solidFill>
-                  <a:srgbClr val="03306E"/>
-                </a:solidFill>
-                <a:latin typeface="Calibri"/>
-              </a:rPr>
-              <a:t>Purpose</a:t>
-            </a:r>
-          </a:p>
-        </p:txBody>
-      </p:sp>
-      <p:sp>
-        <p:nvSpPr>
-          <p:cNvPr id="13" name="Rounded Rectangle 12"/>
+            <a:pPr algn="l"/>
+            <a:r>
+              <a:rPr sz="2400" b="0" i="0">
+                <a:solidFill>
+                  <a:srgbClr val="202122"/>
+                </a:solidFill>
+                <a:latin typeface="Calibri"/>
+              </a:rPr>
+              <a:t>Why run regression tests after a change?</a:t>
+            </a:r>
+          </a:p>
+        </p:txBody>
+      </p:sp>
+      <p:sp>
+        <p:nvSpPr>
+          <p:cNvPr id="10" name="Oval 9"/>
           <p:cNvSpPr/>
           <p:nvPr/>
         </p:nvSpPr>
         <p:spPr>
           <a:xfrm>
-            <a:off x="2794955" y="3771900"/>
-            <a:ext cx="2109155" cy="960120"/>
-          </a:xfrm>
-          <a:prstGeom prst="roundRect">
-            <a:avLst>
-              <a:gd name="adj" fmla="val 6000"/>
-            </a:avLst>
-          </a:prstGeom>
-          <a:solidFill>
-            <a:srgbClr val="EAF3FF"/>
-          </a:solidFill>
-          <a:ln>
-            <a:noFill/>
-          </a:ln>
-          <a:effectLst/>
-        </p:spPr>
-        <p:style>
-          <a:lnRef idx="1">
-            <a:schemeClr val="accent1"/>
-          </a:lnRef>
-          <a:fillRef idx="3">
-            <a:schemeClr val="accent1"/>
-          </a:fillRef>
-          <a:effectRef idx="2">
-            <a:schemeClr val="accent1"/>
-          </a:effectRef>
-          <a:fontRef idx="minor">
-            <a:schemeClr val="lt1"/>
-          </a:fontRef>
-        </p:style>
-        <p:txBody>
-          <a:bodyPr rtlCol="0" anchor="ctr"/>
-          <a:lstStyle/>
-          <a:p/>
-        </p:txBody>
-      </p:sp>
-      <p:sp>
-        <p:nvSpPr>
-          <p:cNvPr id="14" name="TextBox 13"/>
-          <p:cNvSpPr txBox="1"/>
-          <p:nvPr/>
-        </p:nvSpPr>
-        <p:spPr>
-          <a:xfrm>
-            <a:off x="2932115" y="3909060"/>
-            <a:ext cx="1834835" cy="685800"/>
-          </a:xfrm>
-          <a:prstGeom prst="rect">
-            <a:avLst/>
-          </a:prstGeom>
-          <a:noFill/>
-        </p:spPr>
-        <p:txBody>
-          <a:bodyPr wrap="square" anchor="t" lIns="0" rIns="0" tIns="0" bIns="0"/>
-          <a:lstStyle/>
-          <a:p>
-            <a:pPr algn="l"/>
-            <a:r>
-              <a:rPr sz="1800" b="0" i="0">
-                <a:solidFill>
-                  <a:srgbClr val="202122"/>
-                </a:solidFill>
-                <a:latin typeface="Calibri"/>
-              </a:rPr>
-              <a:t>Why each test matters.</a:t>
-            </a:r>
-          </a:p>
-        </p:txBody>
-      </p:sp>
-      <p:sp>
-        <p:nvSpPr>
-          <p:cNvPr id="15" name="Oval 14"/>
-          <p:cNvSpPr/>
-          <p:nvPr/>
-        </p:nvSpPr>
-        <p:spPr>
-          <a:xfrm>
-            <a:off x="5775807" y="2217420"/>
-            <a:ext cx="640080" cy="640080"/>
+            <a:off x="548640" y="4526280"/>
+            <a:ext cx="502920" cy="502920"/>
           </a:xfrm>
           <a:prstGeom prst="ellipse">
             <a:avLst/>
@@ -6542,7 +10035,7 @@
           <a:p>
             <a:pPr algn="ctr"/>
             <a:r>
-              <a:rPr sz="2000" b="1">
+              <a:rPr sz="1600" b="1">
                 <a:solidFill>
                   <a:srgbClr val="202122"/>
                 </a:solidFill>
@@ -6555,14 +10048,14 @@
       </p:sp>
       <p:sp>
         <p:nvSpPr>
-          <p:cNvPr id="16" name="TextBox 15"/>
+          <p:cNvPr id="11" name="TextBox 10"/>
           <p:cNvSpPr txBox="1"/>
           <p:nvPr/>
         </p:nvSpPr>
         <p:spPr>
           <a:xfrm>
-            <a:off x="5041270" y="2994660"/>
-            <a:ext cx="2109155" cy="731520"/>
+            <a:off x="1371600" y="4480560"/>
+            <a:ext cx="10271455" cy="1188720"/>
           </a:xfrm>
           <a:prstGeom prst="rect">
             <a:avLst/>
@@ -6573,73 +10066,29 @@
           <a:bodyPr wrap="square" anchor="t" lIns="0" rIns="0" tIns="0" bIns="0"/>
           <a:lstStyle/>
           <a:p>
-            <a:pPr algn="ctr"/>
-            <a:r>
-              <a:rPr sz="1700" b="1" i="0">
-                <a:solidFill>
-                  <a:srgbClr val="03306E"/>
-                </a:solidFill>
-                <a:latin typeface="Calibri"/>
-              </a:rPr>
-              <a:t>Test data</a:t>
-            </a:r>
-          </a:p>
-        </p:txBody>
-      </p:sp>
-      <p:sp>
-        <p:nvSpPr>
-          <p:cNvPr id="17" name="Rounded Rectangle 16"/>
-          <p:cNvSpPr/>
-          <p:nvPr/>
-        </p:nvSpPr>
-        <p:spPr>
-          <a:xfrm>
-            <a:off x="5041270" y="3771900"/>
-            <a:ext cx="2109155" cy="960120"/>
-          </a:xfrm>
-          <a:prstGeom prst="roundRect">
-            <a:avLst>
-              <a:gd name="adj" fmla="val 6000"/>
-            </a:avLst>
-          </a:prstGeom>
-          <a:solidFill>
-            <a:srgbClr val="EAF3FF"/>
-          </a:solidFill>
-          <a:ln>
-            <a:noFill/>
-          </a:ln>
-          <a:effectLst/>
-        </p:spPr>
-        <p:style>
-          <a:lnRef idx="1">
-            <a:schemeClr val="accent1"/>
-          </a:lnRef>
-          <a:fillRef idx="3">
-            <a:schemeClr val="accent1"/>
-          </a:fillRef>
-          <a:effectRef idx="2">
-            <a:schemeClr val="accent1"/>
-          </a:effectRef>
-          <a:fontRef idx="minor">
-            <a:schemeClr val="lt1"/>
-          </a:fontRef>
-        </p:style>
-        <p:txBody>
-          <a:bodyPr rtlCol="0" anchor="ctr"/>
-          <a:lstStyle/>
-          <a:p/>
-        </p:txBody>
-      </p:sp>
-      <p:sp>
-        <p:nvSpPr>
-          <p:cNvPr id="18" name="TextBox 17"/>
+            <a:pPr algn="l"/>
+            <a:r>
+              <a:rPr sz="2400" b="0" i="0">
+                <a:solidFill>
+                  <a:srgbClr val="202122"/>
+                </a:solidFill>
+                <a:latin typeface="Calibri"/>
+              </a:rPr>
+              <a:t>What is the difference between closed and open box testing?</a:t>
+            </a:r>
+          </a:p>
+        </p:txBody>
+      </p:sp>
+      <p:sp>
+        <p:nvSpPr>
+          <p:cNvPr id="12" name="TextBox 11"/>
           <p:cNvSpPr txBox="1"/>
           <p:nvPr/>
         </p:nvSpPr>
         <p:spPr>
           <a:xfrm>
-            <a:off x="5178430" y="3909060"/>
-            <a:ext cx="1834835" cy="685800"/>
+            <a:off x="548640" y="5852160"/>
+            <a:ext cx="11094415" cy="365760"/>
           </a:xfrm>
           <a:prstGeom prst="rect">
             <a:avLst/>
@@ -6652,372 +10101,13 @@
           <a:p>
             <a:pPr algn="l"/>
             <a:r>
-              <a:rPr sz="1800" b="0" i="0">
-                <a:solidFill>
-                  <a:srgbClr val="202122"/>
-                </a:solidFill>
-                <a:latin typeface="Calibri"/>
-              </a:rPr>
-              <a:t>The data to use.</a:t>
-            </a:r>
-          </a:p>
-        </p:txBody>
-      </p:sp>
-      <p:sp>
-        <p:nvSpPr>
-          <p:cNvPr id="19" name="Oval 18"/>
-          <p:cNvSpPr/>
-          <p:nvPr/>
-        </p:nvSpPr>
-        <p:spPr>
-          <a:xfrm>
-            <a:off x="8022122" y="2217420"/>
-            <a:ext cx="640080" cy="640080"/>
-          </a:xfrm>
-          <a:prstGeom prst="ellipse">
-            <a:avLst/>
-          </a:prstGeom>
-          <a:solidFill>
-            <a:srgbClr val="F2B705"/>
-          </a:solidFill>
-          <a:ln>
-            <a:noFill/>
-          </a:ln>
-          <a:effectLst/>
-        </p:spPr>
-        <p:style>
-          <a:lnRef idx="1">
-            <a:schemeClr val="accent1"/>
-          </a:lnRef>
-          <a:fillRef idx="3">
-            <a:schemeClr val="accent1"/>
-          </a:fillRef>
-          <a:effectRef idx="2">
-            <a:schemeClr val="accent1"/>
-          </a:effectRef>
-          <a:fontRef idx="minor">
-            <a:schemeClr val="lt1"/>
-          </a:fontRef>
-        </p:style>
-        <p:txBody>
-          <a:bodyPr rtlCol="0" anchor="ctr" lIns="0" rIns="0" tIns="0" bIns="0"/>
-          <a:lstStyle/>
-          <a:p>
-            <a:pPr algn="ctr"/>
-            <a:r>
-              <a:rPr sz="2000" b="1">
-                <a:solidFill>
-                  <a:srgbClr val="202122"/>
-                </a:solidFill>
-                <a:latin typeface="Calibri"/>
-              </a:rPr>
-              <a:t>4</a:t>
-            </a:r>
-          </a:p>
-        </p:txBody>
-      </p:sp>
-      <p:sp>
-        <p:nvSpPr>
-          <p:cNvPr id="20" name="TextBox 19"/>
-          <p:cNvSpPr txBox="1"/>
-          <p:nvPr/>
-        </p:nvSpPr>
-        <p:spPr>
-          <a:xfrm>
-            <a:off x="7287585" y="2994660"/>
-            <a:ext cx="2109155" cy="731520"/>
-          </a:xfrm>
-          <a:prstGeom prst="rect">
-            <a:avLst/>
-          </a:prstGeom>
-          <a:noFill/>
-        </p:spPr>
-        <p:txBody>
-          <a:bodyPr wrap="square" anchor="t" lIns="0" rIns="0" tIns="0" bIns="0"/>
-          <a:lstStyle/>
-          <a:p>
-            <a:pPr algn="ctr"/>
-            <a:r>
-              <a:rPr sz="1700" b="1" i="0">
-                <a:solidFill>
-                  <a:srgbClr val="03306E"/>
-                </a:solidFill>
-                <a:latin typeface="Calibri"/>
-              </a:rPr>
-              <a:t>Expected result</a:t>
-            </a:r>
-          </a:p>
-        </p:txBody>
-      </p:sp>
-      <p:sp>
-        <p:nvSpPr>
-          <p:cNvPr id="21" name="Rounded Rectangle 20"/>
-          <p:cNvSpPr/>
-          <p:nvPr/>
-        </p:nvSpPr>
-        <p:spPr>
-          <a:xfrm>
-            <a:off x="7287585" y="3771900"/>
-            <a:ext cx="2109155" cy="960120"/>
-          </a:xfrm>
-          <a:prstGeom prst="roundRect">
-            <a:avLst>
-              <a:gd name="adj" fmla="val 6000"/>
-            </a:avLst>
-          </a:prstGeom>
-          <a:solidFill>
-            <a:srgbClr val="EAF3FF"/>
-          </a:solidFill>
-          <a:ln>
-            <a:noFill/>
-          </a:ln>
-          <a:effectLst/>
-        </p:spPr>
-        <p:style>
-          <a:lnRef idx="1">
-            <a:schemeClr val="accent1"/>
-          </a:lnRef>
-          <a:fillRef idx="3">
-            <a:schemeClr val="accent1"/>
-          </a:fillRef>
-          <a:effectRef idx="2">
-            <a:schemeClr val="accent1"/>
-          </a:effectRef>
-          <a:fontRef idx="minor">
-            <a:schemeClr val="lt1"/>
-          </a:fontRef>
-        </p:style>
-        <p:txBody>
-          <a:bodyPr rtlCol="0" anchor="ctr"/>
-          <a:lstStyle/>
-          <a:p/>
-        </p:txBody>
-      </p:sp>
-      <p:sp>
-        <p:nvSpPr>
-          <p:cNvPr id="22" name="TextBox 21"/>
-          <p:cNvSpPr txBox="1"/>
-          <p:nvPr/>
-        </p:nvSpPr>
-        <p:spPr>
-          <a:xfrm>
-            <a:off x="7424745" y="3909060"/>
-            <a:ext cx="1834835" cy="685800"/>
-          </a:xfrm>
-          <a:prstGeom prst="rect">
-            <a:avLst/>
-          </a:prstGeom>
-          <a:noFill/>
-        </p:spPr>
-        <p:txBody>
-          <a:bodyPr wrap="square" anchor="t" lIns="0" rIns="0" tIns="0" bIns="0"/>
-          <a:lstStyle/>
-          <a:p>
-            <a:pPr algn="l"/>
-            <a:r>
-              <a:rPr sz="1800" b="0" i="0">
-                <a:solidFill>
-                  <a:srgbClr val="202122"/>
-                </a:solidFill>
-                <a:latin typeface="Calibri"/>
-              </a:rPr>
-              <a:t>What should happen.</a:t>
-            </a:r>
-          </a:p>
-        </p:txBody>
-      </p:sp>
-      <p:sp>
-        <p:nvSpPr>
-          <p:cNvPr id="23" name="Oval 22"/>
-          <p:cNvSpPr/>
-          <p:nvPr/>
-        </p:nvSpPr>
-        <p:spPr>
-          <a:xfrm>
-            <a:off x="10268437" y="2217420"/>
-            <a:ext cx="640080" cy="640080"/>
-          </a:xfrm>
-          <a:prstGeom prst="ellipse">
-            <a:avLst/>
-          </a:prstGeom>
-          <a:solidFill>
-            <a:srgbClr val="F2B705"/>
-          </a:solidFill>
-          <a:ln>
-            <a:noFill/>
-          </a:ln>
-          <a:effectLst/>
-        </p:spPr>
-        <p:style>
-          <a:lnRef idx="1">
-            <a:schemeClr val="accent1"/>
-          </a:lnRef>
-          <a:fillRef idx="3">
-            <a:schemeClr val="accent1"/>
-          </a:fillRef>
-          <a:effectRef idx="2">
-            <a:schemeClr val="accent1"/>
-          </a:effectRef>
-          <a:fontRef idx="minor">
-            <a:schemeClr val="lt1"/>
-          </a:fontRef>
-        </p:style>
-        <p:txBody>
-          <a:bodyPr rtlCol="0" anchor="ctr" lIns="0" rIns="0" tIns="0" bIns="0"/>
-          <a:lstStyle/>
-          <a:p>
-            <a:pPr algn="ctr"/>
-            <a:r>
-              <a:rPr sz="2000" b="1">
-                <a:solidFill>
-                  <a:srgbClr val="202122"/>
-                </a:solidFill>
-                <a:latin typeface="Calibri"/>
-              </a:rPr>
-              <a:t>5</a:t>
-            </a:r>
-          </a:p>
-        </p:txBody>
-      </p:sp>
-      <p:sp>
-        <p:nvSpPr>
-          <p:cNvPr id="24" name="TextBox 23"/>
-          <p:cNvSpPr txBox="1"/>
-          <p:nvPr/>
-        </p:nvSpPr>
-        <p:spPr>
-          <a:xfrm>
-            <a:off x="9533900" y="2994660"/>
-            <a:ext cx="2109155" cy="731520"/>
-          </a:xfrm>
-          <a:prstGeom prst="rect">
-            <a:avLst/>
-          </a:prstGeom>
-          <a:noFill/>
-        </p:spPr>
-        <p:txBody>
-          <a:bodyPr wrap="square" anchor="t" lIns="0" rIns="0" tIns="0" bIns="0"/>
-          <a:lstStyle/>
-          <a:p>
-            <a:pPr algn="ctr"/>
-            <a:r>
-              <a:rPr sz="1700" b="1" i="0">
-                <a:solidFill>
-                  <a:srgbClr val="03306E"/>
-                </a:solidFill>
-                <a:latin typeface="Calibri"/>
-              </a:rPr>
-              <a:t>Actual result</a:t>
-            </a:r>
-          </a:p>
-        </p:txBody>
-      </p:sp>
-      <p:sp>
-        <p:nvSpPr>
-          <p:cNvPr id="25" name="Rounded Rectangle 24"/>
-          <p:cNvSpPr/>
-          <p:nvPr/>
-        </p:nvSpPr>
-        <p:spPr>
-          <a:xfrm>
-            <a:off x="9533900" y="3771900"/>
-            <a:ext cx="2109155" cy="960120"/>
-          </a:xfrm>
-          <a:prstGeom prst="roundRect">
-            <a:avLst>
-              <a:gd name="adj" fmla="val 6000"/>
-            </a:avLst>
-          </a:prstGeom>
-          <a:solidFill>
-            <a:srgbClr val="EAF3FF"/>
-          </a:solidFill>
-          <a:ln>
-            <a:noFill/>
-          </a:ln>
-          <a:effectLst/>
-        </p:spPr>
-        <p:style>
-          <a:lnRef idx="1">
-            <a:schemeClr val="accent1"/>
-          </a:lnRef>
-          <a:fillRef idx="3">
-            <a:schemeClr val="accent1"/>
-          </a:fillRef>
-          <a:effectRef idx="2">
-            <a:schemeClr val="accent1"/>
-          </a:effectRef>
-          <a:fontRef idx="minor">
-            <a:schemeClr val="lt1"/>
-          </a:fontRef>
-        </p:style>
-        <p:txBody>
-          <a:bodyPr rtlCol="0" anchor="ctr"/>
-          <a:lstStyle/>
-          <a:p/>
-        </p:txBody>
-      </p:sp>
-      <p:sp>
-        <p:nvSpPr>
-          <p:cNvPr id="26" name="TextBox 25"/>
-          <p:cNvSpPr txBox="1"/>
-          <p:nvPr/>
-        </p:nvSpPr>
-        <p:spPr>
-          <a:xfrm>
-            <a:off x="9671060" y="3909060"/>
-            <a:ext cx="1834835" cy="685800"/>
-          </a:xfrm>
-          <a:prstGeom prst="rect">
-            <a:avLst/>
-          </a:prstGeom>
-          <a:noFill/>
-        </p:spPr>
-        <p:txBody>
-          <a:bodyPr wrap="square" anchor="t" lIns="0" rIns="0" tIns="0" bIns="0"/>
-          <a:lstStyle/>
-          <a:p>
-            <a:pPr algn="l"/>
-            <a:r>
-              <a:rPr sz="1800" b="0" i="0">
-                <a:solidFill>
-                  <a:srgbClr val="202122"/>
-                </a:solidFill>
-                <a:latin typeface="Calibri"/>
-              </a:rPr>
-              <a:t>What really happened.</a:t>
-            </a:r>
-          </a:p>
-        </p:txBody>
-      </p:sp>
-      <p:sp>
-        <p:nvSpPr>
-          <p:cNvPr id="27" name="TextBox 26"/>
-          <p:cNvSpPr txBox="1"/>
-          <p:nvPr/>
-        </p:nvSpPr>
-        <p:spPr>
-          <a:xfrm>
-            <a:off x="548640" y="5006340"/>
-            <a:ext cx="11094415" cy="548640"/>
-          </a:xfrm>
-          <a:prstGeom prst="rect">
-            <a:avLst/>
-          </a:prstGeom>
-          <a:noFill/>
-        </p:spPr>
-        <p:txBody>
-          <a:bodyPr wrap="square" anchor="t" lIns="0" rIns="0" tIns="0" bIns="0"/>
-          <a:lstStyle/>
-          <a:p>
-            <a:pPr algn="l"/>
-            <a:r>
-              <a:rPr sz="1600" b="0" i="1">
+              <a:rPr sz="1300" b="0" i="1">
                 <a:solidFill>
                   <a:srgbClr val="54595D"/>
                 </a:solidFill>
                 <a:latin typeface="Calibri"/>
               </a:rPr>
-              <a:t>Automation: macros, scripts and functional testing tools can rerun tests after every change.</a:t>
+              <a:t>Answer on mini whiteboards or in your book. Answers are in the speaker notes.</a:t>
             </a:r>
           </a:p>
         </p:txBody>
@@ -7109,7 +10199,7 @@
                 </a:solidFill>
                 <a:latin typeface="Cambria"/>
               </a:rPr>
-              <a:t>Check your understanding</a:t>
+              <a:t>Test data</a:t>
             </a:r>
           </a:p>
         </p:txBody>
@@ -7182,14 +10272,129 @@
       </p:sp>
       <p:sp>
         <p:nvSpPr>
-          <p:cNvPr id="6" name="Oval 5"/>
+          <p:cNvPr id="6" name="TextBox 5"/>
+          <p:cNvSpPr txBox="1"/>
+          <p:nvPr/>
+        </p:nvSpPr>
+        <p:spPr>
+          <a:xfrm>
+            <a:off x="548640" y="1554480"/>
+            <a:ext cx="6720840" cy="4617720"/>
+          </a:xfrm>
+          <a:prstGeom prst="rect">
+            <a:avLst/>
+          </a:prstGeom>
+          <a:noFill/>
+        </p:spPr>
+        <p:txBody>
+          <a:bodyPr wrap="square" lIns="0" rIns="0" tIns="0" bIns="0">
+            <a:spAutoFit/>
+          </a:bodyPr>
+          <a:lstStyle/>
+          <a:p>
+            <a:pPr>
+              <a:spcAft>
+                <a:spcPts val="1320"/>
+              </a:spcAft>
+            </a:pPr>
+            <a:r>
+              <a:rPr sz="2200" b="0">
+                <a:solidFill>
+                  <a:srgbClr val="202122"/>
+                </a:solidFill>
+                <a:latin typeface="Calibri"/>
+              </a:rPr>
+              <a:t>Good tests use four kinds of data.</a:t>
+            </a:r>
+          </a:p>
+          <a:p>
+            <a:pPr>
+              <a:spcAft>
+                <a:spcPts val="1320"/>
+              </a:spcAft>
+            </a:pPr>
+            <a:r>
+              <a:rPr sz="2200" b="0">
+                <a:solidFill>
+                  <a:srgbClr val="202122"/>
+                </a:solidFill>
+                <a:latin typeface="Calibri"/>
+              </a:rPr>
+              <a:t>Valid (normal) data should be accepted. Invalid data is the right type but breaks the rules and should be rejected. Boundary data sits exactly at the edges, where bugs often hide, such as &lt; instead of &lt;=. Erroneous data is the wrong type altogether, such as text where a number is expected.</a:t>
+            </a:r>
+          </a:p>
+          <a:p>
+            <a:pPr>
+              <a:spcAft>
+                <a:spcPts val="1320"/>
+              </a:spcAft>
+            </a:pPr>
+            <a:r>
+              <a:rPr sz="2200" b="0">
+                <a:solidFill>
+                  <a:srgbClr val="202122"/>
+                </a:solidFill>
+                <a:latin typeface="Calibri"/>
+              </a:rPr>
+              <a:t>Test every kind so you know the program handles normal use, mistakes and edge cases without crashing.</a:t>
+            </a:r>
+          </a:p>
+        </p:txBody>
+      </p:sp>
+      <p:sp>
+        <p:nvSpPr>
+          <p:cNvPr id="7" name="Rounded Rectangle 6"/>
           <p:cNvSpPr/>
           <p:nvPr/>
         </p:nvSpPr>
         <p:spPr>
           <a:xfrm>
-            <a:off x="548640" y="1618488"/>
-            <a:ext cx="411480" cy="411480"/>
+            <a:off x="7772400" y="1554480"/>
+            <a:ext cx="3867912" cy="4526280"/>
+          </a:xfrm>
+          <a:prstGeom prst="roundRect">
+            <a:avLst>
+              <a:gd name="adj" fmla="val 8000"/>
+            </a:avLst>
+          </a:prstGeom>
+          <a:solidFill>
+            <a:srgbClr val="03306E"/>
+          </a:solidFill>
+          <a:ln>
+            <a:noFill/>
+          </a:ln>
+          <a:effectLst/>
+        </p:spPr>
+        <p:style>
+          <a:lnRef idx="1">
+            <a:schemeClr val="accent1"/>
+          </a:lnRef>
+          <a:fillRef idx="3">
+            <a:schemeClr val="accent1"/>
+          </a:fillRef>
+          <a:effectRef idx="2">
+            <a:schemeClr val="accent1"/>
+          </a:effectRef>
+          <a:fontRef idx="minor">
+            <a:schemeClr val="lt1"/>
+          </a:fontRef>
+        </p:style>
+        <p:txBody>
+          <a:bodyPr rtlCol="0" anchor="ctr"/>
+          <a:lstStyle/>
+          <a:p/>
+        </p:txBody>
+      </p:sp>
+      <p:sp>
+        <p:nvSpPr>
+          <p:cNvPr id="8" name="Oval 7"/>
+          <p:cNvSpPr/>
+          <p:nvPr/>
+        </p:nvSpPr>
+        <p:spPr>
+          <a:xfrm>
+            <a:off x="8046720" y="1828800"/>
+            <a:ext cx="548640" cy="548640"/>
           </a:xfrm>
           <a:prstGeom prst="ellipse">
             <a:avLst/>
@@ -7222,99 +10427,13 @@
           <a:p>
             <a:pPr algn="ctr"/>
             <a:r>
-              <a:rPr sz="1400" b="1">
+              <a:rPr sz="1300" b="1">
                 <a:solidFill>
                   <a:srgbClr val="202122"/>
                 </a:solidFill>
                 <a:latin typeface="Calibri"/>
               </a:rPr>
-              <a:t>1</a:t>
-            </a:r>
-          </a:p>
-        </p:txBody>
-      </p:sp>
-      <p:sp>
-        <p:nvSpPr>
-          <p:cNvPr id="7" name="TextBox 6"/>
-          <p:cNvSpPr txBox="1"/>
-          <p:nvPr/>
-        </p:nvSpPr>
-        <p:spPr>
-          <a:xfrm>
-            <a:off x="1234440" y="1600200"/>
-            <a:ext cx="10408615" cy="1030986"/>
-          </a:xfrm>
-          <a:prstGeom prst="rect">
-            <a:avLst/>
-          </a:prstGeom>
-          <a:noFill/>
-        </p:spPr>
-        <p:txBody>
-          <a:bodyPr wrap="square" anchor="t" lIns="0" rIns="0" tIns="0" bIns="0"/>
-          <a:lstStyle/>
-          <a:p>
-            <a:pPr algn="l"/>
-            <a:r>
-              <a:rPr sz="2200" b="0" i="0">
-                <a:solidFill>
-                  <a:srgbClr val="202122"/>
-                </a:solidFill>
-                <a:latin typeface="Calibri"/>
-              </a:rPr>
-              <a:t>What does regression testing check?</a:t>
-            </a:r>
-          </a:p>
-        </p:txBody>
-      </p:sp>
-      <p:sp>
-        <p:nvSpPr>
-          <p:cNvPr id="8" name="Oval 7"/>
-          <p:cNvSpPr/>
-          <p:nvPr/>
-        </p:nvSpPr>
-        <p:spPr>
-          <a:xfrm>
-            <a:off x="548640" y="2814066"/>
-            <a:ext cx="411480" cy="411480"/>
-          </a:xfrm>
-          <a:prstGeom prst="ellipse">
-            <a:avLst/>
-          </a:prstGeom>
-          <a:solidFill>
-            <a:srgbClr val="F2B705"/>
-          </a:solidFill>
-          <a:ln>
-            <a:noFill/>
-          </a:ln>
-          <a:effectLst/>
-        </p:spPr>
-        <p:style>
-          <a:lnRef idx="1">
-            <a:schemeClr val="accent1"/>
-          </a:lnRef>
-          <a:fillRef idx="3">
-            <a:schemeClr val="accent1"/>
-          </a:fillRef>
-          <a:effectRef idx="2">
-            <a:schemeClr val="accent1"/>
-          </a:effectRef>
-          <a:fontRef idx="minor">
-            <a:schemeClr val="lt1"/>
-          </a:fontRef>
-        </p:style>
-        <p:txBody>
-          <a:bodyPr rtlCol="0" anchor="ctr" lIns="0" rIns="0" tIns="0" bIns="0"/>
-          <a:lstStyle/>
-          <a:p>
-            <a:pPr algn="ctr"/>
-            <a:r>
-              <a:rPr sz="1400" b="1">
-                <a:solidFill>
-                  <a:srgbClr val="202122"/>
-                </a:solidFill>
-                <a:latin typeface="Calibri"/>
-              </a:rPr>
-              <a:t>2</a:t>
+              <a:t>e.g.</a:t>
             </a:r>
           </a:p>
         </p:txBody>
@@ -7327,8 +10446,8 @@
         </p:nvSpPr>
         <p:spPr>
           <a:xfrm>
-            <a:off x="1234440" y="2795778"/>
-            <a:ext cx="10408615" cy="1030986"/>
+            <a:off x="8046720" y="2560320"/>
+            <a:ext cx="3291840" cy="365760"/>
           </a:xfrm>
           <a:prstGeom prst="rect">
             <a:avLst/>
@@ -7341,80 +10460,27 @@
           <a:p>
             <a:pPr algn="l"/>
             <a:r>
-              <a:rPr sz="2200" b="0" i="0">
-                <a:solidFill>
-                  <a:srgbClr val="202122"/>
-                </a:solidFill>
-                <a:latin typeface="Calibri"/>
-              </a:rPr>
-              <a:t>A field accepts 1 to 8. Give an erroneous test value.</a:t>
-            </a:r>
-          </a:p>
-        </p:txBody>
-      </p:sp>
-      <p:sp>
-        <p:nvSpPr>
-          <p:cNvPr id="10" name="Oval 9"/>
-          <p:cNvSpPr/>
-          <p:nvPr/>
-        </p:nvSpPr>
-        <p:spPr>
-          <a:xfrm>
-            <a:off x="548640" y="4009644"/>
-            <a:ext cx="411480" cy="411480"/>
-          </a:xfrm>
-          <a:prstGeom prst="ellipse">
-            <a:avLst/>
-          </a:prstGeom>
-          <a:solidFill>
-            <a:srgbClr val="F2B705"/>
-          </a:solidFill>
-          <a:ln>
-            <a:noFill/>
-          </a:ln>
-          <a:effectLst/>
-        </p:spPr>
-        <p:style>
-          <a:lnRef idx="1">
-            <a:schemeClr val="accent1"/>
-          </a:lnRef>
-          <a:fillRef idx="3">
-            <a:schemeClr val="accent1"/>
-          </a:fillRef>
-          <a:effectRef idx="2">
-            <a:schemeClr val="accent1"/>
-          </a:effectRef>
-          <a:fontRef idx="minor">
-            <a:schemeClr val="lt1"/>
-          </a:fontRef>
-        </p:style>
-        <p:txBody>
-          <a:bodyPr rtlCol="0" anchor="ctr" lIns="0" rIns="0" tIns="0" bIns="0"/>
-          <a:lstStyle/>
-          <a:p>
-            <a:pPr algn="ctr"/>
-            <a:r>
-              <a:rPr sz="1400" b="1">
-                <a:solidFill>
-                  <a:srgbClr val="202122"/>
-                </a:solidFill>
-                <a:latin typeface="Calibri"/>
-              </a:rPr>
-              <a:t>3</a:t>
-            </a:r>
-          </a:p>
-        </p:txBody>
-      </p:sp>
-      <p:sp>
-        <p:nvSpPr>
-          <p:cNvPr id="11" name="TextBox 10"/>
+              <a:rPr sz="1300" b="1" i="0">
+                <a:solidFill>
+                  <a:srgbClr val="A9C8F0"/>
+                </a:solidFill>
+                <a:latin typeface="Calibri"/>
+              </a:rPr>
+              <a:t>EXAMPLE</a:t>
+            </a:r>
+          </a:p>
+        </p:txBody>
+      </p:sp>
+      <p:sp>
+        <p:nvSpPr>
+          <p:cNvPr id="10" name="TextBox 9"/>
           <p:cNvSpPr txBox="1"/>
           <p:nvPr/>
         </p:nvSpPr>
         <p:spPr>
           <a:xfrm>
-            <a:off x="1234440" y="3991356"/>
-            <a:ext cx="10408615" cy="1030986"/>
+            <a:off x="8046720" y="2971800"/>
+            <a:ext cx="3291840" cy="2971800"/>
           </a:xfrm>
           <a:prstGeom prst="rect">
             <a:avLst/>
@@ -7427,99 +10493,13 @@
           <a:p>
             <a:pPr algn="l"/>
             <a:r>
-              <a:rPr sz="2200" b="0" i="0">
-                <a:solidFill>
-                  <a:srgbClr val="202122"/>
-                </a:solidFill>
-                <a:latin typeface="Calibri"/>
-              </a:rPr>
-              <a:t>What is the difference between unit and integration testing?</a:t>
-            </a:r>
-          </a:p>
-        </p:txBody>
-      </p:sp>
-      <p:sp>
-        <p:nvSpPr>
-          <p:cNvPr id="12" name="Oval 11"/>
-          <p:cNvSpPr/>
-          <p:nvPr/>
-        </p:nvSpPr>
-        <p:spPr>
-          <a:xfrm>
-            <a:off x="548640" y="5205221"/>
-            <a:ext cx="411480" cy="411480"/>
-          </a:xfrm>
-          <a:prstGeom prst="ellipse">
-            <a:avLst/>
-          </a:prstGeom>
-          <a:solidFill>
-            <a:srgbClr val="F2B705"/>
-          </a:solidFill>
-          <a:ln>
-            <a:noFill/>
-          </a:ln>
-          <a:effectLst/>
-        </p:spPr>
-        <p:style>
-          <a:lnRef idx="1">
-            <a:schemeClr val="accent1"/>
-          </a:lnRef>
-          <a:fillRef idx="3">
-            <a:schemeClr val="accent1"/>
-          </a:fillRef>
-          <a:effectRef idx="2">
-            <a:schemeClr val="accent1"/>
-          </a:effectRef>
-          <a:fontRef idx="minor">
-            <a:schemeClr val="lt1"/>
-          </a:fontRef>
-        </p:style>
-        <p:txBody>
-          <a:bodyPr rtlCol="0" anchor="ctr" lIns="0" rIns="0" tIns="0" bIns="0"/>
-          <a:lstStyle/>
-          <a:p>
-            <a:pPr algn="ctr"/>
-            <a:r>
-              <a:rPr sz="1400" b="1">
-                <a:solidFill>
-                  <a:srgbClr val="202122"/>
-                </a:solidFill>
-                <a:latin typeface="Calibri"/>
-              </a:rPr>
-              <a:t>4</a:t>
-            </a:r>
-          </a:p>
-        </p:txBody>
-      </p:sp>
-      <p:sp>
-        <p:nvSpPr>
-          <p:cNvPr id="13" name="TextBox 12"/>
-          <p:cNvSpPr txBox="1"/>
-          <p:nvPr/>
-        </p:nvSpPr>
-        <p:spPr>
-          <a:xfrm>
-            <a:off x="1234440" y="5186933"/>
-            <a:ext cx="10408615" cy="1030986"/>
-          </a:xfrm>
-          <a:prstGeom prst="rect">
-            <a:avLst/>
-          </a:prstGeom>
-          <a:noFill/>
-        </p:spPr>
-        <p:txBody>
-          <a:bodyPr wrap="square" anchor="t" lIns="0" rIns="0" tIns="0" bIns="0"/>
-          <a:lstStyle/>
-          <a:p>
-            <a:pPr algn="l"/>
-            <a:r>
-              <a:rPr sz="2200" b="0" i="0">
-                <a:solidFill>
-                  <a:srgbClr val="202122"/>
-                </a:solidFill>
-                <a:latin typeface="Calibri"/>
-              </a:rPr>
-              <a:t>Why test components before integration?</a:t>
+              <a:rPr sz="1900" b="0" i="0">
+                <a:solidFill>
+                  <a:srgbClr val="FFFFFF"/>
+                </a:solidFill>
+                <a:latin typeface="Cambria"/>
+              </a:rPr>
+              <a:t>A field accepts 1 to 8 guests. Valid: 4. Invalid: 12. Boundary: 1 and 8. Erroneous: 'four'.</a:t>
             </a:r>
           </a:p>
         </p:txBody>
@@ -7611,7 +10591,7 @@
                 </a:solidFill>
                 <a:latin typeface="Cambria"/>
               </a:rPr>
-              <a:t>Answers</a:t>
+              <a:t>Test data</a:t>
             </a:r>
           </a:p>
         </p:txBody>
@@ -7684,14 +10664,58 @@
       </p:sp>
       <p:sp>
         <p:nvSpPr>
-          <p:cNvPr id="6" name="Oval 5"/>
+          <p:cNvPr id="6" name="Rounded Rectangle 5"/>
           <p:cNvSpPr/>
           <p:nvPr/>
         </p:nvSpPr>
         <p:spPr>
           <a:xfrm>
-            <a:off x="548640" y="1618488"/>
-            <a:ext cx="411480" cy="411480"/>
+            <a:off x="548640" y="1600200"/>
+            <a:ext cx="5410047" cy="2148840"/>
+          </a:xfrm>
+          <a:prstGeom prst="roundRect">
+            <a:avLst>
+              <a:gd name="adj" fmla="val 6000"/>
+            </a:avLst>
+          </a:prstGeom>
+          <a:solidFill>
+            <a:srgbClr val="EAF3FF"/>
+          </a:solidFill>
+          <a:ln>
+            <a:noFill/>
+          </a:ln>
+          <a:effectLst/>
+        </p:spPr>
+        <p:style>
+          <a:lnRef idx="1">
+            <a:schemeClr val="accent1"/>
+          </a:lnRef>
+          <a:fillRef idx="3">
+            <a:schemeClr val="accent1"/>
+          </a:fillRef>
+          <a:effectRef idx="2">
+            <a:schemeClr val="accent1"/>
+          </a:effectRef>
+          <a:fontRef idx="minor">
+            <a:schemeClr val="lt1"/>
+          </a:fontRef>
+        </p:style>
+        <p:txBody>
+          <a:bodyPr rtlCol="0" anchor="ctr"/>
+          <a:lstStyle/>
+          <a:p/>
+        </p:txBody>
+      </p:sp>
+      <p:sp>
+        <p:nvSpPr>
+          <p:cNvPr id="7" name="Oval 6"/>
+          <p:cNvSpPr/>
+          <p:nvPr/>
+        </p:nvSpPr>
+        <p:spPr>
+          <a:xfrm>
+            <a:off x="777240" y="1828800"/>
+            <a:ext cx="457200" cy="457200"/>
           </a:xfrm>
           <a:prstGeom prst="ellipse">
             <a:avLst/>
@@ -7724,7 +10748,7 @@
           <a:p>
             <a:pPr algn="ctr"/>
             <a:r>
-              <a:rPr sz="1400" b="1">
+              <a:rPr sz="1500" b="1">
                 <a:solidFill>
                   <a:srgbClr val="202122"/>
                 </a:solidFill>
@@ -7737,14 +10761,47 @@
       </p:sp>
       <p:sp>
         <p:nvSpPr>
-          <p:cNvPr id="7" name="TextBox 6"/>
+          <p:cNvPr id="8" name="TextBox 7"/>
           <p:cNvSpPr txBox="1"/>
           <p:nvPr/>
         </p:nvSpPr>
         <p:spPr>
           <a:xfrm>
-            <a:off x="1234440" y="1600200"/>
-            <a:ext cx="10408615" cy="1030986"/>
+            <a:off x="1371600" y="1801368"/>
+            <a:ext cx="4404207" cy="512064"/>
+          </a:xfrm>
+          <a:prstGeom prst="rect">
+            <a:avLst/>
+          </a:prstGeom>
+          <a:noFill/>
+        </p:spPr>
+        <p:txBody>
+          <a:bodyPr wrap="square" anchor="ctr" lIns="0" rIns="0" tIns="0" bIns="0"/>
+          <a:lstStyle/>
+          <a:p>
+            <a:pPr algn="l"/>
+            <a:r>
+              <a:rPr sz="1900" b="1" i="0">
+                <a:solidFill>
+                  <a:srgbClr val="03306E"/>
+                </a:solidFill>
+                <a:latin typeface="Calibri"/>
+              </a:rPr>
+              <a:t>Valid</a:t>
+            </a:r>
+          </a:p>
+        </p:txBody>
+      </p:sp>
+      <p:sp>
+        <p:nvSpPr>
+          <p:cNvPr id="9" name="TextBox 8"/>
+          <p:cNvSpPr txBox="1"/>
+          <p:nvPr/>
+        </p:nvSpPr>
+        <p:spPr>
+          <a:xfrm>
+            <a:off x="777240" y="2468880"/>
+            <a:ext cx="4952847" cy="1143000"/>
           </a:xfrm>
           <a:prstGeom prst="rect">
             <a:avLst/>
@@ -7757,38 +10814,71 @@
           <a:p>
             <a:pPr algn="l"/>
             <a:r>
-              <a:rPr sz="1800" b="0" i="0">
-                <a:solidFill>
-                  <a:srgbClr val="54595D"/>
-                </a:solidFill>
-                <a:latin typeface="Calibri"/>
-              </a:rPr>
-              <a:t>What does regression testing check?</a:t>
-            </a:r>
-          </a:p>
-          <a:p>
-            <a:r>
-              <a:rPr sz="1800" b="1">
-                <a:solidFill>
-                  <a:srgbClr val="03306E"/>
-                </a:solidFill>
-                <a:latin typeface="Calibri"/>
-              </a:rPr>
-              <a:t>That changes have not broken existing functionality.</a:t>
-            </a:r>
-          </a:p>
-        </p:txBody>
-      </p:sp>
-      <p:sp>
-        <p:nvSpPr>
-          <p:cNvPr id="8" name="Oval 7"/>
+              <a:rPr sz="2000" b="0" i="0">
+                <a:solidFill>
+                  <a:srgbClr val="202122"/>
+                </a:solidFill>
+                <a:latin typeface="Calibri"/>
+              </a:rPr>
+              <a:t>Should be accepted. Guests: 4</a:t>
+            </a:r>
+          </a:p>
+        </p:txBody>
+      </p:sp>
+      <p:sp>
+        <p:nvSpPr>
+          <p:cNvPr id="10" name="Rounded Rectangle 9"/>
           <p:cNvSpPr/>
           <p:nvPr/>
         </p:nvSpPr>
         <p:spPr>
           <a:xfrm>
-            <a:off x="548640" y="2814066"/>
-            <a:ext cx="411480" cy="411480"/>
+            <a:off x="6233007" y="1600200"/>
+            <a:ext cx="5410047" cy="2148840"/>
+          </a:xfrm>
+          <a:prstGeom prst="roundRect">
+            <a:avLst>
+              <a:gd name="adj" fmla="val 6000"/>
+            </a:avLst>
+          </a:prstGeom>
+          <a:solidFill>
+            <a:srgbClr val="EAF3FF"/>
+          </a:solidFill>
+          <a:ln>
+            <a:noFill/>
+          </a:ln>
+          <a:effectLst/>
+        </p:spPr>
+        <p:style>
+          <a:lnRef idx="1">
+            <a:schemeClr val="accent1"/>
+          </a:lnRef>
+          <a:fillRef idx="3">
+            <a:schemeClr val="accent1"/>
+          </a:fillRef>
+          <a:effectRef idx="2">
+            <a:schemeClr val="accent1"/>
+          </a:effectRef>
+          <a:fontRef idx="minor">
+            <a:schemeClr val="lt1"/>
+          </a:fontRef>
+        </p:style>
+        <p:txBody>
+          <a:bodyPr rtlCol="0" anchor="ctr"/>
+          <a:lstStyle/>
+          <a:p/>
+        </p:txBody>
+      </p:sp>
+      <p:sp>
+        <p:nvSpPr>
+          <p:cNvPr id="11" name="Oval 10"/>
+          <p:cNvSpPr/>
+          <p:nvPr/>
+        </p:nvSpPr>
+        <p:spPr>
+          <a:xfrm>
+            <a:off x="6461607" y="1828800"/>
+            <a:ext cx="457200" cy="457200"/>
           </a:xfrm>
           <a:prstGeom prst="ellipse">
             <a:avLst/>
@@ -7821,7 +10911,7 @@
           <a:p>
             <a:pPr algn="ctr"/>
             <a:r>
-              <a:rPr sz="1400" b="1">
+              <a:rPr sz="1500" b="1">
                 <a:solidFill>
                   <a:srgbClr val="202122"/>
                 </a:solidFill>
@@ -7834,14 +10924,47 @@
       </p:sp>
       <p:sp>
         <p:nvSpPr>
-          <p:cNvPr id="9" name="TextBox 8"/>
+          <p:cNvPr id="12" name="TextBox 11"/>
           <p:cNvSpPr txBox="1"/>
           <p:nvPr/>
         </p:nvSpPr>
         <p:spPr>
           <a:xfrm>
-            <a:off x="1234440" y="2795778"/>
-            <a:ext cx="10408615" cy="1030986"/>
+            <a:off x="7055967" y="1801368"/>
+            <a:ext cx="4404207" cy="512064"/>
+          </a:xfrm>
+          <a:prstGeom prst="rect">
+            <a:avLst/>
+          </a:prstGeom>
+          <a:noFill/>
+        </p:spPr>
+        <p:txBody>
+          <a:bodyPr wrap="square" anchor="ctr" lIns="0" rIns="0" tIns="0" bIns="0"/>
+          <a:lstStyle/>
+          <a:p>
+            <a:pPr algn="l"/>
+            <a:r>
+              <a:rPr sz="1900" b="1" i="0">
+                <a:solidFill>
+                  <a:srgbClr val="03306E"/>
+                </a:solidFill>
+                <a:latin typeface="Calibri"/>
+              </a:rPr>
+              <a:t>Invalid</a:t>
+            </a:r>
+          </a:p>
+        </p:txBody>
+      </p:sp>
+      <p:sp>
+        <p:nvSpPr>
+          <p:cNvPr id="13" name="TextBox 12"/>
+          <p:cNvSpPr txBox="1"/>
+          <p:nvPr/>
+        </p:nvSpPr>
+        <p:spPr>
+          <a:xfrm>
+            <a:off x="6461607" y="2468880"/>
+            <a:ext cx="4952847" cy="1143000"/>
           </a:xfrm>
           <a:prstGeom prst="rect">
             <a:avLst/>
@@ -7854,38 +10977,71 @@
           <a:p>
             <a:pPr algn="l"/>
             <a:r>
-              <a:rPr sz="1800" b="0" i="0">
-                <a:solidFill>
-                  <a:srgbClr val="54595D"/>
-                </a:solidFill>
-                <a:latin typeface="Calibri"/>
-              </a:rPr>
-              <a:t>A field accepts 1 to 8. Give an erroneous test value.</a:t>
-            </a:r>
-          </a:p>
-          <a:p>
-            <a:r>
-              <a:rPr sz="1800" b="1">
-                <a:solidFill>
-                  <a:srgbClr val="03306E"/>
-                </a:solidFill>
-                <a:latin typeface="Calibri"/>
-              </a:rPr>
-              <a:t>Any non-number, e.g. 'four'.</a:t>
-            </a:r>
-          </a:p>
-        </p:txBody>
-      </p:sp>
-      <p:sp>
-        <p:nvSpPr>
-          <p:cNvPr id="10" name="Oval 9"/>
+              <a:rPr sz="2000" b="0" i="0">
+                <a:solidFill>
+                  <a:srgbClr val="202122"/>
+                </a:solidFill>
+                <a:latin typeface="Calibri"/>
+              </a:rPr>
+              <a:t>Right type, should be rejected. Guests: 12</a:t>
+            </a:r>
+          </a:p>
+        </p:txBody>
+      </p:sp>
+      <p:sp>
+        <p:nvSpPr>
+          <p:cNvPr id="14" name="Rounded Rectangle 13"/>
           <p:cNvSpPr/>
           <p:nvPr/>
         </p:nvSpPr>
         <p:spPr>
           <a:xfrm>
-            <a:off x="548640" y="4009644"/>
-            <a:ext cx="411480" cy="411480"/>
+            <a:off x="548640" y="4023360"/>
+            <a:ext cx="5410047" cy="2148840"/>
+          </a:xfrm>
+          <a:prstGeom prst="roundRect">
+            <a:avLst>
+              <a:gd name="adj" fmla="val 6000"/>
+            </a:avLst>
+          </a:prstGeom>
+          <a:solidFill>
+            <a:srgbClr val="EAF3FF"/>
+          </a:solidFill>
+          <a:ln>
+            <a:noFill/>
+          </a:ln>
+          <a:effectLst/>
+        </p:spPr>
+        <p:style>
+          <a:lnRef idx="1">
+            <a:schemeClr val="accent1"/>
+          </a:lnRef>
+          <a:fillRef idx="3">
+            <a:schemeClr val="accent1"/>
+          </a:fillRef>
+          <a:effectRef idx="2">
+            <a:schemeClr val="accent1"/>
+          </a:effectRef>
+          <a:fontRef idx="minor">
+            <a:schemeClr val="lt1"/>
+          </a:fontRef>
+        </p:style>
+        <p:txBody>
+          <a:bodyPr rtlCol="0" anchor="ctr"/>
+          <a:lstStyle/>
+          <a:p/>
+        </p:txBody>
+      </p:sp>
+      <p:sp>
+        <p:nvSpPr>
+          <p:cNvPr id="15" name="Oval 14"/>
+          <p:cNvSpPr/>
+          <p:nvPr/>
+        </p:nvSpPr>
+        <p:spPr>
+          <a:xfrm>
+            <a:off x="777240" y="4251960"/>
+            <a:ext cx="457200" cy="457200"/>
           </a:xfrm>
           <a:prstGeom prst="ellipse">
             <a:avLst/>
@@ -7918,7 +11074,7 @@
           <a:p>
             <a:pPr algn="ctr"/>
             <a:r>
-              <a:rPr sz="1400" b="1">
+              <a:rPr sz="1500" b="1">
                 <a:solidFill>
                   <a:srgbClr val="202122"/>
                 </a:solidFill>
@@ -7931,14 +11087,47 @@
       </p:sp>
       <p:sp>
         <p:nvSpPr>
-          <p:cNvPr id="11" name="TextBox 10"/>
+          <p:cNvPr id="16" name="TextBox 15"/>
           <p:cNvSpPr txBox="1"/>
           <p:nvPr/>
         </p:nvSpPr>
         <p:spPr>
           <a:xfrm>
-            <a:off x="1234440" y="3991356"/>
-            <a:ext cx="10408615" cy="1030986"/>
+            <a:off x="1371600" y="4224528"/>
+            <a:ext cx="4404207" cy="512064"/>
+          </a:xfrm>
+          <a:prstGeom prst="rect">
+            <a:avLst/>
+          </a:prstGeom>
+          <a:noFill/>
+        </p:spPr>
+        <p:txBody>
+          <a:bodyPr wrap="square" anchor="ctr" lIns="0" rIns="0" tIns="0" bIns="0"/>
+          <a:lstStyle/>
+          <a:p>
+            <a:pPr algn="l"/>
+            <a:r>
+              <a:rPr sz="1900" b="1" i="0">
+                <a:solidFill>
+                  <a:srgbClr val="03306E"/>
+                </a:solidFill>
+                <a:latin typeface="Calibri"/>
+              </a:rPr>
+              <a:t>Boundary</a:t>
+            </a:r>
+          </a:p>
+        </p:txBody>
+      </p:sp>
+      <p:sp>
+        <p:nvSpPr>
+          <p:cNvPr id="17" name="TextBox 16"/>
+          <p:cNvSpPr txBox="1"/>
+          <p:nvPr/>
+        </p:nvSpPr>
+        <p:spPr>
+          <a:xfrm>
+            <a:off x="777240" y="4892040"/>
+            <a:ext cx="4952847" cy="1143000"/>
           </a:xfrm>
           <a:prstGeom prst="rect">
             <a:avLst/>
@@ -7951,38 +11140,71 @@
           <a:p>
             <a:pPr algn="l"/>
             <a:r>
-              <a:rPr sz="1800" b="0" i="0">
-                <a:solidFill>
-                  <a:srgbClr val="54595D"/>
-                </a:solidFill>
-                <a:latin typeface="Calibri"/>
-              </a:rPr>
-              <a:t>What is the difference between unit and integration testing?</a:t>
-            </a:r>
-          </a:p>
-          <a:p>
-            <a:r>
-              <a:rPr sz="1800" b="1">
-                <a:solidFill>
-                  <a:srgbClr val="03306E"/>
-                </a:solidFill>
-                <a:latin typeface="Calibri"/>
-              </a:rPr>
-              <a:t>Unit tests one component; integration tests components working together.</a:t>
-            </a:r>
-          </a:p>
-        </p:txBody>
-      </p:sp>
-      <p:sp>
-        <p:nvSpPr>
-          <p:cNvPr id="12" name="Oval 11"/>
+              <a:rPr sz="2000" b="0" i="0">
+                <a:solidFill>
+                  <a:srgbClr val="202122"/>
+                </a:solidFill>
+                <a:latin typeface="Calibri"/>
+              </a:rPr>
+              <a:t>At the edge. Guests: 1 and 8</a:t>
+            </a:r>
+          </a:p>
+        </p:txBody>
+      </p:sp>
+      <p:sp>
+        <p:nvSpPr>
+          <p:cNvPr id="18" name="Rounded Rectangle 17"/>
           <p:cNvSpPr/>
           <p:nvPr/>
         </p:nvSpPr>
         <p:spPr>
           <a:xfrm>
-            <a:off x="548640" y="5205221"/>
-            <a:ext cx="411480" cy="411480"/>
+            <a:off x="6233007" y="4023360"/>
+            <a:ext cx="5410047" cy="2148840"/>
+          </a:xfrm>
+          <a:prstGeom prst="roundRect">
+            <a:avLst>
+              <a:gd name="adj" fmla="val 6000"/>
+            </a:avLst>
+          </a:prstGeom>
+          <a:solidFill>
+            <a:srgbClr val="EAF3FF"/>
+          </a:solidFill>
+          <a:ln>
+            <a:noFill/>
+          </a:ln>
+          <a:effectLst/>
+        </p:spPr>
+        <p:style>
+          <a:lnRef idx="1">
+            <a:schemeClr val="accent1"/>
+          </a:lnRef>
+          <a:fillRef idx="3">
+            <a:schemeClr val="accent1"/>
+          </a:fillRef>
+          <a:effectRef idx="2">
+            <a:schemeClr val="accent1"/>
+          </a:effectRef>
+          <a:fontRef idx="minor">
+            <a:schemeClr val="lt1"/>
+          </a:fontRef>
+        </p:style>
+        <p:txBody>
+          <a:bodyPr rtlCol="0" anchor="ctr"/>
+          <a:lstStyle/>
+          <a:p/>
+        </p:txBody>
+      </p:sp>
+      <p:sp>
+        <p:nvSpPr>
+          <p:cNvPr id="19" name="Oval 18"/>
+          <p:cNvSpPr/>
+          <p:nvPr/>
+        </p:nvSpPr>
+        <p:spPr>
+          <a:xfrm>
+            <a:off x="6461607" y="4251960"/>
+            <a:ext cx="457200" cy="457200"/>
           </a:xfrm>
           <a:prstGeom prst="ellipse">
             <a:avLst/>
@@ -8015,7 +11237,7 @@
           <a:p>
             <a:pPr algn="ctr"/>
             <a:r>
-              <a:rPr sz="1400" b="1">
+              <a:rPr sz="1500" b="1">
                 <a:solidFill>
                   <a:srgbClr val="202122"/>
                 </a:solidFill>
@@ -8028,14 +11250,47 @@
       </p:sp>
       <p:sp>
         <p:nvSpPr>
-          <p:cNvPr id="13" name="TextBox 12"/>
+          <p:cNvPr id="20" name="TextBox 19"/>
           <p:cNvSpPr txBox="1"/>
           <p:nvPr/>
         </p:nvSpPr>
         <p:spPr>
           <a:xfrm>
-            <a:off x="1234440" y="5186933"/>
-            <a:ext cx="10408615" cy="1030986"/>
+            <a:off x="7055967" y="4224528"/>
+            <a:ext cx="4404207" cy="512064"/>
+          </a:xfrm>
+          <a:prstGeom prst="rect">
+            <a:avLst/>
+          </a:prstGeom>
+          <a:noFill/>
+        </p:spPr>
+        <p:txBody>
+          <a:bodyPr wrap="square" anchor="ctr" lIns="0" rIns="0" tIns="0" bIns="0"/>
+          <a:lstStyle/>
+          <a:p>
+            <a:pPr algn="l"/>
+            <a:r>
+              <a:rPr sz="1900" b="1" i="0">
+                <a:solidFill>
+                  <a:srgbClr val="03306E"/>
+                </a:solidFill>
+                <a:latin typeface="Calibri"/>
+              </a:rPr>
+              <a:t>Erroneous</a:t>
+            </a:r>
+          </a:p>
+        </p:txBody>
+      </p:sp>
+      <p:sp>
+        <p:nvSpPr>
+          <p:cNvPr id="21" name="TextBox 20"/>
+          <p:cNvSpPr txBox="1"/>
+          <p:nvPr/>
+        </p:nvSpPr>
+        <p:spPr>
+          <a:xfrm>
+            <a:off x="6461607" y="4892040"/>
+            <a:ext cx="4952847" cy="1143000"/>
           </a:xfrm>
           <a:prstGeom prst="rect">
             <a:avLst/>
@@ -8048,24 +11303,13 @@
           <a:p>
             <a:pPr algn="l"/>
             <a:r>
-              <a:rPr sz="1800" b="0" i="0">
-                <a:solidFill>
-                  <a:srgbClr val="54595D"/>
-                </a:solidFill>
-                <a:latin typeface="Calibri"/>
-              </a:rPr>
-              <a:t>Why test components before integration?</a:t>
-            </a:r>
-          </a:p>
-          <a:p>
-            <a:r>
-              <a:rPr sz="1800" b="1">
-                <a:solidFill>
-                  <a:srgbClr val="03306E"/>
-                </a:solidFill>
-                <a:latin typeface="Calibri"/>
-              </a:rPr>
-              <a:t>Faults are easier to find and fix in isolation.</a:t>
+              <a:rPr sz="2000" b="0" i="0">
+                <a:solidFill>
+                  <a:srgbClr val="202122"/>
+                </a:solidFill>
+                <a:latin typeface="Calibri"/>
+              </a:rPr>
+              <a:t>Wrong type. Guests: 'four'</a:t>
             </a:r>
           </a:p>
         </p:txBody>
@@ -8157,7 +11401,7 @@
                 </a:solidFill>
                 <a:latin typeface="Cambria"/>
               </a:rPr>
-              <a:t>Activity: Test a login form</a:t>
+              <a:t>Quick check: Test data</a:t>
             </a:r>
           </a:p>
         </p:txBody>
@@ -8230,19 +11474,17 @@
       </p:sp>
       <p:sp>
         <p:nvSpPr>
-          <p:cNvPr id="6" name="Rounded Rectangle 5"/>
+          <p:cNvPr id="6" name="Oval 5"/>
           <p:cNvSpPr/>
           <p:nvPr/>
         </p:nvSpPr>
         <p:spPr>
           <a:xfrm>
-            <a:off x="548640" y="1508760"/>
-            <a:ext cx="2011680" cy="457200"/>
-          </a:xfrm>
-          <a:prstGeom prst="roundRect">
-            <a:avLst>
-              <a:gd name="adj" fmla="val 50000"/>
-            </a:avLst>
+            <a:off x="548640" y="1691640"/>
+            <a:ext cx="502920" cy="502920"/>
+          </a:xfrm>
+          <a:prstGeom prst="ellipse">
+            <a:avLst/>
           </a:prstGeom>
           <a:solidFill>
             <a:srgbClr val="F2B705"/>
@@ -8267,9 +11509,20 @@
           </a:fontRef>
         </p:style>
         <p:txBody>
-          <a:bodyPr rtlCol="0" anchor="ctr"/>
-          <a:lstStyle/>
-          <a:p/>
+          <a:bodyPr rtlCol="0" anchor="ctr" lIns="0" rIns="0" tIns="0" bIns="0"/>
+          <a:lstStyle/>
+          <a:p>
+            <a:pPr algn="ctr"/>
+            <a:r>
+              <a:rPr sz="1600" b="1">
+                <a:solidFill>
+                  <a:srgbClr val="202122"/>
+                </a:solidFill>
+                <a:latin typeface="Calibri"/>
+              </a:rPr>
+              <a:t>1</a:t>
+            </a:r>
+          </a:p>
         </p:txBody>
       </p:sp>
       <p:sp>
@@ -8280,80 +11533,47 @@
         </p:nvSpPr>
         <p:spPr>
           <a:xfrm>
-            <a:off x="548640" y="1508760"/>
-            <a:ext cx="2011680" cy="457200"/>
-          </a:xfrm>
-          <a:prstGeom prst="rect">
-            <a:avLst/>
-          </a:prstGeom>
-          <a:noFill/>
-        </p:spPr>
-        <p:txBody>
-          <a:bodyPr wrap="square" anchor="ctr" lIns="0" rIns="0" tIns="0" bIns="0"/>
-          <a:lstStyle/>
-          <a:p>
-            <a:pPr algn="ctr"/>
-            <a:r>
-              <a:rPr sz="1400" b="1" i="0">
+            <a:off x="1371600" y="1645920"/>
+            <a:ext cx="10271455" cy="1188720"/>
+          </a:xfrm>
+          <a:prstGeom prst="rect">
+            <a:avLst/>
+          </a:prstGeom>
+          <a:noFill/>
+        </p:spPr>
+        <p:txBody>
+          <a:bodyPr wrap="square" anchor="t" lIns="0" rIns="0" tIns="0" bIns="0"/>
+          <a:lstStyle/>
+          <a:p>
+            <a:pPr algn="l"/>
+            <a:r>
+              <a:rPr sz="2400" b="0" i="0">
                 <a:solidFill>
                   <a:srgbClr val="202122"/>
                 </a:solidFill>
                 <a:latin typeface="Calibri"/>
               </a:rPr>
-              <a:t>25 minutes</a:t>
-            </a:r>
-          </a:p>
-        </p:txBody>
-      </p:sp>
-      <p:sp>
-        <p:nvSpPr>
-          <p:cNvPr id="8" name="TextBox 7"/>
-          <p:cNvSpPr txBox="1"/>
-          <p:nvPr/>
-        </p:nvSpPr>
-        <p:spPr>
-          <a:xfrm>
-            <a:off x="2743200" y="1508760"/>
-            <a:ext cx="4754880" cy="457200"/>
-          </a:xfrm>
-          <a:prstGeom prst="rect">
-            <a:avLst/>
-          </a:prstGeom>
-          <a:noFill/>
-        </p:spPr>
-        <p:txBody>
-          <a:bodyPr wrap="square" anchor="ctr" lIns="0" rIns="0" tIns="0" bIns="0"/>
-          <a:lstStyle/>
-          <a:p>
-            <a:pPr algn="l"/>
-            <a:r>
-              <a:rPr sz="1400" b="0" i="1">
-                <a:solidFill>
-                  <a:srgbClr val="54595D"/>
-                </a:solidFill>
-                <a:latin typeface="Calibri"/>
-              </a:rPr>
-              <a:t>Pairs</a:t>
-            </a:r>
-          </a:p>
-        </p:txBody>
-      </p:sp>
-      <p:sp>
-        <p:nvSpPr>
-          <p:cNvPr id="9" name="Oval 8"/>
+              <a:t>Why test boundary values?</a:t>
+            </a:r>
+          </a:p>
+        </p:txBody>
+      </p:sp>
+      <p:sp>
+        <p:nvSpPr>
+          <p:cNvPr id="8" name="Oval 7"/>
           <p:cNvSpPr/>
           <p:nvPr/>
         </p:nvSpPr>
         <p:spPr>
           <a:xfrm>
-            <a:off x="548640" y="2482596"/>
-            <a:ext cx="384048" cy="384048"/>
+            <a:off x="548640" y="3108960"/>
+            <a:ext cx="502920" cy="502920"/>
           </a:xfrm>
           <a:prstGeom prst="ellipse">
             <a:avLst/>
           </a:prstGeom>
           <a:solidFill>
-            <a:srgbClr val="0645AD"/>
+            <a:srgbClr val="F2B705"/>
           </a:solidFill>
           <a:ln>
             <a:noFill/>
@@ -8380,66 +11600,66 @@
           <a:p>
             <a:pPr algn="ctr"/>
             <a:r>
-              <a:rPr sz="1300" b="1">
-                <a:solidFill>
-                  <a:srgbClr val="FFFFFF"/>
-                </a:solidFill>
-                <a:latin typeface="Calibri"/>
-              </a:rPr>
-              <a:t>1</a:t>
-            </a:r>
-          </a:p>
-        </p:txBody>
-      </p:sp>
-      <p:sp>
-        <p:nvSpPr>
-          <p:cNvPr id="10" name="TextBox 9"/>
+              <a:rPr sz="1600" b="1">
+                <a:solidFill>
+                  <a:srgbClr val="202122"/>
+                </a:solidFill>
+                <a:latin typeface="Calibri"/>
+              </a:rPr>
+              <a:t>2</a:t>
+            </a:r>
+          </a:p>
+        </p:txBody>
+      </p:sp>
+      <p:sp>
+        <p:nvSpPr>
+          <p:cNvPr id="9" name="TextBox 8"/>
           <p:cNvSpPr txBox="1"/>
           <p:nvPr/>
         </p:nvSpPr>
         <p:spPr>
           <a:xfrm>
-            <a:off x="1143000" y="2240280"/>
-            <a:ext cx="5943600" cy="868680"/>
-          </a:xfrm>
-          <a:prstGeom prst="rect">
-            <a:avLst/>
-          </a:prstGeom>
-          <a:noFill/>
-        </p:spPr>
-        <p:txBody>
-          <a:bodyPr wrap="square" anchor="ctr" lIns="0" rIns="0" tIns="0" bIns="0"/>
+            <a:off x="1371600" y="3063240"/>
+            <a:ext cx="10271455" cy="1188720"/>
+          </a:xfrm>
+          <a:prstGeom prst="rect">
+            <a:avLst/>
+          </a:prstGeom>
+          <a:noFill/>
+        </p:spPr>
+        <p:txBody>
+          <a:bodyPr wrap="square" anchor="t" lIns="0" rIns="0" tIns="0" bIns="0"/>
           <a:lstStyle/>
           <a:p>
             <a:pPr algn="l"/>
             <a:r>
-              <a:rPr sz="1700" b="0" i="0">
+              <a:rPr sz="2400" b="0" i="0">
                 <a:solidFill>
                   <a:srgbClr val="202122"/>
                 </a:solidFill>
                 <a:latin typeface="Calibri"/>
               </a:rPr>
-              <a:t>The form needs a username of 3 to 15 characters and a password of at least 8.</a:t>
-            </a:r>
-          </a:p>
-        </p:txBody>
-      </p:sp>
-      <p:sp>
-        <p:nvSpPr>
-          <p:cNvPr id="11" name="Oval 10"/>
+              <a:t>A mark field accepts 0 to 100. Give an erroneous value.</a:t>
+            </a:r>
+          </a:p>
+        </p:txBody>
+      </p:sp>
+      <p:sp>
+        <p:nvSpPr>
+          <p:cNvPr id="10" name="Oval 9"/>
           <p:cNvSpPr/>
           <p:nvPr/>
         </p:nvSpPr>
         <p:spPr>
           <a:xfrm>
-            <a:off x="548640" y="3461004"/>
-            <a:ext cx="384048" cy="384048"/>
+            <a:off x="548640" y="4526280"/>
+            <a:ext cx="502920" cy="502920"/>
           </a:xfrm>
           <a:prstGeom prst="ellipse">
             <a:avLst/>
           </a:prstGeom>
           <a:solidFill>
-            <a:srgbClr val="0645AD"/>
+            <a:srgbClr val="F2B705"/>
           </a:solidFill>
           <a:ln>
             <a:noFill/>
@@ -8466,13 +11686,46 @@
           <a:p>
             <a:pPr algn="ctr"/>
             <a:r>
-              <a:rPr sz="1300" b="1">
-                <a:solidFill>
-                  <a:srgbClr val="FFFFFF"/>
-                </a:solidFill>
-                <a:latin typeface="Calibri"/>
-              </a:rPr>
-              <a:t>2</a:t>
+              <a:rPr sz="1600" b="1">
+                <a:solidFill>
+                  <a:srgbClr val="202122"/>
+                </a:solidFill>
+                <a:latin typeface="Calibri"/>
+              </a:rPr>
+              <a:t>3</a:t>
+            </a:r>
+          </a:p>
+        </p:txBody>
+      </p:sp>
+      <p:sp>
+        <p:nvSpPr>
+          <p:cNvPr id="11" name="TextBox 10"/>
+          <p:cNvSpPr txBox="1"/>
+          <p:nvPr/>
+        </p:nvSpPr>
+        <p:spPr>
+          <a:xfrm>
+            <a:off x="1371600" y="4480560"/>
+            <a:ext cx="10271455" cy="1188720"/>
+          </a:xfrm>
+          <a:prstGeom prst="rect">
+            <a:avLst/>
+          </a:prstGeom>
+          <a:noFill/>
+        </p:spPr>
+        <p:txBody>
+          <a:bodyPr wrap="square" anchor="t" lIns="0" rIns="0" tIns="0" bIns="0"/>
+          <a:lstStyle/>
+          <a:p>
+            <a:pPr algn="l"/>
+            <a:r>
+              <a:rPr sz="2400" b="0" i="0">
+                <a:solidFill>
+                  <a:srgbClr val="202122"/>
+                </a:solidFill>
+                <a:latin typeface="Calibri"/>
+              </a:rPr>
+              <a:t>What should happen with invalid data?</a:t>
             </a:r>
           </a:p>
         </p:txBody>
@@ -8485,362 +11738,27 @@
         </p:nvSpPr>
         <p:spPr>
           <a:xfrm>
-            <a:off x="1143000" y="3218688"/>
-            <a:ext cx="5943600" cy="868680"/>
-          </a:xfrm>
-          <a:prstGeom prst="rect">
-            <a:avLst/>
-          </a:prstGeom>
-          <a:noFill/>
-        </p:spPr>
-        <p:txBody>
-          <a:bodyPr wrap="square" anchor="ctr" lIns="0" rIns="0" tIns="0" bIns="0"/>
+            <a:off x="548640" y="5852160"/>
+            <a:ext cx="11094415" cy="365760"/>
+          </a:xfrm>
+          <a:prstGeom prst="rect">
+            <a:avLst/>
+          </a:prstGeom>
+          <a:noFill/>
+        </p:spPr>
+        <p:txBody>
+          <a:bodyPr wrap="square" anchor="t" lIns="0" rIns="0" tIns="0" bIns="0"/>
           <a:lstStyle/>
           <a:p>
             <a:pPr algn="l"/>
             <a:r>
-              <a:rPr sz="1700" b="0" i="0">
-                <a:solidFill>
-                  <a:srgbClr val="202122"/>
-                </a:solidFill>
-                <a:latin typeface="Calibri"/>
-              </a:rPr>
-              <a:t>Write a test plan with at least ten tests.</a:t>
-            </a:r>
-          </a:p>
-        </p:txBody>
-      </p:sp>
-      <p:sp>
-        <p:nvSpPr>
-          <p:cNvPr id="13" name="Oval 12"/>
-          <p:cNvSpPr/>
-          <p:nvPr/>
-        </p:nvSpPr>
-        <p:spPr>
-          <a:xfrm>
-            <a:off x="548640" y="4439412"/>
-            <a:ext cx="384048" cy="384048"/>
-          </a:xfrm>
-          <a:prstGeom prst="ellipse">
-            <a:avLst/>
-          </a:prstGeom>
-          <a:solidFill>
-            <a:srgbClr val="0645AD"/>
-          </a:solidFill>
-          <a:ln>
-            <a:noFill/>
-          </a:ln>
-          <a:effectLst/>
-        </p:spPr>
-        <p:style>
-          <a:lnRef idx="1">
-            <a:schemeClr val="accent1"/>
-          </a:lnRef>
-          <a:fillRef idx="3">
-            <a:schemeClr val="accent1"/>
-          </a:fillRef>
-          <a:effectRef idx="2">
-            <a:schemeClr val="accent1"/>
-          </a:effectRef>
-          <a:fontRef idx="minor">
-            <a:schemeClr val="lt1"/>
-          </a:fontRef>
-        </p:style>
-        <p:txBody>
-          <a:bodyPr rtlCol="0" anchor="ctr" lIns="0" rIns="0" tIns="0" bIns="0"/>
-          <a:lstStyle/>
-          <a:p>
-            <a:pPr algn="ctr"/>
-            <a:r>
-              <a:rPr sz="1300" b="1">
-                <a:solidFill>
-                  <a:srgbClr val="FFFFFF"/>
-                </a:solidFill>
-                <a:latin typeface="Calibri"/>
-              </a:rPr>
-              <a:t>3</a:t>
-            </a:r>
-          </a:p>
-        </p:txBody>
-      </p:sp>
-      <p:sp>
-        <p:nvSpPr>
-          <p:cNvPr id="14" name="TextBox 13"/>
-          <p:cNvSpPr txBox="1"/>
-          <p:nvPr/>
-        </p:nvSpPr>
-        <p:spPr>
-          <a:xfrm>
-            <a:off x="1143000" y="4197096"/>
-            <a:ext cx="5943600" cy="868680"/>
-          </a:xfrm>
-          <a:prstGeom prst="rect">
-            <a:avLst/>
-          </a:prstGeom>
-          <a:noFill/>
-        </p:spPr>
-        <p:txBody>
-          <a:bodyPr wrap="square" anchor="ctr" lIns="0" rIns="0" tIns="0" bIns="0"/>
-          <a:lstStyle/>
-          <a:p>
-            <a:pPr algn="l"/>
-            <a:r>
-              <a:rPr sz="1700" b="0" i="0">
-                <a:solidFill>
-                  <a:srgbClr val="202122"/>
-                </a:solidFill>
-                <a:latin typeface="Calibri"/>
-              </a:rPr>
-              <a:t>Use all four types of test data.</a:t>
-            </a:r>
-          </a:p>
-        </p:txBody>
-      </p:sp>
-      <p:sp>
-        <p:nvSpPr>
-          <p:cNvPr id="15" name="Oval 14"/>
-          <p:cNvSpPr/>
-          <p:nvPr/>
-        </p:nvSpPr>
-        <p:spPr>
-          <a:xfrm>
-            <a:off x="548640" y="5417820"/>
-            <a:ext cx="384048" cy="384048"/>
-          </a:xfrm>
-          <a:prstGeom prst="ellipse">
-            <a:avLst/>
-          </a:prstGeom>
-          <a:solidFill>
-            <a:srgbClr val="0645AD"/>
-          </a:solidFill>
-          <a:ln>
-            <a:noFill/>
-          </a:ln>
-          <a:effectLst/>
-        </p:spPr>
-        <p:style>
-          <a:lnRef idx="1">
-            <a:schemeClr val="accent1"/>
-          </a:lnRef>
-          <a:fillRef idx="3">
-            <a:schemeClr val="accent1"/>
-          </a:fillRef>
-          <a:effectRef idx="2">
-            <a:schemeClr val="accent1"/>
-          </a:effectRef>
-          <a:fontRef idx="minor">
-            <a:schemeClr val="lt1"/>
-          </a:fontRef>
-        </p:style>
-        <p:txBody>
-          <a:bodyPr rtlCol="0" anchor="ctr" lIns="0" rIns="0" tIns="0" bIns="0"/>
-          <a:lstStyle/>
-          <a:p>
-            <a:pPr algn="ctr"/>
-            <a:r>
-              <a:rPr sz="1300" b="1">
-                <a:solidFill>
-                  <a:srgbClr val="FFFFFF"/>
-                </a:solidFill>
-                <a:latin typeface="Calibri"/>
-              </a:rPr>
-              <a:t>4</a:t>
-            </a:r>
-          </a:p>
-        </p:txBody>
-      </p:sp>
-      <p:sp>
-        <p:nvSpPr>
-          <p:cNvPr id="16" name="TextBox 15"/>
-          <p:cNvSpPr txBox="1"/>
-          <p:nvPr/>
-        </p:nvSpPr>
-        <p:spPr>
-          <a:xfrm>
-            <a:off x="1143000" y="5175504"/>
-            <a:ext cx="5943600" cy="868680"/>
-          </a:xfrm>
-          <a:prstGeom prst="rect">
-            <a:avLst/>
-          </a:prstGeom>
-          <a:noFill/>
-        </p:spPr>
-        <p:txBody>
-          <a:bodyPr wrap="square" anchor="ctr" lIns="0" rIns="0" tIns="0" bIns="0"/>
-          <a:lstStyle/>
-          <a:p>
-            <a:pPr algn="l"/>
-            <a:r>
-              <a:rPr sz="1700" b="0" i="0">
-                <a:solidFill>
-                  <a:srgbClr val="202122"/>
-                </a:solidFill>
-                <a:latin typeface="Calibri"/>
-              </a:rPr>
-              <a:t>Run the tests on your teacher's sample code and record the results.</a:t>
-            </a:r>
-          </a:p>
-        </p:txBody>
-      </p:sp>
-      <p:sp>
-        <p:nvSpPr>
-          <p:cNvPr id="17" name="Rounded Rectangle 16"/>
-          <p:cNvSpPr/>
-          <p:nvPr/>
-        </p:nvSpPr>
-        <p:spPr>
-          <a:xfrm>
-            <a:off x="7772400" y="1508760"/>
-            <a:ext cx="3867912" cy="4572000"/>
-          </a:xfrm>
-          <a:prstGeom prst="roundRect">
-            <a:avLst>
-              <a:gd name="adj" fmla="val 8000"/>
-            </a:avLst>
-          </a:prstGeom>
-          <a:solidFill>
-            <a:srgbClr val="EAF3FF"/>
-          </a:solidFill>
-          <a:ln>
-            <a:noFill/>
-          </a:ln>
-          <a:effectLst/>
-        </p:spPr>
-        <p:style>
-          <a:lnRef idx="1">
-            <a:schemeClr val="accent1"/>
-          </a:lnRef>
-          <a:fillRef idx="3">
-            <a:schemeClr val="accent1"/>
-          </a:fillRef>
-          <a:effectRef idx="2">
-            <a:schemeClr val="accent1"/>
-          </a:effectRef>
-          <a:fontRef idx="minor">
-            <a:schemeClr val="lt1"/>
-          </a:fontRef>
-        </p:style>
-        <p:txBody>
-          <a:bodyPr rtlCol="0" anchor="ctr"/>
-          <a:lstStyle/>
-          <a:p/>
-        </p:txBody>
-      </p:sp>
-      <p:sp>
-        <p:nvSpPr>
-          <p:cNvPr id="18" name="TextBox 17"/>
-          <p:cNvSpPr txBox="1"/>
-          <p:nvPr/>
-        </p:nvSpPr>
-        <p:spPr>
-          <a:xfrm>
-            <a:off x="8046720" y="1737360"/>
-            <a:ext cx="3291840" cy="365760"/>
-          </a:xfrm>
-          <a:prstGeom prst="rect">
-            <a:avLst/>
-          </a:prstGeom>
-          <a:noFill/>
-        </p:spPr>
-        <p:txBody>
-          <a:bodyPr wrap="square" anchor="t" lIns="0" rIns="0" tIns="0" bIns="0"/>
-          <a:lstStyle/>
-          <a:p>
-            <a:pPr algn="l"/>
-            <a:r>
-              <a:rPr sz="1300" b="1" i="0">
-                <a:solidFill>
-                  <a:srgbClr val="0645AD"/>
-                </a:solidFill>
-                <a:latin typeface="Calibri"/>
-              </a:rPr>
-              <a:t>SUCCESS CRITERIA</a:t>
-            </a:r>
-          </a:p>
-        </p:txBody>
-      </p:sp>
-      <p:sp>
-        <p:nvSpPr>
-          <p:cNvPr id="19" name="TextBox 18"/>
-          <p:cNvSpPr txBox="1"/>
-          <p:nvPr/>
-        </p:nvSpPr>
-        <p:spPr>
-          <a:xfrm>
-            <a:off x="8046720" y="2240280"/>
-            <a:ext cx="3337560" cy="3657600"/>
-          </a:xfrm>
-          <a:prstGeom prst="rect">
-            <a:avLst/>
-          </a:prstGeom>
-          <a:noFill/>
-        </p:spPr>
-        <p:txBody>
-          <a:bodyPr wrap="square" lIns="0" rIns="0" tIns="0" bIns="0">
-            <a:spAutoFit/>
-          </a:bodyPr>
-          <a:lstStyle/>
-          <a:p>
-            <a:pPr marL="274320" indent="-274320">
-              <a:spcAft>
-                <a:spcPts val="810"/>
-              </a:spcAft>
-              <a:buClr>
-                <a:srgbClr val="0645AD"/>
-              </a:buClr>
-              <a:buFont typeface="Arial"/>
-              <a:buChar char="•"/>
-            </a:pPr>
-            <a:r>
-              <a:rPr sz="1800" b="0">
-                <a:solidFill>
-                  <a:srgbClr val="202122"/>
-                </a:solidFill>
-                <a:latin typeface="Calibri"/>
-              </a:rPr>
-              <a:t>All five columns completed</a:t>
-            </a:r>
-          </a:p>
-          <a:p>
-            <a:pPr marL="274320" indent="-274320">
-              <a:spcAft>
-                <a:spcPts val="810"/>
-              </a:spcAft>
-              <a:buClr>
-                <a:srgbClr val="0645AD"/>
-              </a:buClr>
-              <a:buFont typeface="Arial"/>
-              <a:buChar char="•"/>
-            </a:pPr>
-            <a:r>
-              <a:rPr sz="1800" b="0">
-                <a:solidFill>
-                  <a:srgbClr val="202122"/>
-                </a:solidFill>
-                <a:latin typeface="Calibri"/>
-              </a:rPr>
-              <a:t>Boundaries 3, 15 and 8 tested</a:t>
-            </a:r>
-          </a:p>
-          <a:p>
-            <a:pPr marL="274320" indent="-274320">
-              <a:spcAft>
-                <a:spcPts val="810"/>
-              </a:spcAft>
-              <a:buClr>
-                <a:srgbClr val="0645AD"/>
-              </a:buClr>
-              <a:buFont typeface="Arial"/>
-              <a:buChar char="•"/>
-            </a:pPr>
-            <a:r>
-              <a:rPr sz="1800" b="0">
-                <a:solidFill>
-                  <a:srgbClr val="202122"/>
-                </a:solidFill>
-                <a:latin typeface="Calibri"/>
-              </a:rPr>
-              <a:t>Failures clearly recorded</a:t>
+              <a:rPr sz="1300" b="0" i="1">
+                <a:solidFill>
+                  <a:srgbClr val="54595D"/>
+                </a:solidFill>
+                <a:latin typeface="Calibri"/>
+              </a:rPr>
+              <a:t>Answer on mini whiteboards or in your book. Answers are in the speaker notes.</a:t>
             </a:r>
           </a:p>
         </p:txBody>
@@ -8859,7 +11777,7 @@
     <p:bg>
       <p:bgPr>
         <a:solidFill>
-          <a:srgbClr val="03306E"/>
+          <a:srgbClr val="FFFFFF"/>
         </a:solidFill>
         <a:effectLst/>
       </p:bgPr>
@@ -8895,7 +11813,7 @@
             <a:r>
               <a:rPr sz="1100" b="1" i="0">
                 <a:solidFill>
-                  <a:srgbClr val="A9C8F0"/>
+                  <a:srgbClr val="54595D"/>
                 </a:solidFill>
                 <a:latin typeface="Calibri"/>
               </a:rPr>
@@ -8928,25 +11846,222 @@
             <a:r>
               <a:rPr sz="3200" b="1" i="0">
                 <a:solidFill>
-                  <a:srgbClr val="FFFFFF"/>
+                  <a:srgbClr val="03306E"/>
                 </a:solidFill>
                 <a:latin typeface="Cambria"/>
               </a:rPr>
-              <a:t>Exit ticket</a:t>
-            </a:r>
-          </a:p>
-        </p:txBody>
-      </p:sp>
-      <p:sp>
-        <p:nvSpPr>
-          <p:cNvPr id="4" name="Oval 3"/>
+              <a:t>Structure of a test plan</a:t>
+            </a:r>
+          </a:p>
+        </p:txBody>
+      </p:sp>
+      <p:sp>
+        <p:nvSpPr>
+          <p:cNvPr id="4" name="TextBox 3"/>
+          <p:cNvSpPr txBox="1"/>
+          <p:nvPr/>
+        </p:nvSpPr>
+        <p:spPr>
+          <a:xfrm>
+            <a:off x="548640" y="6446520"/>
+            <a:ext cx="8229600" cy="274320"/>
+          </a:xfrm>
+          <a:prstGeom prst="rect">
+            <a:avLst/>
+          </a:prstGeom>
+          <a:noFill/>
+        </p:spPr>
+        <p:txBody>
+          <a:bodyPr wrap="square" anchor="t" lIns="0" rIns="0" tIns="0" bIns="0"/>
+          <a:lstStyle/>
+          <a:p>
+            <a:pPr algn="l"/>
+            <a:r>
+              <a:rPr sz="1000" b="0" i="0">
+                <a:solidFill>
+                  <a:srgbClr val="54595D"/>
+                </a:solidFill>
+                <a:latin typeface="Calibri"/>
+              </a:rPr>
+              <a:t>Digital Software Development T Level  ·  Testing</a:t>
+            </a:r>
+          </a:p>
+        </p:txBody>
+      </p:sp>
+      <p:sp>
+        <p:nvSpPr>
+          <p:cNvPr id="5" name="TextBox 4"/>
+          <p:cNvSpPr txBox="1"/>
+          <p:nvPr/>
+        </p:nvSpPr>
+        <p:spPr>
+          <a:xfrm>
+            <a:off x="10728655" y="6446520"/>
+            <a:ext cx="914400" cy="274320"/>
+          </a:xfrm>
+          <a:prstGeom prst="rect">
+            <a:avLst/>
+          </a:prstGeom>
+          <a:noFill/>
+        </p:spPr>
+        <p:txBody>
+          <a:bodyPr wrap="square" anchor="t" lIns="0" rIns="0" tIns="0" bIns="0"/>
+          <a:lstStyle/>
+          <a:p>
+            <a:pPr algn="r"/>
+            <a:r>
+              <a:rPr sz="1000" b="0" i="0">
+                <a:solidFill>
+                  <a:srgbClr val="54595D"/>
+                </a:solidFill>
+                <a:latin typeface="Calibri"/>
+              </a:rPr>
+              <a:t>9</a:t>
+            </a:r>
+          </a:p>
+        </p:txBody>
+      </p:sp>
+      <p:sp>
+        <p:nvSpPr>
+          <p:cNvPr id="6" name="TextBox 5"/>
+          <p:cNvSpPr txBox="1"/>
+          <p:nvPr/>
+        </p:nvSpPr>
+        <p:spPr>
+          <a:xfrm>
+            <a:off x="548640" y="1554480"/>
+            <a:ext cx="6720840" cy="4617720"/>
+          </a:xfrm>
+          <a:prstGeom prst="rect">
+            <a:avLst/>
+          </a:prstGeom>
+          <a:noFill/>
+        </p:spPr>
+        <p:txBody>
+          <a:bodyPr wrap="square" lIns="0" rIns="0" tIns="0" bIns="0">
+            <a:spAutoFit/>
+          </a:bodyPr>
+          <a:lstStyle/>
+          <a:p>
+            <a:pPr>
+              <a:spcAft>
+                <a:spcPts val="1320"/>
+              </a:spcAft>
+            </a:pPr>
+            <a:r>
+              <a:rPr sz="2200" b="0">
+                <a:solidFill>
+                  <a:srgbClr val="202122"/>
+                </a:solidFill>
+                <a:latin typeface="Calibri"/>
+              </a:rPr>
+              <a:t>A test plan makes testing organised and repeatable. Each test is a row.</a:t>
+            </a:r>
+          </a:p>
+          <a:p>
+            <a:pPr>
+              <a:spcAft>
+                <a:spcPts val="1320"/>
+              </a:spcAft>
+            </a:pPr>
+            <a:r>
+              <a:rPr sz="2200" b="0">
+                <a:solidFill>
+                  <a:srgbClr val="202122"/>
+                </a:solidFill>
+                <a:latin typeface="Calibri"/>
+              </a:rPr>
+              <a:t>Identify the test (what's being tested), describe its purpose (why), identify the test data (the exact values), describe the expected result (written before running it) and record the actual result.</a:t>
+            </a:r>
+          </a:p>
+          <a:p>
+            <a:pPr>
+              <a:spcAft>
+                <a:spcPts val="1320"/>
+              </a:spcAft>
+            </a:pPr>
+            <a:r>
+              <a:rPr sz="2200" b="0">
+                <a:solidFill>
+                  <a:srgbClr val="202122"/>
+                </a:solidFill>
+                <a:latin typeface="Calibri"/>
+              </a:rPr>
+              <a:t>When the actual result differs from the expected, you've found a bug: fix it and retest.</a:t>
+            </a:r>
+          </a:p>
+          <a:p>
+            <a:pPr>
+              <a:spcAft>
+                <a:spcPts val="1320"/>
+              </a:spcAft>
+            </a:pPr>
+            <a:r>
+              <a:rPr sz="2200" b="0">
+                <a:solidFill>
+                  <a:srgbClr val="202122"/>
+                </a:solidFill>
+                <a:latin typeface="Calibri"/>
+              </a:rPr>
+              <a:t>Tests you run often can be automated with scripts, macros or testing tools, so they rerun after every change.</a:t>
+            </a:r>
+          </a:p>
+        </p:txBody>
+      </p:sp>
+      <p:sp>
+        <p:nvSpPr>
+          <p:cNvPr id="7" name="Rounded Rectangle 6"/>
           <p:cNvSpPr/>
           <p:nvPr/>
         </p:nvSpPr>
         <p:spPr>
           <a:xfrm>
-            <a:off x="548640" y="1737360"/>
-            <a:ext cx="502920" cy="502920"/>
+            <a:off x="7772400" y="1554480"/>
+            <a:ext cx="3867912" cy="4526280"/>
+          </a:xfrm>
+          <a:prstGeom prst="roundRect">
+            <a:avLst>
+              <a:gd name="adj" fmla="val 8000"/>
+            </a:avLst>
+          </a:prstGeom>
+          <a:solidFill>
+            <a:srgbClr val="03306E"/>
+          </a:solidFill>
+          <a:ln>
+            <a:noFill/>
+          </a:ln>
+          <a:effectLst/>
+        </p:spPr>
+        <p:style>
+          <a:lnRef idx="1">
+            <a:schemeClr val="accent1"/>
+          </a:lnRef>
+          <a:fillRef idx="3">
+            <a:schemeClr val="accent1"/>
+          </a:fillRef>
+          <a:effectRef idx="2">
+            <a:schemeClr val="accent1"/>
+          </a:effectRef>
+          <a:fontRef idx="minor">
+            <a:schemeClr val="lt1"/>
+          </a:fontRef>
+        </p:style>
+        <p:txBody>
+          <a:bodyPr rtlCol="0" anchor="ctr"/>
+          <a:lstStyle/>
+          <a:p/>
+        </p:txBody>
+      </p:sp>
+      <p:sp>
+        <p:nvSpPr>
+          <p:cNvPr id="8" name="Oval 7"/>
+          <p:cNvSpPr/>
+          <p:nvPr/>
+        </p:nvSpPr>
+        <p:spPr>
+          <a:xfrm>
+            <a:off x="8046720" y="1828800"/>
+            <a:ext cx="548640" cy="548640"/>
           </a:xfrm>
           <a:prstGeom prst="ellipse">
             <a:avLst/>
@@ -8979,185 +12094,13 @@
           <a:p>
             <a:pPr algn="ctr"/>
             <a:r>
-              <a:rPr sz="1700" b="1">
+              <a:rPr sz="1300" b="1">
                 <a:solidFill>
                   <a:srgbClr val="202122"/>
                 </a:solidFill>
                 <a:latin typeface="Calibri"/>
               </a:rPr>
-              <a:t>1</a:t>
-            </a:r>
-          </a:p>
-        </p:txBody>
-      </p:sp>
-      <p:sp>
-        <p:nvSpPr>
-          <p:cNvPr id="5" name="TextBox 4"/>
-          <p:cNvSpPr txBox="1"/>
-          <p:nvPr/>
-        </p:nvSpPr>
-        <p:spPr>
-          <a:xfrm>
-            <a:off x="1325880" y="1645920"/>
-            <a:ext cx="6583680" cy="822960"/>
-          </a:xfrm>
-          <a:prstGeom prst="rect">
-            <a:avLst/>
-          </a:prstGeom>
-          <a:noFill/>
-        </p:spPr>
-        <p:txBody>
-          <a:bodyPr wrap="square" anchor="ctr" lIns="0" rIns="0" tIns="0" bIns="0"/>
-          <a:lstStyle/>
-          <a:p>
-            <a:pPr algn="l"/>
-            <a:r>
-              <a:rPr sz="2000" b="0" i="0">
-                <a:solidFill>
-                  <a:srgbClr val="FFFFFF"/>
-                </a:solidFill>
-                <a:latin typeface="Calibri"/>
-              </a:rPr>
-              <a:t>What is closed box testing?</a:t>
-            </a:r>
-          </a:p>
-        </p:txBody>
-      </p:sp>
-      <p:sp>
-        <p:nvSpPr>
-          <p:cNvPr id="6" name="Oval 5"/>
-          <p:cNvSpPr/>
-          <p:nvPr/>
-        </p:nvSpPr>
-        <p:spPr>
-          <a:xfrm>
-            <a:off x="548640" y="2697480"/>
-            <a:ext cx="502920" cy="502920"/>
-          </a:xfrm>
-          <a:prstGeom prst="ellipse">
-            <a:avLst/>
-          </a:prstGeom>
-          <a:solidFill>
-            <a:srgbClr val="F2B705"/>
-          </a:solidFill>
-          <a:ln>
-            <a:noFill/>
-          </a:ln>
-          <a:effectLst/>
-        </p:spPr>
-        <p:style>
-          <a:lnRef idx="1">
-            <a:schemeClr val="accent1"/>
-          </a:lnRef>
-          <a:fillRef idx="3">
-            <a:schemeClr val="accent1"/>
-          </a:fillRef>
-          <a:effectRef idx="2">
-            <a:schemeClr val="accent1"/>
-          </a:effectRef>
-          <a:fontRef idx="minor">
-            <a:schemeClr val="lt1"/>
-          </a:fontRef>
-        </p:style>
-        <p:txBody>
-          <a:bodyPr rtlCol="0" anchor="ctr" lIns="0" rIns="0" tIns="0" bIns="0"/>
-          <a:lstStyle/>
-          <a:p>
-            <a:pPr algn="ctr"/>
-            <a:r>
-              <a:rPr sz="1700" b="1">
-                <a:solidFill>
-                  <a:srgbClr val="202122"/>
-                </a:solidFill>
-                <a:latin typeface="Calibri"/>
-              </a:rPr>
-              <a:t>2</a:t>
-            </a:r>
-          </a:p>
-        </p:txBody>
-      </p:sp>
-      <p:sp>
-        <p:nvSpPr>
-          <p:cNvPr id="7" name="TextBox 6"/>
-          <p:cNvSpPr txBox="1"/>
-          <p:nvPr/>
-        </p:nvSpPr>
-        <p:spPr>
-          <a:xfrm>
-            <a:off x="1325880" y="2606040"/>
-            <a:ext cx="6583680" cy="822960"/>
-          </a:xfrm>
-          <a:prstGeom prst="rect">
-            <a:avLst/>
-          </a:prstGeom>
-          <a:noFill/>
-        </p:spPr>
-        <p:txBody>
-          <a:bodyPr wrap="square" anchor="ctr" lIns="0" rIns="0" tIns="0" bIns="0"/>
-          <a:lstStyle/>
-          <a:p>
-            <a:pPr algn="l"/>
-            <a:r>
-              <a:rPr sz="2000" b="0" i="0">
-                <a:solidFill>
-                  <a:srgbClr val="FFFFFF"/>
-                </a:solidFill>
-                <a:latin typeface="Calibri"/>
-              </a:rPr>
-              <a:t>Why write the expected result before testing?</a:t>
-            </a:r>
-          </a:p>
-        </p:txBody>
-      </p:sp>
-      <p:sp>
-        <p:nvSpPr>
-          <p:cNvPr id="8" name="Oval 7"/>
-          <p:cNvSpPr/>
-          <p:nvPr/>
-        </p:nvSpPr>
-        <p:spPr>
-          <a:xfrm>
-            <a:off x="548640" y="3657600"/>
-            <a:ext cx="502920" cy="502920"/>
-          </a:xfrm>
-          <a:prstGeom prst="ellipse">
-            <a:avLst/>
-          </a:prstGeom>
-          <a:solidFill>
-            <a:srgbClr val="F2B705"/>
-          </a:solidFill>
-          <a:ln>
-            <a:noFill/>
-          </a:ln>
-          <a:effectLst/>
-        </p:spPr>
-        <p:style>
-          <a:lnRef idx="1">
-            <a:schemeClr val="accent1"/>
-          </a:lnRef>
-          <a:fillRef idx="3">
-            <a:schemeClr val="accent1"/>
-          </a:fillRef>
-          <a:effectRef idx="2">
-            <a:schemeClr val="accent1"/>
-          </a:effectRef>
-          <a:fontRef idx="minor">
-            <a:schemeClr val="lt1"/>
-          </a:fontRef>
-        </p:style>
-        <p:txBody>
-          <a:bodyPr rtlCol="0" anchor="ctr" lIns="0" rIns="0" tIns="0" bIns="0"/>
-          <a:lstStyle/>
-          <a:p>
-            <a:pPr algn="ctr"/>
-            <a:r>
-              <a:rPr sz="1700" b="1">
-                <a:solidFill>
-                  <a:srgbClr val="202122"/>
-                </a:solidFill>
-                <a:latin typeface="Calibri"/>
-              </a:rPr>
-              <a:t>3</a:t>
+              <a:t>e.g.</a:t>
             </a:r>
           </a:p>
         </p:txBody>
@@ -9170,203 +12113,60 @@
         </p:nvSpPr>
         <p:spPr>
           <a:xfrm>
-            <a:off x="1325880" y="3566160"/>
-            <a:ext cx="6583680" cy="822960"/>
-          </a:xfrm>
-          <a:prstGeom prst="rect">
-            <a:avLst/>
-          </a:prstGeom>
-          <a:noFill/>
-        </p:spPr>
-        <p:txBody>
-          <a:bodyPr wrap="square" anchor="ctr" lIns="0" rIns="0" tIns="0" bIns="0"/>
+            <a:off x="8046720" y="2560320"/>
+            <a:ext cx="3291840" cy="365760"/>
+          </a:xfrm>
+          <a:prstGeom prst="rect">
+            <a:avLst/>
+          </a:prstGeom>
+          <a:noFill/>
+        </p:spPr>
+        <p:txBody>
+          <a:bodyPr wrap="square" anchor="t" lIns="0" rIns="0" tIns="0" bIns="0"/>
           <a:lstStyle/>
           <a:p>
             <a:pPr algn="l"/>
             <a:r>
-              <a:rPr sz="2000" b="0" i="0">
+              <a:rPr sz="1300" b="1" i="0">
+                <a:solidFill>
+                  <a:srgbClr val="A9C8F0"/>
+                </a:solidFill>
+                <a:latin typeface="Calibri"/>
+              </a:rPr>
+              <a:t>EXAMPLE</a:t>
+            </a:r>
+          </a:p>
+        </p:txBody>
+      </p:sp>
+      <p:sp>
+        <p:nvSpPr>
+          <p:cNvPr id="10" name="TextBox 9"/>
+          <p:cNvSpPr txBox="1"/>
+          <p:nvPr/>
+        </p:nvSpPr>
+        <p:spPr>
+          <a:xfrm>
+            <a:off x="8046720" y="2971800"/>
+            <a:ext cx="3291840" cy="2971800"/>
+          </a:xfrm>
+          <a:prstGeom prst="rect">
+            <a:avLst/>
+          </a:prstGeom>
+          <a:noFill/>
+        </p:spPr>
+        <p:txBody>
+          <a:bodyPr wrap="square" anchor="t" lIns="0" rIns="0" tIns="0" bIns="0"/>
+          <a:lstStyle/>
+          <a:p>
+            <a:pPr algn="l"/>
+            <a:r>
+              <a:rPr sz="1900" b="0" i="0">
                 <a:solidFill>
                   <a:srgbClr val="FFFFFF"/>
                 </a:solidFill>
-                <a:latin typeface="Calibri"/>
-              </a:rPr>
-              <a:t>Which test would find a slow website on launch day?</a:t>
-            </a:r>
-          </a:p>
-        </p:txBody>
-      </p:sp>
-      <p:sp>
-        <p:nvSpPr>
-          <p:cNvPr id="10" name="Rounded Rectangle 9"/>
-          <p:cNvSpPr/>
-          <p:nvPr/>
-        </p:nvSpPr>
-        <p:spPr>
-          <a:xfrm>
-            <a:off x="8229600" y="1645920"/>
-            <a:ext cx="3410712" cy="2926080"/>
-          </a:xfrm>
-          <a:prstGeom prst="roundRect">
-            <a:avLst>
-              <a:gd name="adj" fmla="val 8000"/>
-            </a:avLst>
-          </a:prstGeom>
-          <a:solidFill>
-            <a:srgbClr val="0645AD"/>
-          </a:solidFill>
-          <a:ln>
-            <a:noFill/>
-          </a:ln>
-          <a:effectLst/>
-        </p:spPr>
-        <p:style>
-          <a:lnRef idx="1">
-            <a:schemeClr val="accent1"/>
-          </a:lnRef>
-          <a:fillRef idx="3">
-            <a:schemeClr val="accent1"/>
-          </a:fillRef>
-          <a:effectRef idx="2">
-            <a:schemeClr val="accent1"/>
-          </a:effectRef>
-          <a:fontRef idx="minor">
-            <a:schemeClr val="lt1"/>
-          </a:fontRef>
-        </p:style>
-        <p:txBody>
-          <a:bodyPr rtlCol="0" anchor="ctr"/>
-          <a:lstStyle/>
-          <a:p/>
-        </p:txBody>
-      </p:sp>
-      <p:sp>
-        <p:nvSpPr>
-          <p:cNvPr id="11" name="TextBox 10"/>
-          <p:cNvSpPr txBox="1"/>
-          <p:nvPr/>
-        </p:nvSpPr>
-        <p:spPr>
-          <a:xfrm>
-            <a:off x="8503920" y="1874519"/>
-            <a:ext cx="2926080" cy="365760"/>
-          </a:xfrm>
-          <a:prstGeom prst="rect">
-            <a:avLst/>
-          </a:prstGeom>
-          <a:noFill/>
-        </p:spPr>
-        <p:txBody>
-          <a:bodyPr wrap="square" anchor="t" lIns="0" rIns="0" tIns="0" bIns="0"/>
-          <a:lstStyle/>
-          <a:p>
-            <a:pPr algn="l"/>
-            <a:r>
-              <a:rPr sz="1300" b="1" i="0">
-                <a:solidFill>
-                  <a:srgbClr val="A9C8F0"/>
-                </a:solidFill>
-                <a:latin typeface="Calibri"/>
-              </a:rPr>
-              <a:t>REVISE THIS TOPIC</a:t>
-            </a:r>
-          </a:p>
-        </p:txBody>
-      </p:sp>
-      <p:sp>
-        <p:nvSpPr>
-          <p:cNvPr id="12" name="TextBox 11"/>
-          <p:cNvSpPr txBox="1"/>
-          <p:nvPr/>
-        </p:nvSpPr>
-        <p:spPr>
-          <a:xfrm>
-            <a:off x="8503920" y="2286000"/>
-            <a:ext cx="2926080" cy="548640"/>
-          </a:xfrm>
-          <a:prstGeom prst="rect">
-            <a:avLst/>
-          </a:prstGeom>
-          <a:noFill/>
-        </p:spPr>
-        <p:txBody>
-          <a:bodyPr wrap="square" anchor="t" lIns="0" rIns="0" tIns="0" bIns="0"/>
-          <a:lstStyle/>
-          <a:p>
-            <a:pPr algn="l"/>
-            <a:r>
-              <a:rPr sz="1400" b="0" i="0">
-                <a:solidFill>
-                  <a:srgbClr val="FFFFFF"/>
-                </a:solidFill>
-                <a:latin typeface="Calibri"/>
-              </a:rPr>
-              <a:t>Revision notes for this lesson are on the study wiki:</a:t>
-            </a:r>
-          </a:p>
-        </p:txBody>
-      </p:sp>
-      <p:sp>
-        <p:nvSpPr>
-          <p:cNvPr id="13" name="TextBox 12"/>
-          <p:cNvSpPr txBox="1"/>
-          <p:nvPr/>
-        </p:nvSpPr>
-        <p:spPr>
-          <a:xfrm>
-            <a:off x="8503920" y="2926080"/>
-            <a:ext cx="2926080" cy="1463040"/>
-          </a:xfrm>
-          <a:prstGeom prst="rect">
-            <a:avLst/>
-          </a:prstGeom>
-          <a:noFill/>
-        </p:spPr>
-        <p:txBody>
-          <a:bodyPr wrap="square" anchor="t" lIns="0" rIns="0" tIns="0" bIns="0"/>
-          <a:lstStyle/>
-          <a:p>
-            <a:pPr algn="l"/>
-            <a:r>
-              <a:rPr sz="2000" b="1" i="0">
-                <a:solidFill>
-                  <a:srgbClr val="FFFFFF"/>
-                </a:solidFill>
                 <a:latin typeface="Cambria"/>
               </a:rPr>
-              <a:t>Core Paper 1: Problem Solving, Programming, Emerging Issues and Legislation</a:t>
-            </a:r>
-          </a:p>
-        </p:txBody>
-      </p:sp>
-      <p:sp>
-        <p:nvSpPr>
-          <p:cNvPr id="14" name="TextBox 13"/>
-          <p:cNvSpPr txBox="1"/>
-          <p:nvPr/>
-        </p:nvSpPr>
-        <p:spPr>
-          <a:xfrm>
-            <a:off x="548640" y="5669280"/>
-            <a:ext cx="11094415" cy="548640"/>
-          </a:xfrm>
-          <a:prstGeom prst="rect">
-            <a:avLst/>
-          </a:prstGeom>
-          <a:noFill/>
-        </p:spPr>
-        <p:txBody>
-          <a:bodyPr wrap="square" anchor="t" lIns="0" rIns="0" tIns="0" bIns="0"/>
-          <a:lstStyle/>
-          <a:p>
-            <a:pPr algn="l"/>
-            <a:r>
-              <a:rPr sz="1200" b="0" i="0">
-                <a:solidFill>
-                  <a:srgbClr val="A9C8F0"/>
-                </a:solidFill>
-                <a:latin typeface="Calibri"/>
-              </a:rPr>
-              <a:t>https://lana6478.github.io/T-level-Digital-Software-Development/#/01-core-component/01-core-paper-1.md</a:t>
+              <a:t>Test 5: guests upper boundary. Purpose: check 8 is accepted. Data: 8. Expected: accepted. Actual: rejected. The code uses &lt; 8 instead of &lt;= 8.</a:t>
             </a:r>
           </a:p>
         </p:txBody>
